--- a/docs/slides/howtune_final.pptx
+++ b/docs/slides/howtune_final.pptx
@@ -126,6 +126,426 @@
     </a:lvl9pPr>
   </p:defaultTextStyle>
 </p:presentation>
+</file>
+
+<file path=ppt/notesMasters/notesMaster1.xml><?xml version="1.0" encoding="utf-8"?>
+<p:notesMaster xmlns:a="http://schemas.openxmlformats.org/drawingml/2006/main" xmlns:p="http://schemas.openxmlformats.org/presentationml/2006/main" xmlns:r="http://schemas.openxmlformats.org/officeDocument/2006/relationships">
+  <p:cSld>
+    <p:bg>
+      <p:bgRef idx="1001">
+        <a:schemeClr val="bg1"/>
+      </p:bgRef>
+    </p:bg>
+    <p:spTree>
+      <p:nvGrpSpPr>
+        <p:cNvPr id="1" name=""/>
+        <p:cNvGrpSpPr/>
+        <p:nvPr/>
+      </p:nvGrpSpPr>
+      <p:grpSpPr>
+        <a:xfrm>
+          <a:off x="0" y="0"/>
+          <a:ext cx="0" cy="0"/>
+          <a:chOff x="0" y="0"/>
+          <a:chExt cx="0" cy="0"/>
+        </a:xfrm>
+      </p:grpSpPr>
+      <p:sp>
+        <p:nvSpPr>
+          <p:cNvPr id="2" name="Header Placeholder 1"/>
+          <p:cNvSpPr>
+            <a:spLocks noGrp="1"/>
+          </p:cNvSpPr>
+          <p:nvPr>
+            <p:ph type="hdr" sz="quarter"/>
+          </p:nvPr>
+        </p:nvSpPr>
+        <p:spPr>
+          <a:xfrm>
+            <a:off x="0" y="0"/>
+            <a:ext cx="2971800" cy="457200"/>
+          </a:xfrm>
+          <a:prstGeom prst="rect">
+            <a:avLst/>
+          </a:prstGeom>
+        </p:spPr>
+        <p:txBody>
+          <a:bodyPr vert="horz" lIns="91440" tIns="45720" rIns="91440" bIns="45720" rtlCol="0"/>
+          <a:lstStyle>
+            <a:lvl1pPr algn="l">
+              <a:defRPr sz="1200"/>
+            </a:lvl1pPr>
+          </a:lstStyle>
+          <a:p>
+            <a:endParaRPr lang="en-US"/>
+          </a:p>
+        </p:txBody>
+      </p:sp>
+      <p:sp>
+        <p:nvSpPr>
+          <p:cNvPr id="3" name="Date Placeholder 2"/>
+          <p:cNvSpPr>
+            <a:spLocks noGrp="1"/>
+          </p:cNvSpPr>
+          <p:nvPr>
+            <p:ph type="dt" idx="1"/>
+          </p:nvPr>
+        </p:nvSpPr>
+        <p:spPr>
+          <a:xfrm>
+            <a:off x="3884613" y="0"/>
+            <a:ext cx="2971800" cy="457200"/>
+          </a:xfrm>
+          <a:prstGeom prst="rect">
+            <a:avLst/>
+          </a:prstGeom>
+        </p:spPr>
+        <p:txBody>
+          <a:bodyPr vert="horz" lIns="91440" tIns="45720" rIns="91440" bIns="45720" rtlCol="0"/>
+          <a:lstStyle>
+            <a:lvl1pPr algn="r">
+              <a:defRPr sz="1200"/>
+            </a:lvl1pPr>
+          </a:lstStyle>
+          <a:p>
+            <a:fld id="{0F89C1C7-3DCD-1040-A9CF-14679D8B5DDD}" type="datetimeFigureOut">
+              <a:rPr lang="en-US" smtClean="0"/>
+              <a:t>10/17/16</a:t>
+            </a:fld>
+            <a:endParaRPr lang="en-US"/>
+          </a:p>
+        </p:txBody>
+      </p:sp>
+      <p:sp>
+        <p:nvSpPr>
+          <p:cNvPr id="4" name="Slide Image Placeholder 3"/>
+          <p:cNvSpPr>
+            <a:spLocks noGrp="1" noRot="1" noChangeAspect="1"/>
+          </p:cNvSpPr>
+          <p:nvPr>
+            <p:ph type="sldImg" idx="2"/>
+          </p:nvPr>
+        </p:nvSpPr>
+        <p:spPr>
+          <a:xfrm>
+            <a:off x="1143000" y="685800"/>
+            <a:ext cx="4572000" cy="3429000"/>
+          </a:xfrm>
+          <a:prstGeom prst="rect">
+            <a:avLst/>
+          </a:prstGeom>
+          <a:noFill/>
+          <a:ln w="12700">
+            <a:solidFill>
+              <a:prstClr val="black"/>
+            </a:solidFill>
+          </a:ln>
+        </p:spPr>
+        <p:txBody>
+          <a:bodyPr vert="horz" lIns="91440" tIns="45720" rIns="91440" bIns="45720" rtlCol="0" anchor="ctr"/>
+          <a:lstStyle/>
+          <a:p>
+            <a:endParaRPr lang="en-US"/>
+          </a:p>
+        </p:txBody>
+      </p:sp>
+      <p:sp>
+        <p:nvSpPr>
+          <p:cNvPr id="5" name="Notes Placeholder 4"/>
+          <p:cNvSpPr>
+            <a:spLocks noGrp="1"/>
+          </p:cNvSpPr>
+          <p:nvPr>
+            <p:ph type="body" sz="quarter" idx="3"/>
+          </p:nvPr>
+        </p:nvSpPr>
+        <p:spPr>
+          <a:xfrm>
+            <a:off x="685800" y="4343400"/>
+            <a:ext cx="5486400" cy="4114800"/>
+          </a:xfrm>
+          <a:prstGeom prst="rect">
+            <a:avLst/>
+          </a:prstGeom>
+        </p:spPr>
+        <p:txBody>
+          <a:bodyPr vert="horz" lIns="91440" tIns="45720" rIns="91440" bIns="45720" rtlCol="0"/>
+          <a:lstStyle/>
+          <a:p>
+            <a:pPr lvl="0"/>
+            <a:r>
+              <a:rPr lang="en-US" smtClean="0"/>
+              <a:t>Click to edit Master text styles</a:t>
+            </a:r>
+          </a:p>
+          <a:p>
+            <a:pPr lvl="1"/>
+            <a:r>
+              <a:rPr lang="en-US" smtClean="0"/>
+              <a:t>Second level</a:t>
+            </a:r>
+          </a:p>
+          <a:p>
+            <a:pPr lvl="2"/>
+            <a:r>
+              <a:rPr lang="en-US" smtClean="0"/>
+              <a:t>Third level</a:t>
+            </a:r>
+          </a:p>
+          <a:p>
+            <a:pPr lvl="3"/>
+            <a:r>
+              <a:rPr lang="en-US" smtClean="0"/>
+              <a:t>Fourth level</a:t>
+            </a:r>
+          </a:p>
+          <a:p>
+            <a:pPr lvl="4"/>
+            <a:r>
+              <a:rPr lang="en-US" smtClean="0"/>
+              <a:t>Fifth level</a:t>
+            </a:r>
+            <a:endParaRPr lang="en-US"/>
+          </a:p>
+        </p:txBody>
+      </p:sp>
+      <p:sp>
+        <p:nvSpPr>
+          <p:cNvPr id="6" name="Footer Placeholder 5"/>
+          <p:cNvSpPr>
+            <a:spLocks noGrp="1"/>
+          </p:cNvSpPr>
+          <p:nvPr>
+            <p:ph type="ftr" sz="quarter" idx="4"/>
+          </p:nvPr>
+        </p:nvSpPr>
+        <p:spPr>
+          <a:xfrm>
+            <a:off x="0" y="8685213"/>
+            <a:ext cx="2971800" cy="457200"/>
+          </a:xfrm>
+          <a:prstGeom prst="rect">
+            <a:avLst/>
+          </a:prstGeom>
+        </p:spPr>
+        <p:txBody>
+          <a:bodyPr vert="horz" lIns="91440" tIns="45720" rIns="91440" bIns="45720" rtlCol="0" anchor="b"/>
+          <a:lstStyle>
+            <a:lvl1pPr algn="l">
+              <a:defRPr sz="1200"/>
+            </a:lvl1pPr>
+          </a:lstStyle>
+          <a:p>
+            <a:endParaRPr lang="en-US"/>
+          </a:p>
+        </p:txBody>
+      </p:sp>
+      <p:sp>
+        <p:nvSpPr>
+          <p:cNvPr id="7" name="Slide Number Placeholder 6"/>
+          <p:cNvSpPr>
+            <a:spLocks noGrp="1"/>
+          </p:cNvSpPr>
+          <p:nvPr>
+            <p:ph type="sldNum" sz="quarter" idx="5"/>
+          </p:nvPr>
+        </p:nvSpPr>
+        <p:spPr>
+          <a:xfrm>
+            <a:off x="3884613" y="8685213"/>
+            <a:ext cx="2971800" cy="457200"/>
+          </a:xfrm>
+          <a:prstGeom prst="rect">
+            <a:avLst/>
+          </a:prstGeom>
+        </p:spPr>
+        <p:txBody>
+          <a:bodyPr vert="horz" lIns="91440" tIns="45720" rIns="91440" bIns="45720" rtlCol="0" anchor="b"/>
+          <a:lstStyle>
+            <a:lvl1pPr algn="r">
+              <a:defRPr sz="1200"/>
+            </a:lvl1pPr>
+          </a:lstStyle>
+          <a:p>
+            <a:fld id="{BB5E49A5-4136-284D-997B-48E1D791AD67}" type="slidenum">
+              <a:rPr lang="en-US" smtClean="0"/>
+              <a:t>‹#›</a:t>
+            </a:fld>
+            <a:endParaRPr lang="en-US"/>
+          </a:p>
+        </p:txBody>
+      </p:sp>
+    </p:spTree>
+    <p:extLst>
+      <p:ext uri="{BB962C8B-B14F-4D97-AF65-F5344CB8AC3E}">
+        <p14:creationId xmlns:p14="http://schemas.microsoft.com/office/powerpoint/2010/main" val="2623252185"/>
+      </p:ext>
+    </p:extLst>
+  </p:cSld>
+  <p:clrMap bg1="lt1" tx1="dk1" bg2="lt2" tx2="dk2" accent1="accent1" accent2="accent2" accent3="accent3" accent4="accent4" accent5="accent5" accent6="accent6" hlink="hlink" folHlink="folHlink"/>
+  <p:notesStyle>
+    <a:lvl1pPr marL="0" algn="l" defTabSz="457200" rtl="0" eaLnBrk="1" latinLnBrk="0" hangingPunct="1">
+      <a:defRPr sz="1200" kern="1200">
+        <a:solidFill>
+          <a:schemeClr val="tx1"/>
+        </a:solidFill>
+        <a:latin typeface="+mn-lt"/>
+        <a:ea typeface="+mn-ea"/>
+        <a:cs typeface="+mn-cs"/>
+      </a:defRPr>
+    </a:lvl1pPr>
+    <a:lvl2pPr marL="457200" algn="l" defTabSz="457200" rtl="0" eaLnBrk="1" latinLnBrk="0" hangingPunct="1">
+      <a:defRPr sz="1200" kern="1200">
+        <a:solidFill>
+          <a:schemeClr val="tx1"/>
+        </a:solidFill>
+        <a:latin typeface="+mn-lt"/>
+        <a:ea typeface="+mn-ea"/>
+        <a:cs typeface="+mn-cs"/>
+      </a:defRPr>
+    </a:lvl2pPr>
+    <a:lvl3pPr marL="914400" algn="l" defTabSz="457200" rtl="0" eaLnBrk="1" latinLnBrk="0" hangingPunct="1">
+      <a:defRPr sz="1200" kern="1200">
+        <a:solidFill>
+          <a:schemeClr val="tx1"/>
+        </a:solidFill>
+        <a:latin typeface="+mn-lt"/>
+        <a:ea typeface="+mn-ea"/>
+        <a:cs typeface="+mn-cs"/>
+      </a:defRPr>
+    </a:lvl3pPr>
+    <a:lvl4pPr marL="1371600" algn="l" defTabSz="457200" rtl="0" eaLnBrk="1" latinLnBrk="0" hangingPunct="1">
+      <a:defRPr sz="1200" kern="1200">
+        <a:solidFill>
+          <a:schemeClr val="tx1"/>
+        </a:solidFill>
+        <a:latin typeface="+mn-lt"/>
+        <a:ea typeface="+mn-ea"/>
+        <a:cs typeface="+mn-cs"/>
+      </a:defRPr>
+    </a:lvl4pPr>
+    <a:lvl5pPr marL="1828800" algn="l" defTabSz="457200" rtl="0" eaLnBrk="1" latinLnBrk="0" hangingPunct="1">
+      <a:defRPr sz="1200" kern="1200">
+        <a:solidFill>
+          <a:schemeClr val="tx1"/>
+        </a:solidFill>
+        <a:latin typeface="+mn-lt"/>
+        <a:ea typeface="+mn-ea"/>
+        <a:cs typeface="+mn-cs"/>
+      </a:defRPr>
+    </a:lvl5pPr>
+    <a:lvl6pPr marL="2286000" algn="l" defTabSz="457200" rtl="0" eaLnBrk="1" latinLnBrk="0" hangingPunct="1">
+      <a:defRPr sz="1200" kern="1200">
+        <a:solidFill>
+          <a:schemeClr val="tx1"/>
+        </a:solidFill>
+        <a:latin typeface="+mn-lt"/>
+        <a:ea typeface="+mn-ea"/>
+        <a:cs typeface="+mn-cs"/>
+      </a:defRPr>
+    </a:lvl6pPr>
+    <a:lvl7pPr marL="2743200" algn="l" defTabSz="457200" rtl="0" eaLnBrk="1" latinLnBrk="0" hangingPunct="1">
+      <a:defRPr sz="1200" kern="1200">
+        <a:solidFill>
+          <a:schemeClr val="tx1"/>
+        </a:solidFill>
+        <a:latin typeface="+mn-lt"/>
+        <a:ea typeface="+mn-ea"/>
+        <a:cs typeface="+mn-cs"/>
+      </a:defRPr>
+    </a:lvl7pPr>
+    <a:lvl8pPr marL="3200400" algn="l" defTabSz="457200" rtl="0" eaLnBrk="1" latinLnBrk="0" hangingPunct="1">
+      <a:defRPr sz="1200" kern="1200">
+        <a:solidFill>
+          <a:schemeClr val="tx1"/>
+        </a:solidFill>
+        <a:latin typeface="+mn-lt"/>
+        <a:ea typeface="+mn-ea"/>
+        <a:cs typeface="+mn-cs"/>
+      </a:defRPr>
+    </a:lvl8pPr>
+    <a:lvl9pPr marL="3657600" algn="l" defTabSz="457200" rtl="0" eaLnBrk="1" latinLnBrk="0" hangingPunct="1">
+      <a:defRPr sz="1200" kern="1200">
+        <a:solidFill>
+          <a:schemeClr val="tx1"/>
+        </a:solidFill>
+        <a:latin typeface="+mn-lt"/>
+        <a:ea typeface="+mn-ea"/>
+        <a:cs typeface="+mn-cs"/>
+      </a:defRPr>
+    </a:lvl9pPr>
+  </p:notesStyle>
+</p:notesMaster>
+</file>
+
+<file path=ppt/notesSlides/notesSlide1.xml><?xml version="1.0" encoding="utf-8"?>
+<p:notes xmlns:a="http://schemas.openxmlformats.org/drawingml/2006/main" xmlns:p="http://schemas.openxmlformats.org/presentationml/2006/main" xmlns:r="http://schemas.openxmlformats.org/officeDocument/2006/relationships">
+  <p:cSld>
+    <p:spTree>
+      <p:nvGrpSpPr>
+        <p:cNvPr id="1" name=""/>
+        <p:cNvGrpSpPr/>
+        <p:nvPr/>
+      </p:nvGrpSpPr>
+      <p:grpSpPr>
+        <a:xfrm>
+          <a:off x="0" y="0"/>
+          <a:ext cx="0" cy="0"/>
+          <a:chOff x="0" y="0"/>
+          <a:chExt cx="0" cy="0"/>
+        </a:xfrm>
+      </p:grpSpPr>
+      <p:sp>
+        <p:nvSpPr>
+          <p:cNvPr id="2" name="Slide Image Placeholder 1"/>
+          <p:cNvSpPr>
+            <a:spLocks noGrp="1"/>
+          </p:cNvSpPr>
+          <p:nvPr>
+            <p:ph type="sldImg" idx="2"/>
+          </p:nvPr>
+        </p:nvSpPr>
+        <p:spPr/>
+      </p:sp>
+      <p:sp>
+        <p:nvSpPr>
+          <p:cNvPr id="3" name="Notes Placeholder 2"/>
+          <p:cNvSpPr>
+            <a:spLocks noGrp="1"/>
+          </p:cNvSpPr>
+          <p:nvPr>
+            <p:ph type="body" idx="3" sz="quarter"/>
+          </p:nvPr>
+        </p:nvSpPr>
+        <p:spPr/>
+        <p:txBody>
+          <a:bodyPr/>
+          <a:lstStyle/>
+          <a:p>
+            <a:r>
+              <a:t>感想，音楽性にも着目したつながりを意識した</a:t>
+            </a:r>
+          </a:p>
+        </p:txBody>
+      </p:sp>
+      <p:sp>
+        <p:nvSpPr>
+          <p:cNvPr id="4" name="Slide Number Placeholder 3"/>
+          <p:cNvSpPr>
+            <a:spLocks noGrp="1"/>
+          </p:cNvSpPr>
+          <p:nvPr>
+            <p:ph type="sldNum" idx="5" sz="quarter"/>
+          </p:nvPr>
+        </p:nvSpPr>
+        <p:spPr/>
+      </p:sp>
+    </p:spTree>
+  </p:cSld>
+  <p:clrMapOvr>
+    <a:masterClrMapping/>
+  </p:clrMapOvr>
+</p:notes>
 </file>
 
 <file path=ppt/slideLayouts/slideLayout1.xml><?xml version="1.0" encoding="utf-8"?>
@@ -12561,7 +12981,7 @@
                 </a:solidFill>
                 <a:latin typeface="Inter"/>
               </a:rPr>
-              <a:t>Labeling is not enough.</a:t>
+              <a:t>聴き方は、伝わらない。</a:t>
             </a:r>
           </a:p>
         </p:txBody>
@@ -16489,4 +16909,324 @@
   </a:objectDefaults>
   <a:extraClrSchemeLst/>
 </a:theme>
+</file>
+
+<file path=ppt/theme/theme2.xml><?xml version="1.0" encoding="utf-8"?>
+<a:theme xmlns:a="http://schemas.openxmlformats.org/drawingml/2006/main" name="Office Theme">
+  <a:themeElements>
+    <a:clrScheme name="Office">
+      <a:dk1>
+        <a:sysClr val="windowText" lastClr="000000"/>
+      </a:dk1>
+      <a:lt1>
+        <a:sysClr val="window" lastClr="FFFFFF"/>
+      </a:lt1>
+      <a:dk2>
+        <a:srgbClr val="1F497D"/>
+      </a:dk2>
+      <a:lt2>
+        <a:srgbClr val="EEECE1"/>
+      </a:lt2>
+      <a:accent1>
+        <a:srgbClr val="4F81BD"/>
+      </a:accent1>
+      <a:accent2>
+        <a:srgbClr val="C0504D"/>
+      </a:accent2>
+      <a:accent3>
+        <a:srgbClr val="9BBB59"/>
+      </a:accent3>
+      <a:accent4>
+        <a:srgbClr val="8064A2"/>
+      </a:accent4>
+      <a:accent5>
+        <a:srgbClr val="4BACC6"/>
+      </a:accent5>
+      <a:accent6>
+        <a:srgbClr val="F79646"/>
+      </a:accent6>
+      <a:hlink>
+        <a:srgbClr val="0000FF"/>
+      </a:hlink>
+      <a:folHlink>
+        <a:srgbClr val="800080"/>
+      </a:folHlink>
+    </a:clrScheme>
+    <a:fontScheme name="Office">
+      <a:majorFont>
+        <a:latin typeface="Calibri"/>
+        <a:ea typeface=""/>
+        <a:cs typeface=""/>
+        <a:font script="Jpan" typeface="ＭＳ Ｐゴシック"/>
+        <a:font script="Hang" typeface="맑은 고딕"/>
+        <a:font script="Hans" typeface="宋体"/>
+        <a:font script="Hant" typeface="新細明體"/>
+        <a:font script="Arab" typeface="Times New Roman"/>
+        <a:font script="Hebr" typeface="Times New Roman"/>
+        <a:font script="Thai" typeface="Angsana New"/>
+        <a:font script="Ethi" typeface="Nyala"/>
+        <a:font script="Beng" typeface="Vrinda"/>
+        <a:font script="Gujr" typeface="Shruti"/>
+        <a:font script="Khmr" typeface="MoolBoran"/>
+        <a:font script="Knda" typeface="Tunga"/>
+        <a:font script="Guru" typeface="Raavi"/>
+        <a:font script="Cans" typeface="Euphemia"/>
+        <a:font script="Cher" typeface="Plantagenet Cherokee"/>
+        <a:font script="Yiii" typeface="Microsoft Yi Baiti"/>
+        <a:font script="Tibt" typeface="Microsoft Himalaya"/>
+        <a:font script="Thaa" typeface="MV Boli"/>
+        <a:font script="Deva" typeface="Mangal"/>
+        <a:font script="Telu" typeface="Gautami"/>
+        <a:font script="Taml" typeface="Latha"/>
+        <a:font script="Syrc" typeface="Estrangelo Edessa"/>
+        <a:font script="Orya" typeface="Kalinga"/>
+        <a:font script="Mlym" typeface="Kartika"/>
+        <a:font script="Laoo" typeface="DokChampa"/>
+        <a:font script="Sinh" typeface="Iskoola Pota"/>
+        <a:font script="Mong" typeface="Mongolian Baiti"/>
+        <a:font script="Viet" typeface="Times New Roman"/>
+        <a:font script="Uigh" typeface="Microsoft Uighur"/>
+        <a:font script="Geor" typeface="Sylfaen"/>
+      </a:majorFont>
+      <a:minorFont>
+        <a:latin typeface="Calibri"/>
+        <a:ea typeface=""/>
+        <a:cs typeface=""/>
+        <a:font script="Jpan" typeface="ＭＳ Ｐゴシック"/>
+        <a:font script="Hang" typeface="맑은 고딕"/>
+        <a:font script="Hans" typeface="宋体"/>
+        <a:font script="Hant" typeface="新細明體"/>
+        <a:font script="Arab" typeface="Arial"/>
+        <a:font script="Hebr" typeface="Arial"/>
+        <a:font script="Thai" typeface="Cordia New"/>
+        <a:font script="Ethi" typeface="Nyala"/>
+        <a:font script="Beng" typeface="Vrinda"/>
+        <a:font script="Gujr" typeface="Shruti"/>
+        <a:font script="Khmr" typeface="DaunPenh"/>
+        <a:font script="Knda" typeface="Tunga"/>
+        <a:font script="Guru" typeface="Raavi"/>
+        <a:font script="Cans" typeface="Euphemia"/>
+        <a:font script="Cher" typeface="Plantagenet Cherokee"/>
+        <a:font script="Yiii" typeface="Microsoft Yi Baiti"/>
+        <a:font script="Tibt" typeface="Microsoft Himalaya"/>
+        <a:font script="Thaa" typeface="MV Boli"/>
+        <a:font script="Deva" typeface="Mangal"/>
+        <a:font script="Telu" typeface="Gautami"/>
+        <a:font script="Taml" typeface="Latha"/>
+        <a:font script="Syrc" typeface="Estrangelo Edessa"/>
+        <a:font script="Orya" typeface="Kalinga"/>
+        <a:font script="Mlym" typeface="Kartika"/>
+        <a:font script="Laoo" typeface="DokChampa"/>
+        <a:font script="Sinh" typeface="Iskoola Pota"/>
+        <a:font script="Mong" typeface="Mongolian Baiti"/>
+        <a:font script="Viet" typeface="Arial"/>
+        <a:font script="Uigh" typeface="Microsoft Uighur"/>
+        <a:font script="Geor" typeface="Sylfaen"/>
+      </a:minorFont>
+    </a:fontScheme>
+    <a:fmtScheme name="Office">
+      <a:fillStyleLst>
+        <a:solidFill>
+          <a:schemeClr val="phClr"/>
+        </a:solidFill>
+        <a:gradFill rotWithShape="1">
+          <a:gsLst>
+            <a:gs pos="0">
+              <a:schemeClr val="phClr">
+                <a:tint val="50000"/>
+                <a:satMod val="300000"/>
+              </a:schemeClr>
+            </a:gs>
+            <a:gs pos="35000">
+              <a:schemeClr val="phClr">
+                <a:tint val="37000"/>
+                <a:satMod val="300000"/>
+              </a:schemeClr>
+            </a:gs>
+            <a:gs pos="100000">
+              <a:schemeClr val="phClr">
+                <a:tint val="15000"/>
+                <a:satMod val="350000"/>
+              </a:schemeClr>
+            </a:gs>
+          </a:gsLst>
+          <a:lin ang="16200000" scaled="1"/>
+        </a:gradFill>
+        <a:gradFill rotWithShape="1">
+          <a:gsLst>
+            <a:gs pos="0">
+              <a:schemeClr val="phClr">
+                <a:tint val="100000"/>
+                <a:shade val="100000"/>
+                <a:satMod val="130000"/>
+              </a:schemeClr>
+            </a:gs>
+            <a:gs pos="100000">
+              <a:schemeClr val="phClr">
+                <a:tint val="50000"/>
+                <a:shade val="100000"/>
+                <a:satMod val="350000"/>
+              </a:schemeClr>
+            </a:gs>
+          </a:gsLst>
+          <a:lin ang="16200000" scaled="0"/>
+        </a:gradFill>
+      </a:fillStyleLst>
+      <a:lnStyleLst>
+        <a:ln w="9525" cap="flat" cmpd="sng" algn="ctr">
+          <a:solidFill>
+            <a:schemeClr val="phClr">
+              <a:shade val="95000"/>
+              <a:satMod val="105000"/>
+            </a:schemeClr>
+          </a:solidFill>
+          <a:prstDash val="solid"/>
+        </a:ln>
+        <a:ln w="25400" cap="flat" cmpd="sng" algn="ctr">
+          <a:solidFill>
+            <a:schemeClr val="phClr"/>
+          </a:solidFill>
+          <a:prstDash val="solid"/>
+        </a:ln>
+        <a:ln w="38100" cap="flat" cmpd="sng" algn="ctr">
+          <a:solidFill>
+            <a:schemeClr val="phClr"/>
+          </a:solidFill>
+          <a:prstDash val="solid"/>
+        </a:ln>
+      </a:lnStyleLst>
+      <a:effectStyleLst>
+        <a:effectStyle>
+          <a:effectLst>
+            <a:outerShdw blurRad="40000" dist="20000" dir="5400000" rotWithShape="0">
+              <a:srgbClr val="000000">
+                <a:alpha val="38000"/>
+              </a:srgbClr>
+            </a:outerShdw>
+          </a:effectLst>
+        </a:effectStyle>
+        <a:effectStyle>
+          <a:effectLst>
+            <a:outerShdw blurRad="40000" dist="23000" dir="5400000" rotWithShape="0">
+              <a:srgbClr val="000000">
+                <a:alpha val="35000"/>
+              </a:srgbClr>
+            </a:outerShdw>
+          </a:effectLst>
+        </a:effectStyle>
+        <a:effectStyle>
+          <a:effectLst>
+            <a:outerShdw blurRad="40000" dist="23000" dir="5400000" rotWithShape="0">
+              <a:srgbClr val="000000">
+                <a:alpha val="35000"/>
+              </a:srgbClr>
+            </a:outerShdw>
+          </a:effectLst>
+          <a:scene3d>
+            <a:camera prst="orthographicFront">
+              <a:rot lat="0" lon="0" rev="0"/>
+            </a:camera>
+            <a:lightRig rig="threePt" dir="t">
+              <a:rot lat="0" lon="0" rev="1200000"/>
+            </a:lightRig>
+          </a:scene3d>
+          <a:sp3d>
+            <a:bevelT w="63500" h="25400"/>
+          </a:sp3d>
+        </a:effectStyle>
+      </a:effectStyleLst>
+      <a:bgFillStyleLst>
+        <a:solidFill>
+          <a:schemeClr val="phClr"/>
+        </a:solidFill>
+        <a:gradFill rotWithShape="1">
+          <a:gsLst>
+            <a:gs pos="0">
+              <a:schemeClr val="phClr">
+                <a:tint val="40000"/>
+                <a:satMod val="350000"/>
+              </a:schemeClr>
+            </a:gs>
+            <a:gs pos="40000">
+              <a:schemeClr val="phClr">
+                <a:tint val="45000"/>
+                <a:shade val="99000"/>
+                <a:satMod val="350000"/>
+              </a:schemeClr>
+            </a:gs>
+            <a:gs pos="100000">
+              <a:schemeClr val="phClr">
+                <a:shade val="20000"/>
+                <a:satMod val="255000"/>
+              </a:schemeClr>
+            </a:gs>
+          </a:gsLst>
+          <a:path path="circle">
+            <a:fillToRect l="50000" t="-80000" r="50000" b="180000"/>
+          </a:path>
+        </a:gradFill>
+        <a:gradFill rotWithShape="1">
+          <a:gsLst>
+            <a:gs pos="0">
+              <a:schemeClr val="phClr">
+                <a:tint val="80000"/>
+                <a:satMod val="300000"/>
+              </a:schemeClr>
+            </a:gs>
+            <a:gs pos="100000">
+              <a:schemeClr val="phClr">
+                <a:shade val="30000"/>
+                <a:satMod val="200000"/>
+              </a:schemeClr>
+            </a:gs>
+          </a:gsLst>
+          <a:path path="circle">
+            <a:fillToRect l="50000" t="50000" r="50000" b="50000"/>
+          </a:path>
+        </a:gradFill>
+      </a:bgFillStyleLst>
+    </a:fmtScheme>
+  </a:themeElements>
+  <a:objectDefaults>
+    <a:spDef>
+      <a:spPr/>
+      <a:bodyPr/>
+      <a:lstStyle/>
+      <a:style>
+        <a:lnRef idx="1">
+          <a:schemeClr val="accent1"/>
+        </a:lnRef>
+        <a:fillRef idx="3">
+          <a:schemeClr val="accent1"/>
+        </a:fillRef>
+        <a:effectRef idx="2">
+          <a:schemeClr val="accent1"/>
+        </a:effectRef>
+        <a:fontRef idx="minor">
+          <a:schemeClr val="lt1"/>
+        </a:fontRef>
+      </a:style>
+    </a:spDef>
+    <a:lnDef>
+      <a:spPr/>
+      <a:bodyPr/>
+      <a:lstStyle/>
+      <a:style>
+        <a:lnRef idx="2">
+          <a:schemeClr val="accent1"/>
+        </a:lnRef>
+        <a:fillRef idx="0">
+          <a:schemeClr val="accent1"/>
+        </a:fillRef>
+        <a:effectRef idx="1">
+          <a:schemeClr val="accent1"/>
+        </a:effectRef>
+        <a:fontRef idx="minor">
+          <a:schemeClr val="tx1"/>
+        </a:fontRef>
+      </a:style>
+    </a:lnDef>
+  </a:objectDefaults>
+  <a:extraClrSchemeLst/>
+</a:theme>
 </file>
--- a/docs/slides/howtune_final.pptx
+++ b/docs/slides/howtune_final.pptx
@@ -4987,8 +4987,8 @@
         </p:nvSpPr>
         <p:spPr>
           <a:xfrm>
-            <a:off x="914400" y="2468880"/>
-            <a:ext cx="3210458" cy="1554480"/>
+            <a:off x="914400" y="2423160"/>
+            <a:ext cx="3210458" cy="1691640"/>
           </a:xfrm>
           <a:prstGeom prst="roundRect">
             <a:avLst>
@@ -5031,50 +5031,30 @@
           </a:p>
         </p:txBody>
       </p:sp>
-      <p:sp>
-        <p:nvSpPr>
-          <p:cNvPr id="7" name="Oval 6"/>
-          <p:cNvSpPr/>
-          <p:nvPr/>
-        </p:nvSpPr>
-        <p:spPr>
-          <a:xfrm>
-            <a:off x="1280160" y="2834640"/>
-            <a:ext cx="256032" cy="256032"/>
-          </a:xfrm>
-          <a:prstGeom prst="ellipse">
-            <a:avLst/>
-          </a:prstGeom>
-          <a:solidFill>
-            <a:srgbClr val="0A84FF"/>
-          </a:solidFill>
-          <a:ln>
-            <a:noFill/>
-          </a:ln>
-          <a:effectLst/>
-        </p:spPr>
-        <p:style>
-          <a:lnRef idx="1">
-            <a:schemeClr val="accent1"/>
-          </a:lnRef>
-          <a:fillRef idx="3">
-            <a:schemeClr val="accent1"/>
-          </a:fillRef>
-          <a:effectRef idx="2">
-            <a:schemeClr val="accent1"/>
-          </a:effectRef>
-          <a:fontRef idx="minor">
-            <a:schemeClr val="lt1"/>
-          </a:fontRef>
-        </p:style>
-        <p:txBody>
-          <a:bodyPr rtlCol="0" anchor="ctr"/>
-          <a:lstStyle/>
-          <a:p>
-            <a:pPr algn="ctr"/>
-          </a:p>
-        </p:txBody>
-      </p:sp>
+      <p:pic>
+        <p:nvPicPr>
+          <p:cNvPr id="7" name="Picture 6" descr="swift.png"/>
+          <p:cNvPicPr>
+            <a:picLocks noChangeAspect="1"/>
+          </p:cNvPicPr>
+          <p:nvPr/>
+        </p:nvPicPr>
+        <p:blipFill>
+          <a:blip r:embed="rId2"/>
+          <a:stretch>
+            <a:fillRect/>
+          </a:stretch>
+        </p:blipFill>
+        <p:spPr>
+          <a:xfrm>
+            <a:off x="2190445" y="2624328"/>
+            <a:ext cx="658368" cy="658368"/>
+          </a:xfrm>
+          <a:prstGeom prst="rect">
+            <a:avLst/>
+          </a:prstGeom>
+        </p:spPr>
+      </p:pic>
       <p:sp>
         <p:nvSpPr>
           <p:cNvPr id="8" name="TextBox 7"/>
@@ -5083,8 +5063,8 @@
         </p:nvSpPr>
         <p:spPr>
           <a:xfrm>
-            <a:off x="1691640" y="2761488"/>
-            <a:ext cx="2296058" cy="457200"/>
+            <a:off x="914400" y="3410712"/>
+            <a:ext cx="3210458" cy="347472"/>
           </a:xfrm>
           <a:prstGeom prst="rect">
             <a:avLst/>
@@ -5097,9 +5077,9 @@
           </a:bodyPr>
           <a:lstStyle/>
           <a:p>
-            <a:pPr algn="l"/>
-            <a:r>
-              <a:rPr sz="1600" b="1" i="0">
+            <a:pPr algn="ctr"/>
+            <a:r>
+              <a:rPr sz="1500" b="1" i="0">
                 <a:solidFill>
                   <a:srgbClr val="0A84FF"/>
                 </a:solidFill>
@@ -5118,8 +5098,8 @@
         </p:nvSpPr>
         <p:spPr>
           <a:xfrm>
-            <a:off x="1298448" y="3337560"/>
-            <a:ext cx="2570378" cy="548640"/>
+            <a:off x="1097280" y="3776472"/>
+            <a:ext cx="2844698" cy="329184"/>
           </a:xfrm>
           <a:prstGeom prst="rect">
             <a:avLst/>
@@ -5132,11 +5112,11 @@
           </a:bodyPr>
           <a:lstStyle/>
           <a:p>
-            <a:pPr algn="l"/>
-            <a:r>
-              <a:rPr sz="1600" b="0" i="0">
-                <a:solidFill>
-                  <a:srgbClr val="FFFFFF"/>
+            <a:pPr algn="ctr"/>
+            <a:r>
+              <a:rPr sz="1300" b="0" i="0">
+                <a:solidFill>
+                  <a:srgbClr val="B8B8BE"/>
                 </a:solidFill>
                 <a:latin typeface="Inter"/>
               </a:rPr>
@@ -5153,8 +5133,8 @@
         </p:nvSpPr>
         <p:spPr>
           <a:xfrm>
-            <a:off x="4490618" y="2468880"/>
-            <a:ext cx="3210458" cy="1554480"/>
+            <a:off x="4490618" y="2423160"/>
+            <a:ext cx="3210458" cy="1691640"/>
           </a:xfrm>
           <a:prstGeom prst="roundRect">
             <a:avLst>
@@ -5197,50 +5177,30 @@
           </a:p>
         </p:txBody>
       </p:sp>
-      <p:sp>
-        <p:nvSpPr>
-          <p:cNvPr id="11" name="Oval 10"/>
-          <p:cNvSpPr/>
-          <p:nvPr/>
-        </p:nvSpPr>
-        <p:spPr>
-          <a:xfrm>
-            <a:off x="4856378" y="2834640"/>
-            <a:ext cx="256032" cy="256032"/>
-          </a:xfrm>
-          <a:prstGeom prst="ellipse">
-            <a:avLst/>
-          </a:prstGeom>
-          <a:solidFill>
-            <a:srgbClr val="64D2FF"/>
-          </a:solidFill>
-          <a:ln>
-            <a:noFill/>
-          </a:ln>
-          <a:effectLst/>
-        </p:spPr>
-        <p:style>
-          <a:lnRef idx="1">
-            <a:schemeClr val="accent1"/>
-          </a:lnRef>
-          <a:fillRef idx="3">
-            <a:schemeClr val="accent1"/>
-          </a:fillRef>
-          <a:effectRef idx="2">
-            <a:schemeClr val="accent1"/>
-          </a:effectRef>
-          <a:fontRef idx="minor">
-            <a:schemeClr val="lt1"/>
-          </a:fontRef>
-        </p:style>
-        <p:txBody>
-          <a:bodyPr rtlCol="0" anchor="ctr"/>
-          <a:lstStyle/>
-          <a:p>
-            <a:pPr algn="ctr"/>
-          </a:p>
-        </p:txBody>
-      </p:sp>
+      <p:pic>
+        <p:nvPicPr>
+          <p:cNvPr id="11" name="Picture 10" descr="musixmatch.png"/>
+          <p:cNvPicPr>
+            <a:picLocks noChangeAspect="1"/>
+          </p:cNvPicPr>
+          <p:nvPr/>
+        </p:nvPicPr>
+        <p:blipFill>
+          <a:blip r:embed="rId3"/>
+          <a:stretch>
+            <a:fillRect/>
+          </a:stretch>
+        </p:blipFill>
+        <p:spPr>
+          <a:xfrm>
+            <a:off x="5766663" y="2624328"/>
+            <a:ext cx="658368" cy="658368"/>
+          </a:xfrm>
+          <a:prstGeom prst="rect">
+            <a:avLst/>
+          </a:prstGeom>
+        </p:spPr>
+      </p:pic>
       <p:sp>
         <p:nvSpPr>
           <p:cNvPr id="12" name="TextBox 11"/>
@@ -5249,8 +5209,8 @@
         </p:nvSpPr>
         <p:spPr>
           <a:xfrm>
-            <a:off x="5267858" y="2761488"/>
-            <a:ext cx="2296058" cy="457200"/>
+            <a:off x="4490618" y="3410712"/>
+            <a:ext cx="3210458" cy="347472"/>
           </a:xfrm>
           <a:prstGeom prst="rect">
             <a:avLst/>
@@ -5263,9 +5223,9 @@
           </a:bodyPr>
           <a:lstStyle/>
           <a:p>
-            <a:pPr algn="l"/>
-            <a:r>
-              <a:rPr sz="1600" b="1" i="0">
+            <a:pPr algn="ctr"/>
+            <a:r>
+              <a:rPr sz="1500" b="1" i="0">
                 <a:solidFill>
                   <a:srgbClr val="64D2FF"/>
                 </a:solidFill>
@@ -5284,8 +5244,8 @@
         </p:nvSpPr>
         <p:spPr>
           <a:xfrm>
-            <a:off x="4874666" y="3337560"/>
-            <a:ext cx="2570378" cy="548640"/>
+            <a:off x="4673498" y="3776472"/>
+            <a:ext cx="2844698" cy="329184"/>
           </a:xfrm>
           <a:prstGeom prst="rect">
             <a:avLst/>
@@ -5298,11 +5258,11 @@
           </a:bodyPr>
           <a:lstStyle/>
           <a:p>
-            <a:pPr algn="l"/>
-            <a:r>
-              <a:rPr sz="1600" b="0" i="0">
-                <a:solidFill>
-                  <a:srgbClr val="FFFFFF"/>
+            <a:pPr algn="ctr"/>
+            <a:r>
+              <a:rPr sz="1300" b="0" i="0">
+                <a:solidFill>
+                  <a:srgbClr val="B8B8BE"/>
                 </a:solidFill>
                 <a:latin typeface="Inter"/>
               </a:rPr>
@@ -5319,8 +5279,8 @@
         </p:nvSpPr>
         <p:spPr>
           <a:xfrm>
-            <a:off x="8066836" y="2468880"/>
-            <a:ext cx="3210458" cy="1554480"/>
+            <a:off x="8066836" y="2423160"/>
+            <a:ext cx="3210458" cy="1691640"/>
           </a:xfrm>
           <a:prstGeom prst="roundRect">
             <a:avLst>
@@ -5363,50 +5323,30 @@
           </a:p>
         </p:txBody>
       </p:sp>
-      <p:sp>
-        <p:nvSpPr>
-          <p:cNvPr id="15" name="Oval 14"/>
-          <p:cNvSpPr/>
-          <p:nvPr/>
-        </p:nvSpPr>
-        <p:spPr>
-          <a:xfrm>
-            <a:off x="8432596" y="2834640"/>
-            <a:ext cx="256032" cy="256032"/>
-          </a:xfrm>
-          <a:prstGeom prst="ellipse">
-            <a:avLst/>
-          </a:prstGeom>
-          <a:solidFill>
-            <a:srgbClr val="30D158"/>
-          </a:solidFill>
-          <a:ln>
-            <a:noFill/>
-          </a:ln>
-          <a:effectLst/>
-        </p:spPr>
-        <p:style>
-          <a:lnRef idx="1">
-            <a:schemeClr val="accent1"/>
-          </a:lnRef>
-          <a:fillRef idx="3">
-            <a:schemeClr val="accent1"/>
-          </a:fillRef>
-          <a:effectRef idx="2">
-            <a:schemeClr val="accent1"/>
-          </a:effectRef>
-          <a:fontRef idx="minor">
-            <a:schemeClr val="lt1"/>
-          </a:fontRef>
-        </p:style>
-        <p:txBody>
-          <a:bodyPr rtlCol="0" anchor="ctr"/>
-          <a:lstStyle/>
-          <a:p>
-            <a:pPr algn="ctr"/>
-          </a:p>
-        </p:txBody>
-      </p:sp>
+      <p:pic>
+        <p:nvPicPr>
+          <p:cNvPr id="15" name="Picture 14" descr="anthropic.png"/>
+          <p:cNvPicPr>
+            <a:picLocks noChangeAspect="1"/>
+          </p:cNvPicPr>
+          <p:nvPr/>
+        </p:nvPicPr>
+        <p:blipFill>
+          <a:blip r:embed="rId4"/>
+          <a:stretch>
+            <a:fillRect/>
+          </a:stretch>
+        </p:blipFill>
+        <p:spPr>
+          <a:xfrm>
+            <a:off x="9342881" y="2624328"/>
+            <a:ext cx="658368" cy="658368"/>
+          </a:xfrm>
+          <a:prstGeom prst="rect">
+            <a:avLst/>
+          </a:prstGeom>
+        </p:spPr>
+      </p:pic>
       <p:sp>
         <p:nvSpPr>
           <p:cNvPr id="16" name="TextBox 15"/>
@@ -5415,8 +5355,8 @@
         </p:nvSpPr>
         <p:spPr>
           <a:xfrm>
-            <a:off x="8844076" y="2761488"/>
-            <a:ext cx="2296058" cy="457200"/>
+            <a:off x="8066836" y="3410712"/>
+            <a:ext cx="3210458" cy="347472"/>
           </a:xfrm>
           <a:prstGeom prst="rect">
             <a:avLst/>
@@ -5429,15 +5369,15 @@
           </a:bodyPr>
           <a:lstStyle/>
           <a:p>
-            <a:pPr algn="l"/>
-            <a:r>
-              <a:rPr sz="1600" b="1" i="0">
-                <a:solidFill>
-                  <a:srgbClr val="30D158"/>
-                </a:solidFill>
-                <a:latin typeface="Inter"/>
-              </a:rPr>
-              <a:t>Groove</a:t>
+            <a:pPr algn="ctr"/>
+            <a:r>
+              <a:rPr sz="1500" b="1" i="0">
+                <a:solidFill>
+                  <a:srgbClr val="FF9F0A"/>
+                </a:solidFill>
+                <a:latin typeface="Inter"/>
+              </a:rPr>
+              <a:t>AI</a:t>
             </a:r>
           </a:p>
         </p:txBody>
@@ -5450,8 +5390,8 @@
         </p:nvSpPr>
         <p:spPr>
           <a:xfrm>
-            <a:off x="8450884" y="3337560"/>
-            <a:ext cx="2570378" cy="548640"/>
+            <a:off x="8249716" y="3776472"/>
+            <a:ext cx="2844698" cy="329184"/>
           </a:xfrm>
           <a:prstGeom prst="rect">
             <a:avLst/>
@@ -5464,15 +5404,15 @@
           </a:bodyPr>
           <a:lstStyle/>
           <a:p>
-            <a:pPr algn="l"/>
-            <a:r>
-              <a:rPr sz="1600" b="0" i="0">
-                <a:solidFill>
-                  <a:srgbClr val="FFFFFF"/>
-                </a:solidFill>
-                <a:latin typeface="Inter"/>
-              </a:rPr>
-              <a:t>音量 + 本体モーション</a:t>
+            <a:pPr algn="ctr"/>
+            <a:r>
+              <a:rPr sz="1300" b="0" i="0">
+                <a:solidFill>
+                  <a:srgbClr val="B8B8BE"/>
+                </a:solidFill>
+                <a:latin typeface="Inter"/>
+              </a:rPr>
+              <a:t>Claude (backend 経由)</a:t>
             </a:r>
           </a:p>
         </p:txBody>
@@ -5485,8 +5425,8 @@
         </p:nvSpPr>
         <p:spPr>
           <a:xfrm>
-            <a:off x="914400" y="4389120"/>
-            <a:ext cx="3210458" cy="1554480"/>
+            <a:off x="914400" y="4370832"/>
+            <a:ext cx="3210458" cy="1691640"/>
           </a:xfrm>
           <a:prstGeom prst="roundRect">
             <a:avLst>
@@ -5537,14 +5477,14 @@
         </p:nvSpPr>
         <p:spPr>
           <a:xfrm>
-            <a:off x="1280160" y="4754880"/>
-            <a:ext cx="256032" cy="256032"/>
+            <a:off x="2355037" y="4736592"/>
+            <a:ext cx="329184" cy="329184"/>
           </a:xfrm>
           <a:prstGeom prst="ellipse">
             <a:avLst/>
           </a:prstGeom>
           <a:solidFill>
-            <a:srgbClr val="FF9F0A"/>
+            <a:srgbClr val="30D158"/>
           </a:solidFill>
           <a:ln>
             <a:noFill/>
@@ -5581,8 +5521,8 @@
         </p:nvSpPr>
         <p:spPr>
           <a:xfrm>
-            <a:off x="1691640" y="4681728"/>
-            <a:ext cx="2296058" cy="457200"/>
+            <a:off x="914400" y="5358384"/>
+            <a:ext cx="3210458" cy="347472"/>
           </a:xfrm>
           <a:prstGeom prst="rect">
             <a:avLst/>
@@ -5595,15 +5535,15 @@
           </a:bodyPr>
           <a:lstStyle/>
           <a:p>
-            <a:pPr algn="l"/>
-            <a:r>
-              <a:rPr sz="1600" b="1" i="0">
-                <a:solidFill>
-                  <a:srgbClr val="FF9F0A"/>
-                </a:solidFill>
-                <a:latin typeface="Inter"/>
-              </a:rPr>
-              <a:t>AI</a:t>
+            <a:pPr algn="ctr"/>
+            <a:r>
+              <a:rPr sz="1500" b="1" i="0">
+                <a:solidFill>
+                  <a:srgbClr val="30D158"/>
+                </a:solidFill>
+                <a:latin typeface="Inter"/>
+              </a:rPr>
+              <a:t>Groove</a:t>
             </a:r>
           </a:p>
         </p:txBody>
@@ -5616,8 +5556,8 @@
         </p:nvSpPr>
         <p:spPr>
           <a:xfrm>
-            <a:off x="1298448" y="5257800"/>
-            <a:ext cx="2570378" cy="548640"/>
+            <a:off x="1097280" y="5724144"/>
+            <a:ext cx="2844698" cy="329184"/>
           </a:xfrm>
           <a:prstGeom prst="rect">
             <a:avLst/>
@@ -5630,15 +5570,15 @@
           </a:bodyPr>
           <a:lstStyle/>
           <a:p>
-            <a:pPr algn="l"/>
-            <a:r>
-              <a:rPr sz="1600" b="0" i="0">
-                <a:solidFill>
-                  <a:srgbClr val="FFFFFF"/>
-                </a:solidFill>
-                <a:latin typeface="Inter"/>
-              </a:rPr>
-              <a:t>Claude (backend経由)</a:t>
+            <a:pPr algn="ctr"/>
+            <a:r>
+              <a:rPr sz="1300" b="0" i="0">
+                <a:solidFill>
+                  <a:srgbClr val="B8B8BE"/>
+                </a:solidFill>
+                <a:latin typeface="Inter"/>
+              </a:rPr>
+              <a:t>音量 + 本体モーション</a:t>
             </a:r>
           </a:p>
         </p:txBody>
@@ -5651,8 +5591,8 @@
         </p:nvSpPr>
         <p:spPr>
           <a:xfrm>
-            <a:off x="4490618" y="4389120"/>
-            <a:ext cx="3210458" cy="1554480"/>
+            <a:off x="4490618" y="4370832"/>
+            <a:ext cx="3210458" cy="1691640"/>
           </a:xfrm>
           <a:prstGeom prst="roundRect">
             <a:avLst>
@@ -5695,50 +5635,30 @@
           </a:p>
         </p:txBody>
       </p:sp>
-      <p:sp>
-        <p:nvSpPr>
-          <p:cNvPr id="23" name="Oval 22"/>
-          <p:cNvSpPr/>
-          <p:nvPr/>
-        </p:nvSpPr>
-        <p:spPr>
-          <a:xfrm>
-            <a:off x="4856378" y="4754880"/>
-            <a:ext cx="256032" cy="256032"/>
-          </a:xfrm>
-          <a:prstGeom prst="ellipse">
-            <a:avLst/>
-          </a:prstGeom>
-          <a:solidFill>
-            <a:srgbClr val="BF5AF2"/>
-          </a:solidFill>
-          <a:ln>
-            <a:noFill/>
-          </a:ln>
-          <a:effectLst/>
-        </p:spPr>
-        <p:style>
-          <a:lnRef idx="1">
-            <a:schemeClr val="accent1"/>
-          </a:lnRef>
-          <a:fillRef idx="3">
-            <a:schemeClr val="accent1"/>
-          </a:fillRef>
-          <a:effectRef idx="2">
-            <a:schemeClr val="accent1"/>
-          </a:effectRef>
-          <a:fontRef idx="minor">
-            <a:schemeClr val="lt1"/>
-          </a:fontRef>
-        </p:style>
-        <p:txBody>
-          <a:bodyPr rtlCol="0" anchor="ctr"/>
-          <a:lstStyle/>
-          <a:p>
-            <a:pPr algn="ctr"/>
-          </a:p>
-        </p:txBody>
-      </p:sp>
+      <p:pic>
+        <p:nvPicPr>
+          <p:cNvPr id="23" name="Picture 22" descr="createml.png"/>
+          <p:cNvPicPr>
+            <a:picLocks noChangeAspect="1"/>
+          </p:cNvPicPr>
+          <p:nvPr/>
+        </p:nvPicPr>
+        <p:blipFill>
+          <a:blip r:embed="rId5"/>
+          <a:stretch>
+            <a:fillRect/>
+          </a:stretch>
+        </p:blipFill>
+        <p:spPr>
+          <a:xfrm>
+            <a:off x="5766663" y="4572000"/>
+            <a:ext cx="658368" cy="658368"/>
+          </a:xfrm>
+          <a:prstGeom prst="rect">
+            <a:avLst/>
+          </a:prstGeom>
+        </p:spPr>
+      </p:pic>
       <p:sp>
         <p:nvSpPr>
           <p:cNvPr id="24" name="TextBox 23"/>
@@ -5747,8 +5667,8 @@
         </p:nvSpPr>
         <p:spPr>
           <a:xfrm>
-            <a:off x="5267858" y="4681728"/>
-            <a:ext cx="2296058" cy="457200"/>
+            <a:off x="4490618" y="5358384"/>
+            <a:ext cx="3210458" cy="347472"/>
           </a:xfrm>
           <a:prstGeom prst="rect">
             <a:avLst/>
@@ -5761,9 +5681,9 @@
           </a:bodyPr>
           <a:lstStyle/>
           <a:p>
-            <a:pPr algn="l"/>
-            <a:r>
-              <a:rPr sz="1600" b="1" i="0">
+            <a:pPr algn="ctr"/>
+            <a:r>
+              <a:rPr sz="1500" b="1" i="0">
                 <a:solidFill>
                   <a:srgbClr val="BF5AF2"/>
                 </a:solidFill>
@@ -5782,8 +5702,8 @@
         </p:nvSpPr>
         <p:spPr>
           <a:xfrm>
-            <a:off x="4874666" y="5257800"/>
-            <a:ext cx="2570378" cy="548640"/>
+            <a:off x="4673498" y="5724144"/>
+            <a:ext cx="2844698" cy="329184"/>
           </a:xfrm>
           <a:prstGeom prst="rect">
             <a:avLst/>
@@ -5796,11 +5716,11 @@
           </a:bodyPr>
           <a:lstStyle/>
           <a:p>
-            <a:pPr algn="l"/>
-            <a:r>
-              <a:rPr sz="1600" b="0" i="0">
-                <a:solidFill>
-                  <a:srgbClr val="FFFFFF"/>
+            <a:pPr algn="ctr"/>
+            <a:r>
+              <a:rPr sz="1300" b="0" i="0">
+                <a:solidFill>
+                  <a:srgbClr val="B8B8BE"/>
                 </a:solidFill>
                 <a:latin typeface="Inter"/>
               </a:rPr>
@@ -5817,8 +5737,8 @@
         </p:nvSpPr>
         <p:spPr>
           <a:xfrm>
-            <a:off x="8066836" y="4389120"/>
-            <a:ext cx="3210458" cy="1554480"/>
+            <a:off x="8066836" y="4370832"/>
+            <a:ext cx="3210458" cy="1691640"/>
           </a:xfrm>
           <a:prstGeom prst="roundRect">
             <a:avLst>
@@ -5861,50 +5781,30 @@
           </a:p>
         </p:txBody>
       </p:sp>
-      <p:sp>
-        <p:nvSpPr>
-          <p:cNvPr id="27" name="Oval 26"/>
-          <p:cNvSpPr/>
-          <p:nvPr/>
-        </p:nvSpPr>
-        <p:spPr>
-          <a:xfrm>
-            <a:off x="8432596" y="4754880"/>
-            <a:ext cx="256032" cy="256032"/>
-          </a:xfrm>
-          <a:prstGeom prst="ellipse">
-            <a:avLst/>
-          </a:prstGeom>
-          <a:solidFill>
-            <a:srgbClr val="FF375F"/>
-          </a:solidFill>
-          <a:ln>
-            <a:noFill/>
-          </a:ln>
-          <a:effectLst/>
-        </p:spPr>
-        <p:style>
-          <a:lnRef idx="1">
-            <a:schemeClr val="accent1"/>
-          </a:lnRef>
-          <a:fillRef idx="3">
-            <a:schemeClr val="accent1"/>
-          </a:fillRef>
-          <a:effectRef idx="2">
-            <a:schemeClr val="accent1"/>
-          </a:effectRef>
-          <a:fontRef idx="minor">
-            <a:schemeClr val="lt1"/>
-          </a:fontRef>
-        </p:style>
-        <p:txBody>
-          <a:bodyPr rtlCol="0" anchor="ctr"/>
-          <a:lstStyle/>
-          <a:p>
-            <a:pPr algn="ctr"/>
-          </a:p>
-        </p:txBody>
-      </p:sp>
+      <p:pic>
+        <p:nvPicPr>
+          <p:cNvPr id="27" name="Picture 26" descr="firebase.png"/>
+          <p:cNvPicPr>
+            <a:picLocks noChangeAspect="1"/>
+          </p:cNvPicPr>
+          <p:nvPr/>
+        </p:nvPicPr>
+        <p:blipFill>
+          <a:blip r:embed="rId6"/>
+          <a:stretch>
+            <a:fillRect/>
+          </a:stretch>
+        </p:blipFill>
+        <p:spPr>
+          <a:xfrm>
+            <a:off x="9342881" y="4572000"/>
+            <a:ext cx="658368" cy="658368"/>
+          </a:xfrm>
+          <a:prstGeom prst="rect">
+            <a:avLst/>
+          </a:prstGeom>
+        </p:spPr>
+      </p:pic>
       <p:sp>
         <p:nvSpPr>
           <p:cNvPr id="28" name="TextBox 27"/>
@@ -5913,8 +5813,8 @@
         </p:nvSpPr>
         <p:spPr>
           <a:xfrm>
-            <a:off x="8844076" y="4681728"/>
-            <a:ext cx="2296058" cy="457200"/>
+            <a:off x="8066836" y="5358384"/>
+            <a:ext cx="3210458" cy="347472"/>
           </a:xfrm>
           <a:prstGeom prst="rect">
             <a:avLst/>
@@ -5927,9 +5827,9 @@
           </a:bodyPr>
           <a:lstStyle/>
           <a:p>
-            <a:pPr algn="l"/>
-            <a:r>
-              <a:rPr sz="1600" b="1" i="0">
+            <a:pPr algn="ctr"/>
+            <a:r>
+              <a:rPr sz="1500" b="1" i="0">
                 <a:solidFill>
                   <a:srgbClr val="FF375F"/>
                 </a:solidFill>
@@ -5948,8 +5848,8 @@
         </p:nvSpPr>
         <p:spPr>
           <a:xfrm>
-            <a:off x="8450884" y="5257800"/>
-            <a:ext cx="2570378" cy="548640"/>
+            <a:off x="8249716" y="5724144"/>
+            <a:ext cx="2844698" cy="329184"/>
           </a:xfrm>
           <a:prstGeom prst="rect">
             <a:avLst/>
@@ -5962,11 +5862,11 @@
           </a:bodyPr>
           <a:lstStyle/>
           <a:p>
-            <a:pPr algn="l"/>
-            <a:r>
-              <a:rPr sz="1600" b="0" i="0">
-                <a:solidFill>
-                  <a:srgbClr val="FFFFFF"/>
+            <a:pPr algn="ctr"/>
+            <a:r>
+              <a:rPr sz="1300" b="0" i="0">
+                <a:solidFill>
+                  <a:srgbClr val="B8B8BE"/>
                 </a:solidFill>
                 <a:latin typeface="Inter"/>
               </a:rPr>
@@ -7128,7 +7028,7 @@
         <p:spPr>
           <a:xfrm>
             <a:off x="914400" y="2514600"/>
-            <a:ext cx="3179978" cy="3657600"/>
+            <a:ext cx="3179978" cy="3566160"/>
           </a:xfrm>
           <a:prstGeom prst="roundRect">
             <a:avLst>
@@ -7137,7 +7037,7 @@
           </a:prstGeom>
           <a:solidFill>
             <a:srgbClr val="1C1C1E">
-              <a:alpha val="45000"/>
+              <a:alpha val="42000"/>
             </a:srgbClr>
           </a:solidFill>
           <a:ln w="12700">
@@ -7173,31 +7073,21 @@
       </p:sp>
       <p:sp>
         <p:nvSpPr>
-          <p:cNvPr id="7" name="Rectangle 6"/>
+          <p:cNvPr id="7" name="Oval 6"/>
           <p:cNvSpPr/>
           <p:nvPr/>
         </p:nvSpPr>
         <p:spPr>
           <a:xfrm>
-            <a:off x="914400" y="2514600"/>
-            <a:ext cx="3179978" cy="822960"/>
-          </a:xfrm>
-          <a:prstGeom prst="roundRect">
-            <a:avLst>
-              <a:gd name="adj" fmla="val 14000"/>
-            </a:avLst>
-          </a:prstGeom>
-          <a:gradFill rotWithShape="1">
-            <a:gsLst>
-              <a:gs pos="0">
-                <a:srgbClr val="0A84FF"/>
-              </a:gs>
-              <a:gs pos="100000">
-                <a:srgbClr val="005CD7"/>
-              </a:gs>
-            </a:gsLst>
-            <a:lin scaled="0" ang="0"/>
-          </a:gradFill>
+            <a:off x="1261872" y="2862072"/>
+            <a:ext cx="237744" cy="237744"/>
+          </a:xfrm>
+          <a:prstGeom prst="ellipse">
+            <a:avLst/>
+          </a:prstGeom>
+          <a:solidFill>
+            <a:srgbClr val="0A84FF"/>
+          </a:solidFill>
           <a:ln>
             <a:noFill/>
           </a:ln>
@@ -7233,43 +7123,8 @@
         </p:nvSpPr>
         <p:spPr>
           <a:xfrm>
-            <a:off x="914400" y="2514600"/>
-            <a:ext cx="3179978" cy="822960"/>
-          </a:xfrm>
-          <a:prstGeom prst="rect">
-            <a:avLst/>
-          </a:prstGeom>
-          <a:noFill/>
-        </p:spPr>
-        <p:txBody>
-          <a:bodyPr wrap="square" anchor="ctr">
-            <a:spAutoFit/>
-          </a:bodyPr>
-          <a:lstStyle/>
-          <a:p>
-            <a:pPr algn="ctr"/>
-            <a:r>
-              <a:rPr sz="2000" b="1" i="0">
-                <a:solidFill>
-                  <a:srgbClr val="FFFFFF"/>
-                </a:solidFill>
-                <a:latin typeface="Inter"/>
-              </a:rPr>
-              <a:t>B2B SaaS</a:t>
-            </a:r>
-          </a:p>
-        </p:txBody>
-      </p:sp>
-      <p:sp>
-        <p:nvSpPr>
-          <p:cNvPr id="9" name="TextBox 8"/>
-          <p:cNvSpPr txBox="1"/>
-          <p:nvPr/>
-        </p:nvSpPr>
-        <p:spPr>
-          <a:xfrm>
-            <a:off x="1280160" y="3611880"/>
-            <a:ext cx="2448458" cy="1005840"/>
+            <a:off x="1627632" y="2788920"/>
+            <a:ext cx="2265578" cy="411480"/>
           </a:xfrm>
           <a:prstGeom prst="rect">
             <a:avLst/>
@@ -7282,49 +7137,29 @@
           </a:bodyPr>
           <a:lstStyle/>
           <a:p>
-            <a:pPr algn="l">
-              <a:lnSpc>
-                <a:spcPct val="110000"/>
-              </a:lnSpc>
-            </a:pPr>
-            <a:r>
-              <a:rPr sz="2200" b="1" i="0">
-                <a:solidFill>
-                  <a:srgbClr val="FFFFFF"/>
-                </a:solidFill>
-                <a:latin typeface="Inter"/>
-              </a:rPr>
-              <a:t>アーティスト</a:t>
-            </a:r>
-          </a:p>
-          <a:p>
-            <a:pPr algn="l">
-              <a:lnSpc>
-                <a:spcPct val="110000"/>
-              </a:lnSpc>
-            </a:pPr>
-            <a:r>
-              <a:rPr sz="2200" b="1" i="0">
-                <a:solidFill>
-                  <a:srgbClr val="FFFFFF"/>
-                </a:solidFill>
-                <a:latin typeface="Inter"/>
-              </a:rPr>
-              <a:t>インサイト</a:t>
-            </a:r>
-          </a:p>
-        </p:txBody>
-      </p:sp>
-      <p:sp>
-        <p:nvSpPr>
-          <p:cNvPr id="10" name="TextBox 9"/>
+            <a:pPr algn="l"/>
+            <a:r>
+              <a:rPr sz="1500" b="1" i="0">
+                <a:solidFill>
+                  <a:srgbClr val="0A84FF"/>
+                </a:solidFill>
+                <a:latin typeface="Inter"/>
+              </a:rPr>
+              <a:t>B2B SaaS</a:t>
+            </a:r>
+          </a:p>
+        </p:txBody>
+      </p:sp>
+      <p:sp>
+        <p:nvSpPr>
+          <p:cNvPr id="9" name="TextBox 8"/>
           <p:cNvSpPr txBox="1"/>
           <p:nvPr/>
         </p:nvSpPr>
         <p:spPr>
           <a:xfrm>
-            <a:off x="1280160" y="4617720"/>
-            <a:ext cx="2448458" cy="822960"/>
+            <a:off x="1261872" y="3383280"/>
+            <a:ext cx="2539898" cy="640080"/>
           </a:xfrm>
           <a:prstGeom prst="rect">
             <a:avLst/>
@@ -7337,33 +7172,29 @@
           </a:bodyPr>
           <a:lstStyle/>
           <a:p>
-            <a:pPr algn="l">
-              <a:lnSpc>
-                <a:spcPct val="125000"/>
-              </a:lnSpc>
-            </a:pPr>
-            <a:r>
-              <a:rPr sz="1500" b="0" i="0">
-                <a:solidFill>
-                  <a:srgbClr val="B8B8BE"/>
-                </a:solidFill>
-                <a:latin typeface="Inter"/>
-              </a:rPr>
-              <a:t>身体反応ヒートマップを提供</a:t>
-            </a:r>
-          </a:p>
-        </p:txBody>
-      </p:sp>
-      <p:sp>
-        <p:nvSpPr>
-          <p:cNvPr id="11" name="Rectangle 10"/>
+            <a:pPr algn="l"/>
+            <a:r>
+              <a:rPr sz="2000" b="1" i="0">
+                <a:solidFill>
+                  <a:srgbClr val="FFFFFF"/>
+                </a:solidFill>
+                <a:latin typeface="Inter"/>
+              </a:rPr>
+              <a:t>アーティストインサイト</a:t>
+            </a:r>
+          </a:p>
+        </p:txBody>
+      </p:sp>
+      <p:sp>
+        <p:nvSpPr>
+          <p:cNvPr id="10" name="Rectangle 9"/>
           <p:cNvSpPr/>
           <p:nvPr/>
         </p:nvSpPr>
         <p:spPr>
           <a:xfrm>
-            <a:off x="1280160" y="5440680"/>
-            <a:ext cx="2448458" cy="36576"/>
+            <a:off x="1261872" y="4087368"/>
+            <a:ext cx="2485034" cy="27432"/>
           </a:xfrm>
           <a:prstGeom prst="roundRect">
             <a:avLst>
@@ -7410,14 +7241,14 @@
       </p:sp>
       <p:sp>
         <p:nvSpPr>
-          <p:cNvPr id="12" name="TextBox 11"/>
+          <p:cNvPr id="11" name="TextBox 10"/>
           <p:cNvSpPr txBox="1"/>
           <p:nvPr/>
         </p:nvSpPr>
         <p:spPr>
           <a:xfrm>
-            <a:off x="1280160" y="5577840"/>
-            <a:ext cx="2448458" cy="457200"/>
+            <a:off x="1261872" y="4206240"/>
+            <a:ext cx="2539898" cy="1097280"/>
           </a:xfrm>
           <a:prstGeom prst="rect">
             <a:avLst/>
@@ -7430,9 +7261,64 @@
           </a:bodyPr>
           <a:lstStyle/>
           <a:p>
+            <a:pPr algn="l">
+              <a:lnSpc>
+                <a:spcPct val="135000"/>
+              </a:lnSpc>
+            </a:pPr>
+            <a:r>
+              <a:rPr sz="1500" b="0" i="0">
+                <a:solidFill>
+                  <a:srgbClr val="B8B8BE"/>
+                </a:solidFill>
+                <a:latin typeface="Inter"/>
+              </a:rPr>
+              <a:t>身体反応ヒートマップを</a:t>
+            </a:r>
+          </a:p>
+          <a:p>
+            <a:pPr algn="l">
+              <a:lnSpc>
+                <a:spcPct val="135000"/>
+              </a:lnSpc>
+            </a:pPr>
+            <a:r>
+              <a:rPr sz="1500" b="0" i="0">
+                <a:solidFill>
+                  <a:srgbClr val="B8B8BE"/>
+                </a:solidFill>
+                <a:latin typeface="Inter"/>
+              </a:rPr>
+              <a:t>アーティスト・レーベルに提供</a:t>
+            </a:r>
+          </a:p>
+        </p:txBody>
+      </p:sp>
+      <p:sp>
+        <p:nvSpPr>
+          <p:cNvPr id="12" name="TextBox 11"/>
+          <p:cNvSpPr txBox="1"/>
+          <p:nvPr/>
+        </p:nvSpPr>
+        <p:spPr>
+          <a:xfrm>
+            <a:off x="1261872" y="5486400"/>
+            <a:ext cx="2539898" cy="411480"/>
+          </a:xfrm>
+          <a:prstGeom prst="rect">
+            <a:avLst/>
+          </a:prstGeom>
+          <a:noFill/>
+        </p:spPr>
+        <p:txBody>
+          <a:bodyPr wrap="square">
+            <a:spAutoFit/>
+          </a:bodyPr>
+          <a:lstStyle/>
+          <a:p>
             <a:pPr algn="l"/>
             <a:r>
-              <a:rPr sz="1700" b="1" i="0">
+              <a:rPr sz="1600" b="1" i="0">
                 <a:solidFill>
                   <a:srgbClr val="0A84FF"/>
                 </a:solidFill>
@@ -7452,7 +7338,7 @@
         <p:spPr>
           <a:xfrm>
             <a:off x="4505858" y="2514600"/>
-            <a:ext cx="3179978" cy="3657600"/>
+            <a:ext cx="3179978" cy="3566160"/>
           </a:xfrm>
           <a:prstGeom prst="roundRect">
             <a:avLst>
@@ -7461,7 +7347,7 @@
           </a:prstGeom>
           <a:solidFill>
             <a:srgbClr val="1C1C1E">
-              <a:alpha val="45000"/>
+              <a:alpha val="42000"/>
             </a:srgbClr>
           </a:solidFill>
           <a:ln w="12700">
@@ -7497,27 +7383,141 @@
       </p:sp>
       <p:sp>
         <p:nvSpPr>
-          <p:cNvPr id="14" name="Rectangle 13"/>
+          <p:cNvPr id="14" name="Oval 13"/>
           <p:cNvSpPr/>
           <p:nvPr/>
         </p:nvSpPr>
         <p:spPr>
           <a:xfrm>
-            <a:off x="4505858" y="2514600"/>
-            <a:ext cx="3179978" cy="822960"/>
+            <a:off x="4853330" y="2862072"/>
+            <a:ext cx="237744" cy="237744"/>
+          </a:xfrm>
+          <a:prstGeom prst="ellipse">
+            <a:avLst/>
+          </a:prstGeom>
+          <a:solidFill>
+            <a:srgbClr val="BF5AF2"/>
+          </a:solidFill>
+          <a:ln>
+            <a:noFill/>
+          </a:ln>
+          <a:effectLst/>
+        </p:spPr>
+        <p:style>
+          <a:lnRef idx="1">
+            <a:schemeClr val="accent1"/>
+          </a:lnRef>
+          <a:fillRef idx="3">
+            <a:schemeClr val="accent1"/>
+          </a:fillRef>
+          <a:effectRef idx="2">
+            <a:schemeClr val="accent1"/>
+          </a:effectRef>
+          <a:fontRef idx="minor">
+            <a:schemeClr val="lt1"/>
+          </a:fontRef>
+        </p:style>
+        <p:txBody>
+          <a:bodyPr rtlCol="0" anchor="ctr"/>
+          <a:lstStyle/>
+          <a:p>
+            <a:pPr algn="ctr"/>
+          </a:p>
+        </p:txBody>
+      </p:sp>
+      <p:sp>
+        <p:nvSpPr>
+          <p:cNvPr id="15" name="TextBox 14"/>
+          <p:cNvSpPr txBox="1"/>
+          <p:nvPr/>
+        </p:nvSpPr>
+        <p:spPr>
+          <a:xfrm>
+            <a:off x="5219090" y="2788920"/>
+            <a:ext cx="2265578" cy="411480"/>
+          </a:xfrm>
+          <a:prstGeom prst="rect">
+            <a:avLst/>
+          </a:prstGeom>
+          <a:noFill/>
+        </p:spPr>
+        <p:txBody>
+          <a:bodyPr wrap="square">
+            <a:spAutoFit/>
+          </a:bodyPr>
+          <a:lstStyle/>
+          <a:p>
+            <a:pPr algn="l"/>
+            <a:r>
+              <a:rPr sz="1500" b="1" i="0">
+                <a:solidFill>
+                  <a:srgbClr val="BF5AF2"/>
+                </a:solidFill>
+                <a:latin typeface="Inter"/>
+              </a:rPr>
+              <a:t>Premium</a:t>
+            </a:r>
+          </a:p>
+        </p:txBody>
+      </p:sp>
+      <p:sp>
+        <p:nvSpPr>
+          <p:cNvPr id="16" name="TextBox 15"/>
+          <p:cNvSpPr txBox="1"/>
+          <p:nvPr/>
+        </p:nvSpPr>
+        <p:spPr>
+          <a:xfrm>
+            <a:off x="4853330" y="3383280"/>
+            <a:ext cx="2539898" cy="640080"/>
+          </a:xfrm>
+          <a:prstGeom prst="rect">
+            <a:avLst/>
+          </a:prstGeom>
+          <a:noFill/>
+        </p:spPr>
+        <p:txBody>
+          <a:bodyPr wrap="square">
+            <a:spAutoFit/>
+          </a:bodyPr>
+          <a:lstStyle/>
+          <a:p>
+            <a:pPr algn="l"/>
+            <a:r>
+              <a:rPr sz="2000" b="1" i="0">
+                <a:solidFill>
+                  <a:srgbClr val="FFFFFF"/>
+                </a:solidFill>
+                <a:latin typeface="Inter"/>
+              </a:rPr>
+              <a:t>セレンディピティマッチング</a:t>
+            </a:r>
+          </a:p>
+        </p:txBody>
+      </p:sp>
+      <p:sp>
+        <p:nvSpPr>
+          <p:cNvPr id="17" name="Rectangle 16"/>
+          <p:cNvSpPr/>
+          <p:nvPr/>
+        </p:nvSpPr>
+        <p:spPr>
+          <a:xfrm>
+            <a:off x="4853330" y="4087368"/>
+            <a:ext cx="2485034" cy="27432"/>
           </a:xfrm>
           <a:prstGeom prst="roundRect">
             <a:avLst>
-              <a:gd name="adj" fmla="val 14000"/>
+              <a:gd name="adj" fmla="val 50000"/>
             </a:avLst>
           </a:prstGeom>
           <a:gradFill rotWithShape="1">
             <a:gsLst>
               <a:gs pos="0">
-                <a:srgbClr val="30D158"/>
+                <a:srgbClr val="BF5AF2"/>
               </a:gs>
               <a:gs pos="100000">
-                <a:srgbClr val="08A930"/>
+                <a:srgbClr val="BF5AF2"/>
               </a:gs>
             </a:gsLst>
             <a:lin scaled="0" ang="0"/>
@@ -7551,49 +7551,14 @@
       </p:sp>
       <p:sp>
         <p:nvSpPr>
-          <p:cNvPr id="15" name="TextBox 14"/>
+          <p:cNvPr id="18" name="TextBox 17"/>
           <p:cNvSpPr txBox="1"/>
           <p:nvPr/>
         </p:nvSpPr>
         <p:spPr>
           <a:xfrm>
-            <a:off x="4505858" y="2514600"/>
-            <a:ext cx="3179978" cy="822960"/>
-          </a:xfrm>
-          <a:prstGeom prst="rect">
-            <a:avLst/>
-          </a:prstGeom>
-          <a:noFill/>
-        </p:spPr>
-        <p:txBody>
-          <a:bodyPr wrap="square" anchor="ctr">
-            <a:spAutoFit/>
-          </a:bodyPr>
-          <a:lstStyle/>
-          <a:p>
-            <a:pPr algn="ctr"/>
-            <a:r>
-              <a:rPr sz="2000" b="1" i="0">
-                <a:solidFill>
-                  <a:srgbClr val="FFFFFF"/>
-                </a:solidFill>
-                <a:latin typeface="Inter"/>
-              </a:rPr>
-              <a:t>Premium</a:t>
-            </a:r>
-          </a:p>
-        </p:txBody>
-      </p:sp>
-      <p:sp>
-        <p:nvSpPr>
-          <p:cNvPr id="16" name="TextBox 15"/>
-          <p:cNvSpPr txBox="1"/>
-          <p:nvPr/>
-        </p:nvSpPr>
-        <p:spPr>
-          <a:xfrm>
-            <a:off x="4871618" y="3611880"/>
-            <a:ext cx="2448458" cy="1005840"/>
+            <a:off x="4853330" y="4206240"/>
+            <a:ext cx="2539898" cy="1097280"/>
           </a:xfrm>
           <a:prstGeom prst="rect">
             <a:avLst/>
@@ -7608,47 +7573,47 @@
           <a:p>
             <a:pPr algn="l">
               <a:lnSpc>
-                <a:spcPct val="110000"/>
+                <a:spcPct val="135000"/>
               </a:lnSpc>
             </a:pPr>
             <a:r>
-              <a:rPr sz="2200" b="1" i="0">
-                <a:solidFill>
-                  <a:srgbClr val="FFFFFF"/>
-                </a:solidFill>
-                <a:latin typeface="Inter"/>
-              </a:rPr>
-              <a:t>セレンディピティ</a:t>
+              <a:rPr sz="1500" b="0" i="0">
+                <a:solidFill>
+                  <a:srgbClr val="B8B8BE"/>
+                </a:solidFill>
+                <a:latin typeface="Inter"/>
+              </a:rPr>
+              <a:t>同じ曲の同じ瞬間に反応した</a:t>
             </a:r>
           </a:p>
           <a:p>
             <a:pPr algn="l">
               <a:lnSpc>
-                <a:spcPct val="110000"/>
+                <a:spcPct val="135000"/>
               </a:lnSpc>
             </a:pPr>
             <a:r>
-              <a:rPr sz="2200" b="1" i="0">
-                <a:solidFill>
-                  <a:srgbClr val="FFFFFF"/>
-                </a:solidFill>
-                <a:latin typeface="Inter"/>
-              </a:rPr>
-              <a:t>マッチング</a:t>
-            </a:r>
-          </a:p>
-        </p:txBody>
-      </p:sp>
-      <p:sp>
-        <p:nvSpPr>
-          <p:cNvPr id="17" name="TextBox 16"/>
+              <a:rPr sz="1500" b="0" i="0">
+                <a:solidFill>
+                  <a:srgbClr val="B8B8BE"/>
+                </a:solidFill>
+                <a:latin typeface="Inter"/>
+              </a:rPr>
+              <a:t>見知らぬ人との出会い</a:t>
+            </a:r>
+          </a:p>
+        </p:txBody>
+      </p:sp>
+      <p:sp>
+        <p:nvSpPr>
+          <p:cNvPr id="19" name="TextBox 18"/>
           <p:cNvSpPr txBox="1"/>
           <p:nvPr/>
         </p:nvSpPr>
         <p:spPr>
           <a:xfrm>
-            <a:off x="4871618" y="4617720"/>
-            <a:ext cx="2448458" cy="822960"/>
+            <a:off x="4853330" y="5486400"/>
+            <a:ext cx="2539898" cy="411480"/>
           </a:xfrm>
           <a:prstGeom prst="rect">
             <a:avLst/>
@@ -7661,104 +7626,11 @@
           </a:bodyPr>
           <a:lstStyle/>
           <a:p>
-            <a:pPr algn="l">
-              <a:lnSpc>
-                <a:spcPct val="125000"/>
-              </a:lnSpc>
-            </a:pPr>
-            <a:r>
-              <a:rPr sz="1500" b="0" i="0">
-                <a:solidFill>
-                  <a:srgbClr val="B8B8BE"/>
-                </a:solidFill>
-                <a:latin typeface="Inter"/>
-              </a:rPr>
-              <a:t>同じ瞬間に反応した人と出会う</a:t>
-            </a:r>
-          </a:p>
-        </p:txBody>
-      </p:sp>
-      <p:sp>
-        <p:nvSpPr>
-          <p:cNvPr id="18" name="Rectangle 17"/>
-          <p:cNvSpPr/>
-          <p:nvPr/>
-        </p:nvSpPr>
-        <p:spPr>
-          <a:xfrm>
-            <a:off x="4871618" y="5440680"/>
-            <a:ext cx="2448458" cy="36576"/>
-          </a:xfrm>
-          <a:prstGeom prst="roundRect">
-            <a:avLst>
-              <a:gd name="adj" fmla="val 50000"/>
-            </a:avLst>
-          </a:prstGeom>
-          <a:gradFill rotWithShape="1">
-            <a:gsLst>
-              <a:gs pos="0">
-                <a:srgbClr val="30D158"/>
-              </a:gs>
-              <a:gs pos="100000">
-                <a:srgbClr val="30D158"/>
-              </a:gs>
-            </a:gsLst>
-            <a:lin scaled="0" ang="0"/>
-          </a:gradFill>
-          <a:ln>
-            <a:noFill/>
-          </a:ln>
-          <a:effectLst/>
-        </p:spPr>
-        <p:style>
-          <a:lnRef idx="1">
-            <a:schemeClr val="accent1"/>
-          </a:lnRef>
-          <a:fillRef idx="3">
-            <a:schemeClr val="accent1"/>
-          </a:fillRef>
-          <a:effectRef idx="2">
-            <a:schemeClr val="accent1"/>
-          </a:effectRef>
-          <a:fontRef idx="minor">
-            <a:schemeClr val="lt1"/>
-          </a:fontRef>
-        </p:style>
-        <p:txBody>
-          <a:bodyPr rtlCol="0" anchor="ctr"/>
-          <a:lstStyle/>
-          <a:p>
-            <a:pPr algn="ctr"/>
-          </a:p>
-        </p:txBody>
-      </p:sp>
-      <p:sp>
-        <p:nvSpPr>
-          <p:cNvPr id="19" name="TextBox 18"/>
-          <p:cNvSpPr txBox="1"/>
-          <p:nvPr/>
-        </p:nvSpPr>
-        <p:spPr>
-          <a:xfrm>
-            <a:off x="4871618" y="5577840"/>
-            <a:ext cx="2448458" cy="457200"/>
-          </a:xfrm>
-          <a:prstGeom prst="rect">
-            <a:avLst/>
-          </a:prstGeom>
-          <a:noFill/>
-        </p:spPr>
-        <p:txBody>
-          <a:bodyPr wrap="square">
-            <a:spAutoFit/>
-          </a:bodyPr>
-          <a:lstStyle/>
-          <a:p>
             <a:pPr algn="l"/>
             <a:r>
-              <a:rPr sz="1700" b="1" i="0">
-                <a:solidFill>
-                  <a:srgbClr val="30D158"/>
+              <a:rPr sz="1600" b="1" i="0">
+                <a:solidFill>
+                  <a:srgbClr val="BF5AF2"/>
                 </a:solidFill>
                 <a:latin typeface="Inter"/>
               </a:rPr>
@@ -7776,7 +7648,7 @@
         <p:spPr>
           <a:xfrm>
             <a:off x="8097316" y="2514600"/>
-            <a:ext cx="3179978" cy="3657600"/>
+            <a:ext cx="3179978" cy="3566160"/>
           </a:xfrm>
           <a:prstGeom prst="roundRect">
             <a:avLst>
@@ -7785,7 +7657,7 @@
           </a:prstGeom>
           <a:solidFill>
             <a:srgbClr val="1C1C1E">
-              <a:alpha val="45000"/>
+              <a:alpha val="42000"/>
             </a:srgbClr>
           </a:solidFill>
           <a:ln w="12700">
@@ -7821,31 +7693,21 @@
       </p:sp>
       <p:sp>
         <p:nvSpPr>
-          <p:cNvPr id="21" name="Rectangle 20"/>
+          <p:cNvPr id="21" name="Oval 20"/>
           <p:cNvSpPr/>
           <p:nvPr/>
         </p:nvSpPr>
         <p:spPr>
           <a:xfrm>
-            <a:off x="8097316" y="2514600"/>
-            <a:ext cx="3179978" cy="822960"/>
-          </a:xfrm>
-          <a:prstGeom prst="roundRect">
-            <a:avLst>
-              <a:gd name="adj" fmla="val 14000"/>
-            </a:avLst>
-          </a:prstGeom>
-          <a:gradFill rotWithShape="1">
-            <a:gsLst>
-              <a:gs pos="0">
-                <a:srgbClr val="FF9F0A"/>
-              </a:gs>
-              <a:gs pos="100000">
-                <a:srgbClr val="D77700"/>
-              </a:gs>
-            </a:gsLst>
-            <a:lin scaled="0" ang="0"/>
-          </a:gradFill>
+            <a:off x="8444788" y="2862072"/>
+            <a:ext cx="237744" cy="237744"/>
+          </a:xfrm>
+          <a:prstGeom prst="ellipse">
+            <a:avLst/>
+          </a:prstGeom>
+          <a:solidFill>
+            <a:srgbClr val="FF9F0A"/>
+          </a:solidFill>
           <a:ln>
             <a:noFill/>
           </a:ln>
@@ -7881,43 +7743,8 @@
         </p:nvSpPr>
         <p:spPr>
           <a:xfrm>
-            <a:off x="8097316" y="2514600"/>
-            <a:ext cx="3179978" cy="822960"/>
-          </a:xfrm>
-          <a:prstGeom prst="rect">
-            <a:avLst/>
-          </a:prstGeom>
-          <a:noFill/>
-        </p:spPr>
-        <p:txBody>
-          <a:bodyPr wrap="square" anchor="ctr">
-            <a:spAutoFit/>
-          </a:bodyPr>
-          <a:lstStyle/>
-          <a:p>
-            <a:pPr algn="ctr"/>
-            <a:r>
-              <a:rPr sz="2000" b="1" i="0">
-                <a:solidFill>
-                  <a:srgbClr val="FFFFFF"/>
-                </a:solidFill>
-                <a:latin typeface="Inter"/>
-              </a:rPr>
-              <a:t>P2P Tips</a:t>
-            </a:r>
-          </a:p>
-        </p:txBody>
-      </p:sp>
-      <p:sp>
-        <p:nvSpPr>
-          <p:cNvPr id="23" name="TextBox 22"/>
-          <p:cNvSpPr txBox="1"/>
-          <p:nvPr/>
-        </p:nvSpPr>
-        <p:spPr>
-          <a:xfrm>
-            <a:off x="8463076" y="3611880"/>
-            <a:ext cx="2448458" cy="1005840"/>
+            <a:off x="8810548" y="2788920"/>
+            <a:ext cx="2265578" cy="411480"/>
           </a:xfrm>
           <a:prstGeom prst="rect">
             <a:avLst/>
@@ -7930,33 +7757,29 @@
           </a:bodyPr>
           <a:lstStyle/>
           <a:p>
-            <a:pPr algn="l">
-              <a:lnSpc>
-                <a:spcPct val="110000"/>
-              </a:lnSpc>
-            </a:pPr>
-            <a:r>
-              <a:rPr sz="2200" b="1" i="0">
-                <a:solidFill>
-                  <a:srgbClr val="FFFFFF"/>
-                </a:solidFill>
-                <a:latin typeface="Inter"/>
-              </a:rPr>
-              <a:t>チップ循環</a:t>
-            </a:r>
-          </a:p>
-        </p:txBody>
-      </p:sp>
-      <p:sp>
-        <p:nvSpPr>
-          <p:cNvPr id="24" name="TextBox 23"/>
+            <a:pPr algn="l"/>
+            <a:r>
+              <a:rPr sz="1500" b="1" i="0">
+                <a:solidFill>
+                  <a:srgbClr val="FF9F0A"/>
+                </a:solidFill>
+                <a:latin typeface="Inter"/>
+              </a:rPr>
+              <a:t>P2P Tips</a:t>
+            </a:r>
+          </a:p>
+        </p:txBody>
+      </p:sp>
+      <p:sp>
+        <p:nvSpPr>
+          <p:cNvPr id="23" name="TextBox 22"/>
           <p:cNvSpPr txBox="1"/>
           <p:nvPr/>
         </p:nvSpPr>
         <p:spPr>
           <a:xfrm>
-            <a:off x="8463076" y="4617720"/>
-            <a:ext cx="2448458" cy="822960"/>
+            <a:off x="8444788" y="3383280"/>
+            <a:ext cx="2539898" cy="640080"/>
           </a:xfrm>
           <a:prstGeom prst="rect">
             <a:avLst/>
@@ -7969,33 +7792,29 @@
           </a:bodyPr>
           <a:lstStyle/>
           <a:p>
-            <a:pPr algn="l">
-              <a:lnSpc>
-                <a:spcPct val="125000"/>
-              </a:lnSpc>
-            </a:pPr>
-            <a:r>
-              <a:rPr sz="1500" b="0" i="0">
-                <a:solidFill>
-                  <a:srgbClr val="B8B8BE"/>
-                </a:solidFill>
-                <a:latin typeface="Inter"/>
-              </a:rPr>
-              <a:t>発見者を可視化し直接還元</a:t>
-            </a:r>
-          </a:p>
-        </p:txBody>
-      </p:sp>
-      <p:sp>
-        <p:nvSpPr>
-          <p:cNvPr id="25" name="Rectangle 24"/>
+            <a:pPr algn="l"/>
+            <a:r>
+              <a:rPr sz="2000" b="1" i="0">
+                <a:solidFill>
+                  <a:srgbClr val="FFFFFF"/>
+                </a:solidFill>
+                <a:latin typeface="Inter"/>
+              </a:rPr>
+              <a:t>チップ循環</a:t>
+            </a:r>
+          </a:p>
+        </p:txBody>
+      </p:sp>
+      <p:sp>
+        <p:nvSpPr>
+          <p:cNvPr id="24" name="Rectangle 23"/>
           <p:cNvSpPr/>
           <p:nvPr/>
         </p:nvSpPr>
         <p:spPr>
           <a:xfrm>
-            <a:off x="8463076" y="5440680"/>
-            <a:ext cx="2448458" cy="36576"/>
+            <a:off x="8444788" y="4087368"/>
+            <a:ext cx="2485034" cy="27432"/>
           </a:xfrm>
           <a:prstGeom prst="roundRect">
             <a:avLst>
@@ -8042,14 +7861,14 @@
       </p:sp>
       <p:sp>
         <p:nvSpPr>
-          <p:cNvPr id="26" name="TextBox 25"/>
+          <p:cNvPr id="25" name="TextBox 24"/>
           <p:cNvSpPr txBox="1"/>
           <p:nvPr/>
         </p:nvSpPr>
         <p:spPr>
           <a:xfrm>
-            <a:off x="8463076" y="5577840"/>
-            <a:ext cx="2448458" cy="457200"/>
+            <a:off x="8444788" y="4206240"/>
+            <a:ext cx="2539898" cy="1097280"/>
           </a:xfrm>
           <a:prstGeom prst="rect">
             <a:avLst/>
@@ -8062,15 +7881,105 @@
           </a:bodyPr>
           <a:lstStyle/>
           <a:p>
+            <a:pPr algn="l">
+              <a:lnSpc>
+                <a:spcPct val="135000"/>
+              </a:lnSpc>
+            </a:pPr>
+            <a:r>
+              <a:rPr sz="1500" b="0" i="0">
+                <a:solidFill>
+                  <a:srgbClr val="B8B8BE"/>
+                </a:solidFill>
+                <a:latin typeface="Inter"/>
+              </a:rPr>
+              <a:t>発見者を可視化し</a:t>
+            </a:r>
+          </a:p>
+          <a:p>
+            <a:pPr algn="l">
+              <a:lnSpc>
+                <a:spcPct val="135000"/>
+              </a:lnSpc>
+            </a:pPr>
+            <a:r>
+              <a:rPr sz="1500" b="0" i="0">
+                <a:solidFill>
+                  <a:srgbClr val="B8B8BE"/>
+                </a:solidFill>
+                <a:latin typeface="Inter"/>
+              </a:rPr>
+              <a:t>アーティストへ直接還元</a:t>
+            </a:r>
+          </a:p>
+        </p:txBody>
+      </p:sp>
+      <p:sp>
+        <p:nvSpPr>
+          <p:cNvPr id="26" name="TextBox 25"/>
+          <p:cNvSpPr txBox="1"/>
+          <p:nvPr/>
+        </p:nvSpPr>
+        <p:spPr>
+          <a:xfrm>
+            <a:off x="8444788" y="5486400"/>
+            <a:ext cx="2539898" cy="411480"/>
+          </a:xfrm>
+          <a:prstGeom prst="rect">
+            <a:avLst/>
+          </a:prstGeom>
+          <a:noFill/>
+        </p:spPr>
+        <p:txBody>
+          <a:bodyPr wrap="square">
+            <a:spAutoFit/>
+          </a:bodyPr>
+          <a:lstStyle/>
+          <a:p>
             <a:pPr algn="l"/>
             <a:r>
-              <a:rPr sz="1700" b="1" i="0">
+              <a:rPr sz="1600" b="1" i="0">
                 <a:solidFill>
                   <a:srgbClr val="FF9F0A"/>
                 </a:solidFill>
                 <a:latin typeface="Inter"/>
               </a:rPr>
               <a:t>マージン 10%</a:t>
+            </a:r>
+          </a:p>
+        </p:txBody>
+      </p:sp>
+      <p:sp>
+        <p:nvSpPr>
+          <p:cNvPr id="27" name="TextBox 26"/>
+          <p:cNvSpPr txBox="1"/>
+          <p:nvPr/>
+        </p:nvSpPr>
+        <p:spPr>
+          <a:xfrm>
+            <a:off x="914400" y="6263640"/>
+            <a:ext cx="10362895" cy="411480"/>
+          </a:xfrm>
+          <a:prstGeom prst="rect">
+            <a:avLst/>
+          </a:prstGeom>
+          <a:noFill/>
+        </p:spPr>
+        <p:txBody>
+          <a:bodyPr wrap="square">
+            <a:spAutoFit/>
+          </a:bodyPr>
+          <a:lstStyle/>
+          <a:p>
+            <a:pPr algn="ctr"/>
+            <a:r>
+              <a:rPr sz="1400" b="0" i="0">
+                <a:solidFill>
+                  <a:srgbClr val="8E8E93"/>
+                </a:solidFill>
+                <a:latin typeface="Inter"/>
+              </a:rPr>
+              <a:t>アーティスト · リスナー · プラットフォームの三者がともに得るプラスサム設計</a:t>
             </a:r>
           </a:p>
         </p:txBody>
@@ -16191,7 +16100,7 @@
         <p:spPr>
           <a:xfrm>
             <a:off x="914400" y="4206240"/>
-            <a:ext cx="1536649" cy="640080"/>
+            <a:ext cx="1559509" cy="640080"/>
           </a:xfrm>
           <a:prstGeom prst="roundRect">
             <a:avLst>
@@ -16199,13 +16108,13 @@
             </a:avLst>
           </a:prstGeom>
           <a:solidFill>
-            <a:srgbClr val="0A84FF">
+            <a:srgbClr val="FF9F0A">
               <a:alpha val="18000"/>
             </a:srgbClr>
           </a:solidFill>
           <a:ln w="12700">
             <a:solidFill>
-              <a:srgbClr val="0A84FF">
+              <a:srgbClr val="FF9F0A">
                 <a:alpha val="55000"/>
               </a:srgbClr>
             </a:solidFill>
@@ -16234,11 +16143,11 @@
             <a:r>
               <a:rPr sz="1500" b="1">
                 <a:solidFill>
-                  <a:srgbClr val="0A84FF"/>
-                </a:solidFill>
-                <a:latin typeface="Inter"/>
-              </a:rPr>
-              <a:t>groove</a:t>
+                  <a:srgbClr val="FF9F0A"/>
+                </a:solidFill>
+                <a:latin typeface="Inter"/>
+              </a:rPr>
+              <a:t>🎵 ノってる</a:t>
             </a:r>
           </a:p>
         </p:txBody>
@@ -16251,8 +16160,69 @@
         </p:nvSpPr>
         <p:spPr>
           <a:xfrm>
-            <a:off x="2679649" y="4206240"/>
-            <a:ext cx="1536649" cy="640080"/>
+            <a:off x="2675077" y="4206240"/>
+            <a:ext cx="1559509" cy="640080"/>
+          </a:xfrm>
+          <a:prstGeom prst="roundRect">
+            <a:avLst>
+              <a:gd name="adj" fmla="val 50000"/>
+            </a:avLst>
+          </a:prstGeom>
+          <a:solidFill>
+            <a:srgbClr val="FF453A">
+              <a:alpha val="18000"/>
+            </a:srgbClr>
+          </a:solidFill>
+          <a:ln w="12700">
+            <a:solidFill>
+              <a:srgbClr val="FF453A">
+                <a:alpha val="55000"/>
+              </a:srgbClr>
+            </a:solidFill>
+          </a:ln>
+          <a:effectLst/>
+        </p:spPr>
+        <p:style>
+          <a:lnRef idx="1">
+            <a:schemeClr val="accent1"/>
+          </a:lnRef>
+          <a:fillRef idx="3">
+            <a:schemeClr val="accent1"/>
+          </a:fillRef>
+          <a:effectRef idx="2">
+            <a:schemeClr val="accent1"/>
+          </a:effectRef>
+          <a:fontRef idx="minor">
+            <a:schemeClr val="lt1"/>
+          </a:fontRef>
+        </p:style>
+        <p:txBody>
+          <a:bodyPr rtlCol="0" anchor="ctr" wrap="square"/>
+          <a:lstStyle/>
+          <a:p>
+            <a:pPr algn="ctr"/>
+            <a:r>
+              <a:rPr sz="1500" b="1">
+                <a:solidFill>
+                  <a:srgbClr val="FF453A"/>
+                </a:solidFill>
+                <a:latin typeface="Inter"/>
+              </a:rPr>
+              <a:t>🔥 上がった</a:t>
+            </a:r>
+          </a:p>
+        </p:txBody>
+      </p:sp>
+      <p:sp>
+        <p:nvSpPr>
+          <p:cNvPr id="11" name="Rectangle 10"/>
+          <p:cNvSpPr/>
+          <p:nvPr/>
+        </p:nvSpPr>
+        <p:spPr>
+          <a:xfrm>
+            <a:off x="4435754" y="4206240"/>
+            <a:ext cx="1559509" cy="640080"/>
           </a:xfrm>
           <a:prstGeom prst="roundRect">
             <a:avLst>
@@ -16299,68 +16269,7 @@
                 </a:solidFill>
                 <a:latin typeface="Inter"/>
               </a:rPr>
-              <a:t>hype</a:t>
-            </a:r>
-          </a:p>
-        </p:txBody>
-      </p:sp>
-      <p:sp>
-        <p:nvSpPr>
-          <p:cNvPr id="11" name="Rectangle 10"/>
-          <p:cNvSpPr/>
-          <p:nvPr/>
-        </p:nvSpPr>
-        <p:spPr>
-          <a:xfrm>
-            <a:off x="4444898" y="4206240"/>
-            <a:ext cx="1536649" cy="640080"/>
-          </a:xfrm>
-          <a:prstGeom prst="roundRect">
-            <a:avLst>
-              <a:gd name="adj" fmla="val 50000"/>
-            </a:avLst>
-          </a:prstGeom>
-          <a:solidFill>
-            <a:srgbClr val="30D158">
-              <a:alpha val="18000"/>
-            </a:srgbClr>
-          </a:solidFill>
-          <a:ln w="12700">
-            <a:solidFill>
-              <a:srgbClr val="30D158">
-                <a:alpha val="55000"/>
-              </a:srgbClr>
-            </a:solidFill>
-          </a:ln>
-          <a:effectLst/>
-        </p:spPr>
-        <p:style>
-          <a:lnRef idx="1">
-            <a:schemeClr val="accent1"/>
-          </a:lnRef>
-          <a:fillRef idx="3">
-            <a:schemeClr val="accent1"/>
-          </a:fillRef>
-          <a:effectRef idx="2">
-            <a:schemeClr val="accent1"/>
-          </a:effectRef>
-          <a:fontRef idx="minor">
-            <a:schemeClr val="lt1"/>
-          </a:fontRef>
-        </p:style>
-        <p:txBody>
-          <a:bodyPr rtlCol="0" anchor="ctr" wrap="square"/>
-          <a:lstStyle/>
-          <a:p>
-            <a:pPr algn="ctr"/>
-            <a:r>
-              <a:rPr sz="1500" b="1">
-                <a:solidFill>
-                  <a:srgbClr val="30D158"/>
-                </a:solidFill>
-                <a:latin typeface="Inter"/>
-              </a:rPr>
-              <a:t>chill</a:t>
+              <a:t>❄️ チル</a:t>
             </a:r>
           </a:p>
         </p:txBody>
@@ -16373,8 +16282,8 @@
         </p:nvSpPr>
         <p:spPr>
           <a:xfrm>
-            <a:off x="6210147" y="4206240"/>
-            <a:ext cx="1536649" cy="640080"/>
+            <a:off x="6196431" y="4206240"/>
+            <a:ext cx="1559509" cy="640080"/>
           </a:xfrm>
           <a:prstGeom prst="roundRect">
             <a:avLst>
@@ -16421,7 +16330,7 @@
                 </a:solidFill>
                 <a:latin typeface="Inter"/>
               </a:rPr>
-              <a:t>immersion</a:t>
+              <a:t>🎧 聴き入り</a:t>
             </a:r>
           </a:p>
         </p:txBody>
@@ -16434,8 +16343,8 @@
         </p:nvSpPr>
         <p:spPr>
           <a:xfrm>
-            <a:off x="7975396" y="4206240"/>
-            <a:ext cx="1536649" cy="640080"/>
+            <a:off x="7957108" y="4206240"/>
+            <a:ext cx="1559509" cy="640080"/>
           </a:xfrm>
           <a:prstGeom prst="roundRect">
             <a:avLst>
@@ -16482,7 +16391,7 @@
                 </a:solidFill>
                 <a:latin typeface="Inter"/>
               </a:rPr>
-              <a:t>hit</a:t>
+              <a:t>💫 刺さった</a:t>
             </a:r>
           </a:p>
         </p:txBody>
@@ -16495,8 +16404,8 @@
         </p:nvSpPr>
         <p:spPr>
           <a:xfrm>
-            <a:off x="9740645" y="4206240"/>
-            <a:ext cx="1536649" cy="640080"/>
+            <a:off x="9717785" y="4206240"/>
+            <a:ext cx="1559509" cy="640080"/>
           </a:xfrm>
           <a:prstGeom prst="roundRect">
             <a:avLst>
@@ -16543,7 +16452,7 @@
                 </a:solidFill>
                 <a:latin typeface="Inter"/>
               </a:rPr>
-              <a:t>afterglow</a:t>
+              <a:t>✨ 余韻</a:t>
             </a:r>
           </a:p>
         </p:txBody>

--- a/docs/slides/howtune_final.pptx
+++ b/docs/slides/howtune_final.pptx
@@ -5,30 +5,31 @@
     <p:sldMasterId id="2147483648" r:id="rId1"/>
   </p:sldMasterIdLst>
   <p:sldIdLst>
-    <p:sldId id="256" r:id="rId7"/>
-    <p:sldId id="257" r:id="rId8"/>
-    <p:sldId id="258" r:id="rId9"/>
-    <p:sldId id="259" r:id="rId10"/>
-    <p:sldId id="260" r:id="rId11"/>
-    <p:sldId id="261" r:id="rId12"/>
-    <p:sldId id="262" r:id="rId13"/>
-    <p:sldId id="263" r:id="rId14"/>
-    <p:sldId id="264" r:id="rId15"/>
-    <p:sldId id="265" r:id="rId16"/>
-    <p:sldId id="266" r:id="rId17"/>
-    <p:sldId id="267" r:id="rId18"/>
-    <p:sldId id="268" r:id="rId19"/>
-    <p:sldId id="269" r:id="rId20"/>
-    <p:sldId id="270" r:id="rId21"/>
-    <p:sldId id="271" r:id="rId22"/>
-    <p:sldId id="272" r:id="rId23"/>
-    <p:sldId id="273" r:id="rId24"/>
-    <p:sldId id="274" r:id="rId25"/>
-    <p:sldId id="275" r:id="rId26"/>
-    <p:sldId id="276" r:id="rId27"/>
-    <p:sldId id="277" r:id="rId28"/>
+    <p:sldId id="256" r:id="rId2"/>
+    <p:sldId id="257" r:id="rId3"/>
+    <p:sldId id="258" r:id="rId4"/>
+    <p:sldId id="259" r:id="rId5"/>
+    <p:sldId id="260" r:id="rId6"/>
+    <p:sldId id="261" r:id="rId7"/>
+    <p:sldId id="262" r:id="rId8"/>
+    <p:sldId id="263" r:id="rId9"/>
+    <p:sldId id="264" r:id="rId10"/>
+    <p:sldId id="265" r:id="rId11"/>
+    <p:sldId id="266" r:id="rId12"/>
+    <p:sldId id="267" r:id="rId13"/>
+    <p:sldId id="278" r:id="rId14"/>
+    <p:sldId id="268" r:id="rId15"/>
+    <p:sldId id="269" r:id="rId16"/>
+    <p:sldId id="270" r:id="rId17"/>
+    <p:sldId id="271" r:id="rId18"/>
+    <p:sldId id="272" r:id="rId19"/>
+    <p:sldId id="273" r:id="rId20"/>
+    <p:sldId id="274" r:id="rId21"/>
+    <p:sldId id="275" r:id="rId22"/>
+    <p:sldId id="276" r:id="rId23"/>
+    <p:sldId id="277" r:id="rId24"/>
   </p:sldIdLst>
-  <p:sldSz cx="12191695" cy="6858000" type="screen4x3"/>
+  <p:sldSz cx="12192000" cy="6858000"/>
   <p:notesSz cx="6858000" cy="9144000"/>
   <p:defaultTextStyle>
     <a:defPPr>
@@ -125,6 +126,22 @@
       </a:defRPr>
     </a:lvl9pPr>
   </p:defaultTextStyle>
+  <p:extLst>
+    <p:ext uri="{EFAFB233-063F-42B5-8137-9DF3F51BA10A}">
+      <p15:sldGuideLst xmlns:p15="http://schemas.microsoft.com/office/powerpoint/2012/main">
+        <p15:guide id="1" orient="horz" pos="2160">
+          <p15:clr>
+            <a:srgbClr val="A4A3A4"/>
+          </p15:clr>
+        </p15:guide>
+        <p15:guide id="2" pos="2880">
+          <p15:clr>
+            <a:srgbClr val="A4A3A4"/>
+          </p15:clr>
+        </p15:guide>
+      </p15:sldGuideLst>
+    </p:ext>
+  </p:extLst>
 </p:presentation>
 </file>
 
@@ -166,10 +183,9 @@
           <a:lstStyle/>
           <a:p>
             <a:r>
-              <a:rPr lang="en-US" smtClean="0"/>
+              <a:rPr lang="en-US"/>
               <a:t>Click to edit Master title style</a:t>
             </a:r>
-            <a:endParaRPr lang="en-US"/>
           </a:p>
         </p:txBody>
       </p:sp>
@@ -285,10 +301,9 @@
           </a:lstStyle>
           <a:p>
             <a:r>
-              <a:rPr lang="en-US" smtClean="0"/>
+              <a:rPr lang="en-US"/>
               <a:t>Click to edit Master subtitle style</a:t>
             </a:r>
-            <a:endParaRPr lang="en-US"/>
           </a:p>
         </p:txBody>
       </p:sp>
@@ -309,7 +324,7 @@
           <a:p>
             <a:fld id="{5BCAD085-E8A6-8845-BD4E-CB4CCA059FC4}" type="datetimeFigureOut">
               <a:rPr lang="en-US" smtClean="0"/>
-              <a:t>1/27/13</a:t>
+              <a:t>5/25/26</a:t>
             </a:fld>
             <a:endParaRPr lang="en-US"/>
           </a:p>
@@ -403,10 +418,9 @@
           <a:lstStyle/>
           <a:p>
             <a:r>
-              <a:rPr lang="en-US" smtClean="0"/>
+              <a:rPr lang="en-US"/>
               <a:t>Click to edit Master title style</a:t>
             </a:r>
-            <a:endParaRPr lang="en-US"/>
           </a:p>
         </p:txBody>
       </p:sp>
@@ -427,38 +441,37 @@
           <a:p>
             <a:pPr lvl="0"/>
             <a:r>
-              <a:rPr lang="en-US" smtClean="0"/>
+              <a:rPr lang="en-US"/>
               <a:t>Click to edit Master text styles</a:t>
             </a:r>
           </a:p>
           <a:p>
             <a:pPr lvl="1"/>
             <a:r>
-              <a:rPr lang="en-US" smtClean="0"/>
+              <a:rPr lang="en-US"/>
               <a:t>Second level</a:t>
             </a:r>
           </a:p>
           <a:p>
             <a:pPr lvl="2"/>
             <a:r>
-              <a:rPr lang="en-US" smtClean="0"/>
+              <a:rPr lang="en-US"/>
               <a:t>Third level</a:t>
             </a:r>
           </a:p>
           <a:p>
             <a:pPr lvl="3"/>
             <a:r>
-              <a:rPr lang="en-US" smtClean="0"/>
+              <a:rPr lang="en-US"/>
               <a:t>Fourth level</a:t>
             </a:r>
           </a:p>
           <a:p>
             <a:pPr lvl="4"/>
             <a:r>
-              <a:rPr lang="en-US" smtClean="0"/>
+              <a:rPr lang="en-US"/>
               <a:t>Fifth level</a:t>
             </a:r>
-            <a:endParaRPr lang="en-US"/>
           </a:p>
         </p:txBody>
       </p:sp>
@@ -479,7 +492,7 @@
           <a:p>
             <a:fld id="{5BCAD085-E8A6-8845-BD4E-CB4CCA059FC4}" type="datetimeFigureOut">
               <a:rPr lang="en-US" smtClean="0"/>
-              <a:t>1/27/13</a:t>
+              <a:t>5/25/26</a:t>
             </a:fld>
             <a:endParaRPr lang="en-US"/>
           </a:p>
@@ -578,10 +591,9 @@
           <a:lstStyle/>
           <a:p>
             <a:r>
-              <a:rPr lang="en-US" smtClean="0"/>
+              <a:rPr lang="en-US"/>
               <a:t>Click to edit Master title style</a:t>
             </a:r>
-            <a:endParaRPr lang="en-US"/>
           </a:p>
         </p:txBody>
       </p:sp>
@@ -607,38 +619,37 @@
           <a:p>
             <a:pPr lvl="0"/>
             <a:r>
-              <a:rPr lang="en-US" smtClean="0"/>
+              <a:rPr lang="en-US"/>
               <a:t>Click to edit Master text styles</a:t>
             </a:r>
           </a:p>
           <a:p>
             <a:pPr lvl="1"/>
             <a:r>
-              <a:rPr lang="en-US" smtClean="0"/>
+              <a:rPr lang="en-US"/>
               <a:t>Second level</a:t>
             </a:r>
           </a:p>
           <a:p>
             <a:pPr lvl="2"/>
             <a:r>
-              <a:rPr lang="en-US" smtClean="0"/>
+              <a:rPr lang="en-US"/>
               <a:t>Third level</a:t>
             </a:r>
           </a:p>
           <a:p>
             <a:pPr lvl="3"/>
             <a:r>
-              <a:rPr lang="en-US" smtClean="0"/>
+              <a:rPr lang="en-US"/>
               <a:t>Fourth level</a:t>
             </a:r>
           </a:p>
           <a:p>
             <a:pPr lvl="4"/>
             <a:r>
-              <a:rPr lang="en-US" smtClean="0"/>
+              <a:rPr lang="en-US"/>
               <a:t>Fifth level</a:t>
             </a:r>
-            <a:endParaRPr lang="en-US"/>
           </a:p>
         </p:txBody>
       </p:sp>
@@ -659,7 +670,7 @@
           <a:p>
             <a:fld id="{5BCAD085-E8A6-8845-BD4E-CB4CCA059FC4}" type="datetimeFigureOut">
               <a:rPr lang="en-US" smtClean="0"/>
-              <a:t>1/27/13</a:t>
+              <a:t>5/25/26</a:t>
             </a:fld>
             <a:endParaRPr lang="en-US"/>
           </a:p>
@@ -753,10 +764,9 @@
           <a:lstStyle/>
           <a:p>
             <a:r>
-              <a:rPr lang="en-US" smtClean="0"/>
+              <a:rPr lang="en-US"/>
               <a:t>Click to edit Master title style</a:t>
             </a:r>
-            <a:endParaRPr lang="en-US"/>
           </a:p>
         </p:txBody>
       </p:sp>
@@ -777,38 +787,37 @@
           <a:p>
             <a:pPr lvl="0"/>
             <a:r>
-              <a:rPr lang="en-US" smtClean="0"/>
+              <a:rPr lang="en-US"/>
               <a:t>Click to edit Master text styles</a:t>
             </a:r>
           </a:p>
           <a:p>
             <a:pPr lvl="1"/>
             <a:r>
-              <a:rPr lang="en-US" smtClean="0"/>
+              <a:rPr lang="en-US"/>
               <a:t>Second level</a:t>
             </a:r>
           </a:p>
           <a:p>
             <a:pPr lvl="2"/>
             <a:r>
-              <a:rPr lang="en-US" smtClean="0"/>
+              <a:rPr lang="en-US"/>
               <a:t>Third level</a:t>
             </a:r>
           </a:p>
           <a:p>
             <a:pPr lvl="3"/>
             <a:r>
-              <a:rPr lang="en-US" smtClean="0"/>
+              <a:rPr lang="en-US"/>
               <a:t>Fourth level</a:t>
             </a:r>
           </a:p>
           <a:p>
             <a:pPr lvl="4"/>
             <a:r>
-              <a:rPr lang="en-US" smtClean="0"/>
+              <a:rPr lang="en-US"/>
               <a:t>Fifth level</a:t>
             </a:r>
-            <a:endParaRPr lang="en-US"/>
           </a:p>
         </p:txBody>
       </p:sp>
@@ -829,7 +838,7 @@
           <a:p>
             <a:fld id="{5BCAD085-E8A6-8845-BD4E-CB4CCA059FC4}" type="datetimeFigureOut">
               <a:rPr lang="en-US" smtClean="0"/>
-              <a:t>1/27/13</a:t>
+              <a:t>5/25/26</a:t>
             </a:fld>
             <a:endParaRPr lang="en-US"/>
           </a:p>
@@ -932,10 +941,9 @@
           </a:lstStyle>
           <a:p>
             <a:r>
-              <a:rPr lang="en-US" smtClean="0"/>
+              <a:rPr lang="en-US"/>
               <a:t>Click to edit Master title style</a:t>
             </a:r>
-            <a:endParaRPr lang="en-US"/>
           </a:p>
         </p:txBody>
       </p:sp>
@@ -1052,7 +1060,7 @@
           <a:p>
             <a:pPr lvl="0"/>
             <a:r>
-              <a:rPr lang="en-US" smtClean="0"/>
+              <a:rPr lang="en-US"/>
               <a:t>Click to edit Master text styles</a:t>
             </a:r>
           </a:p>
@@ -1075,7 +1083,7 @@
           <a:p>
             <a:fld id="{5BCAD085-E8A6-8845-BD4E-CB4CCA059FC4}" type="datetimeFigureOut">
               <a:rPr lang="en-US" smtClean="0"/>
-              <a:t>1/27/13</a:t>
+              <a:t>5/25/26</a:t>
             </a:fld>
             <a:endParaRPr lang="en-US"/>
           </a:p>
@@ -1169,10 +1177,9 @@
           <a:lstStyle/>
           <a:p>
             <a:r>
-              <a:rPr lang="en-US" smtClean="0"/>
+              <a:rPr lang="en-US"/>
               <a:t>Click to edit Master title style</a:t>
             </a:r>
-            <a:endParaRPr lang="en-US"/>
           </a:p>
         </p:txBody>
       </p:sp>
@@ -1226,38 +1233,37 @@
           <a:p>
             <a:pPr lvl="0"/>
             <a:r>
-              <a:rPr lang="en-US" smtClean="0"/>
+              <a:rPr lang="en-US"/>
               <a:t>Click to edit Master text styles</a:t>
             </a:r>
           </a:p>
           <a:p>
             <a:pPr lvl="1"/>
             <a:r>
-              <a:rPr lang="en-US" smtClean="0"/>
+              <a:rPr lang="en-US"/>
               <a:t>Second level</a:t>
             </a:r>
           </a:p>
           <a:p>
             <a:pPr lvl="2"/>
             <a:r>
-              <a:rPr lang="en-US" smtClean="0"/>
+              <a:rPr lang="en-US"/>
               <a:t>Third level</a:t>
             </a:r>
           </a:p>
           <a:p>
             <a:pPr lvl="3"/>
             <a:r>
-              <a:rPr lang="en-US" smtClean="0"/>
+              <a:rPr lang="en-US"/>
               <a:t>Fourth level</a:t>
             </a:r>
           </a:p>
           <a:p>
             <a:pPr lvl="4"/>
             <a:r>
-              <a:rPr lang="en-US" smtClean="0"/>
+              <a:rPr lang="en-US"/>
               <a:t>Fifth level</a:t>
             </a:r>
-            <a:endParaRPr lang="en-US"/>
           </a:p>
         </p:txBody>
       </p:sp>
@@ -1311,38 +1317,37 @@
           <a:p>
             <a:pPr lvl="0"/>
             <a:r>
-              <a:rPr lang="en-US" smtClean="0"/>
+              <a:rPr lang="en-US"/>
               <a:t>Click to edit Master text styles</a:t>
             </a:r>
           </a:p>
           <a:p>
             <a:pPr lvl="1"/>
             <a:r>
-              <a:rPr lang="en-US" smtClean="0"/>
+              <a:rPr lang="en-US"/>
               <a:t>Second level</a:t>
             </a:r>
           </a:p>
           <a:p>
             <a:pPr lvl="2"/>
             <a:r>
-              <a:rPr lang="en-US" smtClean="0"/>
+              <a:rPr lang="en-US"/>
               <a:t>Third level</a:t>
             </a:r>
           </a:p>
           <a:p>
             <a:pPr lvl="3"/>
             <a:r>
-              <a:rPr lang="en-US" smtClean="0"/>
+              <a:rPr lang="en-US"/>
               <a:t>Fourth level</a:t>
             </a:r>
           </a:p>
           <a:p>
             <a:pPr lvl="4"/>
             <a:r>
-              <a:rPr lang="en-US" smtClean="0"/>
+              <a:rPr lang="en-US"/>
               <a:t>Fifth level</a:t>
             </a:r>
-            <a:endParaRPr lang="en-US"/>
           </a:p>
         </p:txBody>
       </p:sp>
@@ -1363,7 +1368,7 @@
           <a:p>
             <a:fld id="{5BCAD085-E8A6-8845-BD4E-CB4CCA059FC4}" type="datetimeFigureOut">
               <a:rPr lang="en-US" smtClean="0"/>
-              <a:t>1/27/13</a:t>
+              <a:t>5/25/26</a:t>
             </a:fld>
             <a:endParaRPr lang="en-US"/>
           </a:p>
@@ -1461,10 +1466,9 @@
           </a:lstStyle>
           <a:p>
             <a:r>
-              <a:rPr lang="en-US" smtClean="0"/>
+              <a:rPr lang="en-US"/>
               <a:t>Click to edit Master title style</a:t>
             </a:r>
-            <a:endParaRPr lang="en-US"/>
           </a:p>
         </p:txBody>
       </p:sp>
@@ -1527,7 +1531,7 @@
           <a:p>
             <a:pPr lvl="0"/>
             <a:r>
-              <a:rPr lang="en-US" smtClean="0"/>
+              <a:rPr lang="en-US"/>
               <a:t>Click to edit Master text styles</a:t>
             </a:r>
           </a:p>
@@ -1583,38 +1587,37 @@
           <a:p>
             <a:pPr lvl="0"/>
             <a:r>
-              <a:rPr lang="en-US" smtClean="0"/>
+              <a:rPr lang="en-US"/>
               <a:t>Click to edit Master text styles</a:t>
             </a:r>
           </a:p>
           <a:p>
             <a:pPr lvl="1"/>
             <a:r>
-              <a:rPr lang="en-US" smtClean="0"/>
+              <a:rPr lang="en-US"/>
               <a:t>Second level</a:t>
             </a:r>
           </a:p>
           <a:p>
             <a:pPr lvl="2"/>
             <a:r>
-              <a:rPr lang="en-US" smtClean="0"/>
+              <a:rPr lang="en-US"/>
               <a:t>Third level</a:t>
             </a:r>
           </a:p>
           <a:p>
             <a:pPr lvl="3"/>
             <a:r>
-              <a:rPr lang="en-US" smtClean="0"/>
+              <a:rPr lang="en-US"/>
               <a:t>Fourth level</a:t>
             </a:r>
           </a:p>
           <a:p>
             <a:pPr lvl="4"/>
             <a:r>
-              <a:rPr lang="en-US" smtClean="0"/>
+              <a:rPr lang="en-US"/>
               <a:t>Fifth level</a:t>
             </a:r>
-            <a:endParaRPr lang="en-US"/>
           </a:p>
         </p:txBody>
       </p:sp>
@@ -1677,7 +1680,7 @@
           <a:p>
             <a:pPr lvl="0"/>
             <a:r>
-              <a:rPr lang="en-US" smtClean="0"/>
+              <a:rPr lang="en-US"/>
               <a:t>Click to edit Master text styles</a:t>
             </a:r>
           </a:p>
@@ -1733,38 +1736,37 @@
           <a:p>
             <a:pPr lvl="0"/>
             <a:r>
-              <a:rPr lang="en-US" smtClean="0"/>
+              <a:rPr lang="en-US"/>
               <a:t>Click to edit Master text styles</a:t>
             </a:r>
           </a:p>
           <a:p>
             <a:pPr lvl="1"/>
             <a:r>
-              <a:rPr lang="en-US" smtClean="0"/>
+              <a:rPr lang="en-US"/>
               <a:t>Second level</a:t>
             </a:r>
           </a:p>
           <a:p>
             <a:pPr lvl="2"/>
             <a:r>
-              <a:rPr lang="en-US" smtClean="0"/>
+              <a:rPr lang="en-US"/>
               <a:t>Third level</a:t>
             </a:r>
           </a:p>
           <a:p>
             <a:pPr lvl="3"/>
             <a:r>
-              <a:rPr lang="en-US" smtClean="0"/>
+              <a:rPr lang="en-US"/>
               <a:t>Fourth level</a:t>
             </a:r>
           </a:p>
           <a:p>
             <a:pPr lvl="4"/>
             <a:r>
-              <a:rPr lang="en-US" smtClean="0"/>
+              <a:rPr lang="en-US"/>
               <a:t>Fifth level</a:t>
             </a:r>
-            <a:endParaRPr lang="en-US"/>
           </a:p>
         </p:txBody>
       </p:sp>
@@ -1785,7 +1787,7 @@
           <a:p>
             <a:fld id="{5BCAD085-E8A6-8845-BD4E-CB4CCA059FC4}" type="datetimeFigureOut">
               <a:rPr lang="en-US" smtClean="0"/>
-              <a:t>1/27/13</a:t>
+              <a:t>5/25/26</a:t>
             </a:fld>
             <a:endParaRPr lang="en-US"/>
           </a:p>
@@ -1879,10 +1881,9 @@
           <a:lstStyle/>
           <a:p>
             <a:r>
-              <a:rPr lang="en-US" smtClean="0"/>
+              <a:rPr lang="en-US"/>
               <a:t>Click to edit Master title style</a:t>
             </a:r>
-            <a:endParaRPr lang="en-US"/>
           </a:p>
         </p:txBody>
       </p:sp>
@@ -1903,7 +1904,7 @@
           <a:p>
             <a:fld id="{5BCAD085-E8A6-8845-BD4E-CB4CCA059FC4}" type="datetimeFigureOut">
               <a:rPr lang="en-US" smtClean="0"/>
-              <a:t>1/27/13</a:t>
+              <a:t>5/25/26</a:t>
             </a:fld>
             <a:endParaRPr lang="en-US"/>
           </a:p>
@@ -1998,7 +1999,7 @@
           <a:p>
             <a:fld id="{5BCAD085-E8A6-8845-BD4E-CB4CCA059FC4}" type="datetimeFigureOut">
               <a:rPr lang="en-US" smtClean="0"/>
-              <a:t>1/27/13</a:t>
+              <a:t>5/25/26</a:t>
             </a:fld>
             <a:endParaRPr lang="en-US"/>
           </a:p>
@@ -2101,10 +2102,9 @@
           </a:lstStyle>
           <a:p>
             <a:r>
-              <a:rPr lang="en-US" smtClean="0"/>
+              <a:rPr lang="en-US"/>
               <a:t>Click to edit Master title style</a:t>
             </a:r>
-            <a:endParaRPr lang="en-US"/>
           </a:p>
         </p:txBody>
       </p:sp>
@@ -2158,38 +2158,37 @@
           <a:p>
             <a:pPr lvl="0"/>
             <a:r>
-              <a:rPr lang="en-US" smtClean="0"/>
+              <a:rPr lang="en-US"/>
               <a:t>Click to edit Master text styles</a:t>
             </a:r>
           </a:p>
           <a:p>
             <a:pPr lvl="1"/>
             <a:r>
-              <a:rPr lang="en-US" smtClean="0"/>
+              <a:rPr lang="en-US"/>
               <a:t>Second level</a:t>
             </a:r>
           </a:p>
           <a:p>
             <a:pPr lvl="2"/>
             <a:r>
-              <a:rPr lang="en-US" smtClean="0"/>
+              <a:rPr lang="en-US"/>
               <a:t>Third level</a:t>
             </a:r>
           </a:p>
           <a:p>
             <a:pPr lvl="3"/>
             <a:r>
-              <a:rPr lang="en-US" smtClean="0"/>
+              <a:rPr lang="en-US"/>
               <a:t>Fourth level</a:t>
             </a:r>
           </a:p>
           <a:p>
             <a:pPr lvl="4"/>
             <a:r>
-              <a:rPr lang="en-US" smtClean="0"/>
+              <a:rPr lang="en-US"/>
               <a:t>Fifth level</a:t>
             </a:r>
-            <a:endParaRPr lang="en-US"/>
           </a:p>
         </p:txBody>
       </p:sp>
@@ -2252,7 +2251,7 @@
           <a:p>
             <a:pPr lvl="0"/>
             <a:r>
-              <a:rPr lang="en-US" smtClean="0"/>
+              <a:rPr lang="en-US"/>
               <a:t>Click to edit Master text styles</a:t>
             </a:r>
           </a:p>
@@ -2275,7 +2274,7 @@
           <a:p>
             <a:fld id="{5BCAD085-E8A6-8845-BD4E-CB4CCA059FC4}" type="datetimeFigureOut">
               <a:rPr lang="en-US" smtClean="0"/>
-              <a:t>1/27/13</a:t>
+              <a:t>5/25/26</a:t>
             </a:fld>
             <a:endParaRPr lang="en-US"/>
           </a:p>
@@ -2378,10 +2377,9 @@
           </a:lstStyle>
           <a:p>
             <a:r>
-              <a:rPr lang="en-US" smtClean="0"/>
+              <a:rPr lang="en-US"/>
               <a:t>Click to edit Master title style</a:t>
             </a:r>
-            <a:endParaRPr lang="en-US"/>
           </a:p>
         </p:txBody>
       </p:sp>
@@ -2505,7 +2503,7 @@
           <a:p>
             <a:pPr lvl="0"/>
             <a:r>
-              <a:rPr lang="en-US" smtClean="0"/>
+              <a:rPr lang="en-US"/>
               <a:t>Click to edit Master text styles</a:t>
             </a:r>
           </a:p>
@@ -2528,7 +2526,7 @@
           <a:p>
             <a:fld id="{5BCAD085-E8A6-8845-BD4E-CB4CCA059FC4}" type="datetimeFigureOut">
               <a:rPr lang="en-US" smtClean="0"/>
-              <a:t>1/27/13</a:t>
+              <a:t>5/25/26</a:t>
             </a:fld>
             <a:endParaRPr lang="en-US"/>
           </a:p>
@@ -2637,10 +2635,9 @@
           <a:lstStyle/>
           <a:p>
             <a:r>
-              <a:rPr lang="en-US" smtClean="0"/>
+              <a:rPr lang="en-US"/>
               <a:t>Click to edit Master title style</a:t>
             </a:r>
-            <a:endParaRPr lang="en-US"/>
           </a:p>
         </p:txBody>
       </p:sp>
@@ -2671,38 +2668,37 @@
           <a:p>
             <a:pPr lvl="0"/>
             <a:r>
-              <a:rPr lang="en-US" smtClean="0"/>
+              <a:rPr lang="en-US"/>
               <a:t>Click to edit Master text styles</a:t>
             </a:r>
           </a:p>
           <a:p>
             <a:pPr lvl="1"/>
             <a:r>
-              <a:rPr lang="en-US" smtClean="0"/>
+              <a:rPr lang="en-US"/>
               <a:t>Second level</a:t>
             </a:r>
           </a:p>
           <a:p>
             <a:pPr lvl="2"/>
             <a:r>
-              <a:rPr lang="en-US" smtClean="0"/>
+              <a:rPr lang="en-US"/>
               <a:t>Third level</a:t>
             </a:r>
           </a:p>
           <a:p>
             <a:pPr lvl="3"/>
             <a:r>
-              <a:rPr lang="en-US" smtClean="0"/>
+              <a:rPr lang="en-US"/>
               <a:t>Fourth level</a:t>
             </a:r>
           </a:p>
           <a:p>
             <a:pPr lvl="4"/>
             <a:r>
-              <a:rPr lang="en-US" smtClean="0"/>
+              <a:rPr lang="en-US"/>
               <a:t>Fifth level</a:t>
             </a:r>
-            <a:endParaRPr lang="en-US"/>
           </a:p>
         </p:txBody>
       </p:sp>
@@ -2741,7 +2737,7 @@
           <a:p>
             <a:fld id="{5BCAD085-E8A6-8845-BD4E-CB4CCA059FC4}" type="datetimeFigureOut">
               <a:rPr lang="en-US" smtClean="0"/>
-              <a:t>1/27/13</a:t>
+              <a:t>5/25/26</a:t>
             </a:fld>
             <a:endParaRPr lang="en-US"/>
           </a:p>
@@ -3100,7 +3096,7 @@
 </file>
 
 <file path=ppt/slides/slide1.xml><?xml version="1.0" encoding="utf-8"?>
-<p:sld xmlns:a="http://schemas.openxmlformats.org/drawingml/2006/main" xmlns:p="http://schemas.openxmlformats.org/presentationml/2006/main" xmlns:r="http://schemas.openxmlformats.org/officeDocument/2006/relationships">
+<p:sld xmlns:a="http://schemas.openxmlformats.org/drawingml/2006/main" xmlns:r="http://schemas.openxmlformats.org/officeDocument/2006/relationships" xmlns:p="http://schemas.openxmlformats.org/presentationml/2006/main">
   <p:cSld>
     <p:bg>
       <p:bgPr>
@@ -3116,7 +3112,14 @@
         <p:cNvGrpSpPr/>
         <p:nvPr/>
       </p:nvGrpSpPr>
-      <p:grpSpPr/>
+      <p:grpSpPr>
+        <a:xfrm>
+          <a:off x="0" y="0"/>
+          <a:ext cx="0" cy="0"/>
+          <a:chOff x="0" y="0"/>
+          <a:chExt cx="0" cy="0"/>
+        </a:xfrm>
+      </p:grpSpPr>
       <p:sp>
         <p:nvSpPr>
           <p:cNvPr id="2" name="Rectangle 1"/>
@@ -3140,7 +3143,7 @@
                 <a:srgbClr val="000000"/>
               </a:gs>
             </a:gsLst>
-            <a:lin scaled="0" ang="13800000"/>
+            <a:lin ang="13800000" scaled="0"/>
           </a:gradFill>
           <a:ln>
             <a:noFill/>
@@ -3165,6 +3168,7 @@
           <a:lstStyle/>
           <a:p>
             <a:pPr algn="ctr"/>
+            <a:endParaRPr/>
           </a:p>
         </p:txBody>
       </p:sp>
@@ -3228,7 +3232,7 @@
                 <a:srgbClr val="64D2FF"/>
               </a:gs>
             </a:gsLst>
-            <a:lin scaled="0" ang="0"/>
+            <a:lin ang="0" scaled="0"/>
           </a:gradFill>
           <a:ln>
             <a:noFill/>
@@ -3254,6 +3258,7 @@
           <a:lstStyle/>
           <a:p>
             <a:pPr algn="ctr"/>
+            <a:endParaRPr/>
           </a:p>
         </p:txBody>
       </p:sp>
@@ -3336,7 +3341,7 @@
 </file>
 
 <file path=ppt/slides/slide10.xml><?xml version="1.0" encoding="utf-8"?>
-<p:sld xmlns:a="http://schemas.openxmlformats.org/drawingml/2006/main" xmlns:p="http://schemas.openxmlformats.org/presentationml/2006/main" xmlns:r="http://schemas.openxmlformats.org/officeDocument/2006/relationships">
+<p:sld xmlns:a="http://schemas.openxmlformats.org/drawingml/2006/main" xmlns:r="http://schemas.openxmlformats.org/officeDocument/2006/relationships" xmlns:p="http://schemas.openxmlformats.org/presentationml/2006/main">
   <p:cSld>
     <p:bg>
       <p:bgPr>
@@ -3352,7 +3357,14 @@
         <p:cNvGrpSpPr/>
         <p:nvPr/>
       </p:nvGrpSpPr>
-      <p:grpSpPr/>
+      <p:grpSpPr>
+        <a:xfrm>
+          <a:off x="0" y="0"/>
+          <a:ext cx="0" cy="0"/>
+          <a:chOff x="0" y="0"/>
+          <a:chExt cx="0" cy="0"/>
+        </a:xfrm>
+      </p:grpSpPr>
       <p:sp>
         <p:nvSpPr>
           <p:cNvPr id="2" name="Rectangle 1"/>
@@ -3376,7 +3388,7 @@
                 <a:srgbClr val="000000"/>
               </a:gs>
             </a:gsLst>
-            <a:lin scaled="0" ang="13800000"/>
+            <a:lin ang="13800000" scaled="0"/>
           </a:gradFill>
           <a:ln>
             <a:noFill/>
@@ -3401,6 +3413,7 @@
           <a:lstStyle/>
           <a:p>
             <a:pPr algn="ctr"/>
+            <a:endParaRPr/>
           </a:p>
         </p:txBody>
       </p:sp>
@@ -3499,7 +3512,7 @@
                 <a:srgbClr val="64D2FF"/>
               </a:gs>
             </a:gsLst>
-            <a:lin scaled="0" ang="0"/>
+            <a:lin ang="0" scaled="0"/>
           </a:gradFill>
           <a:ln>
             <a:noFill/>
@@ -3525,6 +3538,7 @@
           <a:lstStyle/>
           <a:p>
             <a:pPr algn="ctr"/>
+            <a:endParaRPr/>
           </a:p>
         </p:txBody>
       </p:sp>
@@ -3588,7 +3602,7 @@
                 <a:srgbClr val="06162E"/>
               </a:gs>
             </a:gsLst>
-            <a:lin scaled="0" ang="14400000"/>
+            <a:lin ang="14400000" scaled="0"/>
           </a:gradFill>
           <a:ln>
             <a:noFill/>
@@ -3614,6 +3628,7 @@
           <a:lstStyle/>
           <a:p>
             <a:pPr algn="ctr"/>
+            <a:endParaRPr/>
           </a:p>
         </p:txBody>
       </p:sp>
@@ -3747,7 +3762,7 @@
                 <a:srgbClr val="06162E"/>
               </a:gs>
             </a:gsLst>
-            <a:lin scaled="0" ang="14400000"/>
+            <a:lin ang="14400000" scaled="0"/>
           </a:gradFill>
           <a:ln>
             <a:noFill/>
@@ -3773,6 +3788,7 @@
           <a:lstStyle/>
           <a:p>
             <a:pPr algn="ctr"/>
+            <a:endParaRPr/>
           </a:p>
         </p:txBody>
       </p:sp>
@@ -3906,7 +3922,7 @@
                 <a:srgbClr val="06162E"/>
               </a:gs>
             </a:gsLst>
-            <a:lin scaled="0" ang="14400000"/>
+            <a:lin ang="14400000" scaled="0"/>
           </a:gradFill>
           <a:ln>
             <a:noFill/>
@@ -3932,6 +3948,7 @@
           <a:lstStyle/>
           <a:p>
             <a:pPr algn="ctr"/>
+            <a:endParaRPr/>
           </a:p>
         </p:txBody>
       </p:sp>
@@ -4065,7 +4082,7 @@
                 <a:srgbClr val="06162E"/>
               </a:gs>
             </a:gsLst>
-            <a:lin scaled="0" ang="14400000"/>
+            <a:lin ang="14400000" scaled="0"/>
           </a:gradFill>
           <a:ln>
             <a:noFill/>
@@ -4091,6 +4108,7 @@
           <a:lstStyle/>
           <a:p>
             <a:pPr algn="ctr"/>
+            <a:endParaRPr/>
           </a:p>
         </p:txBody>
       </p:sp>
@@ -4224,7 +4242,7 @@
                 <a:srgbClr val="06162E"/>
               </a:gs>
             </a:gsLst>
-            <a:lin scaled="0" ang="14400000"/>
+            <a:lin ang="14400000" scaled="0"/>
           </a:gradFill>
           <a:ln>
             <a:noFill/>
@@ -4250,6 +4268,7 @@
           <a:lstStyle/>
           <a:p>
             <a:pPr algn="ctr"/>
+            <a:endParaRPr/>
           </a:p>
         </p:txBody>
       </p:sp>
@@ -4367,7 +4386,7 @@
 </file>
 
 <file path=ppt/slides/slide11.xml><?xml version="1.0" encoding="utf-8"?>
-<p:sld xmlns:a="http://schemas.openxmlformats.org/drawingml/2006/main" xmlns:p="http://schemas.openxmlformats.org/presentationml/2006/main" xmlns:r="http://schemas.openxmlformats.org/officeDocument/2006/relationships">
+<p:sld xmlns:a="http://schemas.openxmlformats.org/drawingml/2006/main" xmlns:r="http://schemas.openxmlformats.org/officeDocument/2006/relationships" xmlns:p="http://schemas.openxmlformats.org/presentationml/2006/main">
   <p:cSld>
     <p:bg>
       <p:bgPr>
@@ -4383,7 +4402,14 @@
         <p:cNvGrpSpPr/>
         <p:nvPr/>
       </p:nvGrpSpPr>
-      <p:grpSpPr/>
+      <p:grpSpPr>
+        <a:xfrm>
+          <a:off x="0" y="0"/>
+          <a:ext cx="0" cy="0"/>
+          <a:chOff x="0" y="0"/>
+          <a:chExt cx="0" cy="0"/>
+        </a:xfrm>
+      </p:grpSpPr>
       <p:sp>
         <p:nvSpPr>
           <p:cNvPr id="2" name="Rectangle 1"/>
@@ -4407,7 +4433,7 @@
                 <a:srgbClr val="000000"/>
               </a:gs>
             </a:gsLst>
-            <a:lin scaled="0" ang="13800000"/>
+            <a:lin ang="13800000" scaled="0"/>
           </a:gradFill>
           <a:ln>
             <a:noFill/>
@@ -4432,6 +4458,7 @@
           <a:lstStyle/>
           <a:p>
             <a:pPr algn="ctr"/>
+            <a:endParaRPr/>
           </a:p>
         </p:txBody>
       </p:sp>
@@ -4530,7 +4557,7 @@
                 <a:srgbClr val="64D2FF"/>
               </a:gs>
             </a:gsLst>
-            <a:lin scaled="0" ang="0"/>
+            <a:lin ang="0" scaled="0"/>
           </a:gradFill>
           <a:ln>
             <a:noFill/>
@@ -4556,6 +4583,7 @@
           <a:lstStyle/>
           <a:p>
             <a:pPr algn="ctr"/>
+            <a:endParaRPr/>
           </a:p>
         </p:txBody>
       </p:sp>
@@ -4608,6 +4636,7 @@
           <a:lstStyle/>
           <a:p>
             <a:pPr algn="ctr"/>
+            <a:endParaRPr/>
           </a:p>
         </p:txBody>
       </p:sp>
@@ -4652,6 +4681,7 @@
           <a:lstStyle/>
           <a:p>
             <a:pPr algn="ctr"/>
+            <a:endParaRPr/>
           </a:p>
         </p:txBody>
       </p:sp>
@@ -4774,6 +4804,7 @@
           <a:lstStyle/>
           <a:p>
             <a:pPr algn="ctr"/>
+            <a:endParaRPr/>
           </a:p>
         </p:txBody>
       </p:sp>
@@ -4818,6 +4849,7 @@
           <a:lstStyle/>
           <a:p>
             <a:pPr algn="ctr"/>
+            <a:endParaRPr/>
           </a:p>
         </p:txBody>
       </p:sp>
@@ -4940,6 +4972,7 @@
           <a:lstStyle/>
           <a:p>
             <a:pPr algn="ctr"/>
+            <a:endParaRPr/>
           </a:p>
         </p:txBody>
       </p:sp>
@@ -4984,6 +5017,7 @@
           <a:lstStyle/>
           <a:p>
             <a:pPr algn="ctr"/>
+            <a:endParaRPr/>
           </a:p>
         </p:txBody>
       </p:sp>
@@ -5106,6 +5140,7 @@
           <a:lstStyle/>
           <a:p>
             <a:pPr algn="ctr"/>
+            <a:endParaRPr/>
           </a:p>
         </p:txBody>
       </p:sp>
@@ -5150,6 +5185,7 @@
           <a:lstStyle/>
           <a:p>
             <a:pPr algn="ctr"/>
+            <a:endParaRPr/>
           </a:p>
         </p:txBody>
       </p:sp>
@@ -5272,6 +5308,7 @@
           <a:lstStyle/>
           <a:p>
             <a:pPr algn="ctr"/>
+            <a:endParaRPr/>
           </a:p>
         </p:txBody>
       </p:sp>
@@ -5316,6 +5353,7 @@
           <a:lstStyle/>
           <a:p>
             <a:pPr algn="ctr"/>
+            <a:endParaRPr/>
           </a:p>
         </p:txBody>
       </p:sp>
@@ -5438,6 +5476,7 @@
           <a:lstStyle/>
           <a:p>
             <a:pPr algn="ctr"/>
+            <a:endParaRPr/>
           </a:p>
         </p:txBody>
       </p:sp>
@@ -5482,6 +5521,7 @@
           <a:lstStyle/>
           <a:p>
             <a:pPr algn="ctr"/>
+            <a:endParaRPr/>
           </a:p>
         </p:txBody>
       </p:sp>
@@ -5564,7 +5604,7 @@
 </file>
 
 <file path=ppt/slides/slide12.xml><?xml version="1.0" encoding="utf-8"?>
-<p:sld xmlns:a="http://schemas.openxmlformats.org/drawingml/2006/main" xmlns:p="http://schemas.openxmlformats.org/presentationml/2006/main" xmlns:r="http://schemas.openxmlformats.org/officeDocument/2006/relationships">
+<p:sld xmlns:a="http://schemas.openxmlformats.org/drawingml/2006/main" xmlns:r="http://schemas.openxmlformats.org/officeDocument/2006/relationships" xmlns:p="http://schemas.openxmlformats.org/presentationml/2006/main">
   <p:cSld>
     <p:bg>
       <p:bgPr>
@@ -5580,58 +5620,14 @@
         <p:cNvGrpSpPr/>
         <p:nvPr/>
       </p:nvGrpSpPr>
-      <p:grpSpPr/>
-      <p:sp>
-        <p:nvSpPr>
-          <p:cNvPr id="2" name="Rectangle 1"/>
-          <p:cNvSpPr/>
-          <p:nvPr/>
-        </p:nvSpPr>
-        <p:spPr>
-          <a:xfrm>
-            <a:off x="0" y="0"/>
-            <a:ext cx="12191695" cy="6858000"/>
-          </a:xfrm>
-          <a:prstGeom prst="rect">
-            <a:avLst/>
-          </a:prstGeom>
-          <a:gradFill rotWithShape="1">
-            <a:gsLst>
-              <a:gs pos="0">
-                <a:srgbClr val="061224"/>
-              </a:gs>
-              <a:gs pos="100000">
-                <a:srgbClr val="000000"/>
-              </a:gs>
-            </a:gsLst>
-            <a:lin scaled="0" ang="13800000"/>
-          </a:gradFill>
-          <a:ln>
-            <a:noFill/>
-          </a:ln>
-        </p:spPr>
-        <p:style>
-          <a:lnRef idx="1">
-            <a:schemeClr val="accent1"/>
-          </a:lnRef>
-          <a:fillRef idx="3">
-            <a:schemeClr val="accent1"/>
-          </a:fillRef>
-          <a:effectRef idx="2">
-            <a:schemeClr val="accent1"/>
-          </a:effectRef>
-          <a:fontRef idx="minor">
-            <a:schemeClr val="lt1"/>
-          </a:fontRef>
-        </p:style>
-        <p:txBody>
-          <a:bodyPr rtlCol="0" anchor="ctr"/>
-          <a:lstStyle/>
-          <a:p>
-            <a:pPr algn="ctr"/>
-          </a:p>
-        </p:txBody>
-      </p:sp>
+      <p:grpSpPr>
+        <a:xfrm>
+          <a:off x="0" y="0"/>
+          <a:ext cx="0" cy="0"/>
+          <a:chOff x="0" y="0"/>
+          <a:chExt cx="0" cy="0"/>
+        </a:xfrm>
+      </p:grpSpPr>
       <p:sp>
         <p:nvSpPr>
           <p:cNvPr id="3" name="TextBox 2"/>
@@ -5691,13 +5687,31 @@
           <a:p>
             <a:pPr algn="l"/>
             <a:r>
-              <a:rPr sz="4600" b="1" i="0">
+              <a:rPr sz="4600" b="1" i="0" dirty="0">
                 <a:solidFill>
                   <a:srgbClr val="FFFFFF"/>
                 </a:solidFill>
                 <a:latin typeface="Inter"/>
               </a:rPr>
-              <a:t>AI を、チームメイトに。</a:t>
+              <a:t>AI </a:t>
+            </a:r>
+            <a:r>
+              <a:rPr sz="4600" b="1" i="0" dirty="0" err="1">
+                <a:solidFill>
+                  <a:srgbClr val="FFFFFF"/>
+                </a:solidFill>
+                <a:latin typeface="Inter"/>
+              </a:rPr>
+              <a:t>を、チームメイトに</a:t>
+            </a:r>
+            <a:r>
+              <a:rPr sz="4600" b="1" i="0" dirty="0">
+                <a:solidFill>
+                  <a:srgbClr val="FFFFFF"/>
+                </a:solidFill>
+                <a:latin typeface="Inter"/>
+              </a:rPr>
+              <a:t>。</a:t>
             </a:r>
           </a:p>
         </p:txBody>
@@ -5727,7 +5741,7 @@
                 <a:srgbClr val="64D2FF"/>
               </a:gs>
             </a:gsLst>
-            <a:lin scaled="0" ang="0"/>
+            <a:lin ang="0" scaled="0"/>
           </a:gradFill>
           <a:ln>
             <a:noFill/>
@@ -5753,6 +5767,7 @@
           <a:lstStyle/>
           <a:p>
             <a:pPr algn="ctr"/>
+            <a:endParaRPr/>
           </a:p>
         </p:txBody>
       </p:sp>
@@ -5816,7 +5831,7 @@
                 <a:srgbClr val="061224"/>
               </a:gs>
             </a:gsLst>
-            <a:lin scaled="0" ang="14400000"/>
+            <a:lin ang="14400000" scaled="0"/>
           </a:gradFill>
           <a:ln>
             <a:noFill/>
@@ -5842,6 +5857,7 @@
           <a:lstStyle/>
           <a:p>
             <a:pPr algn="ctr"/>
+            <a:endParaRPr/>
           </a:p>
         </p:txBody>
       </p:sp>
@@ -5869,7 +5885,7 @@
           <a:p>
             <a:pPr algn="ctr"/>
             <a:r>
-              <a:rPr sz="4800" b="1" i="0">
+              <a:rPr sz="4800" b="1" i="0" dirty="0">
                 <a:solidFill>
                   <a:srgbClr val="64D2FF"/>
                 </a:solidFill>
@@ -5940,7 +5956,7 @@
                 <a:srgbClr val="061224"/>
               </a:gs>
             </a:gsLst>
-            <a:lin scaled="0" ang="14400000"/>
+            <a:lin ang="14400000" scaled="0"/>
           </a:gradFill>
           <a:ln>
             <a:noFill/>
@@ -5966,6 +5982,7 @@
           <a:lstStyle/>
           <a:p>
             <a:pPr algn="ctr"/>
+            <a:endParaRPr/>
           </a:p>
         </p:txBody>
       </p:sp>
@@ -6064,7 +6081,7 @@
                 <a:srgbClr val="061224"/>
               </a:gs>
             </a:gsLst>
-            <a:lin scaled="0" ang="14400000"/>
+            <a:lin ang="14400000" scaled="0"/>
           </a:gradFill>
           <a:ln>
             <a:noFill/>
@@ -6090,6 +6107,7 @@
           <a:lstStyle/>
           <a:p>
             <a:pPr algn="ctr"/>
+            <a:endParaRPr/>
           </a:p>
         </p:txBody>
       </p:sp>
@@ -6117,14 +6135,20 @@
           <a:p>
             <a:pPr algn="ctr"/>
             <a:r>
-              <a:rPr sz="4800" b="1" i="0">
+              <a:rPr lang="en-US" sz="4800" b="1" dirty="0">
                 <a:solidFill>
                   <a:srgbClr val="64D2FF"/>
                 </a:solidFill>
                 <a:latin typeface="Inter"/>
               </a:rPr>
-              <a:t>5</a:t>
-            </a:r>
+              <a:t>3</a:t>
+            </a:r>
+            <a:endParaRPr sz="4800" b="1" i="0" dirty="0">
+              <a:solidFill>
+                <a:srgbClr val="64D2FF"/>
+              </a:solidFill>
+              <a:latin typeface="Inter"/>
+            </a:endParaRPr>
           </a:p>
         </p:txBody>
       </p:sp>
@@ -6212,6 +6236,7 @@
           <a:lstStyle/>
           <a:p>
             <a:pPr algn="ctr"/>
+            <a:endParaRPr/>
           </a:p>
         </p:txBody>
       </p:sp>
@@ -6248,7 +6273,7 @@
         <p:spPr>
           <a:xfrm>
             <a:off x="2468880" y="4617720"/>
-            <a:ext cx="3124047" cy="457200"/>
+            <a:ext cx="3124047" cy="400110"/>
           </a:xfrm>
           <a:prstGeom prst="rect">
             <a:avLst/>
@@ -6282,8 +6307,8 @@
         </p:nvSpPr>
         <p:spPr>
           <a:xfrm>
-            <a:off x="2468880" y="5074920"/>
-            <a:ext cx="3124047" cy="731520"/>
+            <a:off x="2468879" y="5097780"/>
+            <a:ext cx="3626967" cy="330155"/>
           </a:xfrm>
           <a:prstGeom prst="rect">
             <a:avLst/>
@@ -6302,14 +6327,20 @@
               </a:lnSpc>
             </a:pPr>
             <a:r>
-              <a:rPr sz="1400" b="0" i="0">
+              <a:rPr sz="1400" b="0" i="0" dirty="0" err="1">
                 <a:solidFill>
                   <a:srgbClr val="B8B8BE"/>
                 </a:solidFill>
                 <a:latin typeface="Inter"/>
               </a:rPr>
-              <a:t>設計ドキュメント・実装・スライドを生成</a:t>
-            </a:r>
+              <a:t>設計ドキュメント・実装</a:t>
+            </a:r>
+            <a:endParaRPr lang="en-US" sz="1400" b="0" i="0" dirty="0">
+              <a:solidFill>
+                <a:srgbClr val="B8B8BE"/>
+              </a:solidFill>
+              <a:latin typeface="Inter"/>
+            </a:endParaRPr>
           </a:p>
         </p:txBody>
       </p:sp>
@@ -6362,6 +6393,7 @@
           <a:lstStyle/>
           <a:p>
             <a:pPr algn="ctr"/>
+            <a:endParaRPr/>
           </a:p>
         </p:txBody>
       </p:sp>
@@ -6432,8 +6464,8 @@
         </p:nvSpPr>
         <p:spPr>
           <a:xfrm>
-            <a:off x="7878927" y="5074920"/>
-            <a:ext cx="3124047" cy="731520"/>
+            <a:off x="7868041" y="5074920"/>
+            <a:ext cx="3124047" cy="330155"/>
           </a:xfrm>
           <a:prstGeom prst="rect">
             <a:avLst/>
@@ -6452,14 +6484,56 @@
               </a:lnSpc>
             </a:pPr>
             <a:r>
-              <a:rPr sz="1400" b="0" i="0">
+              <a:rPr lang="ja-JP" altLang="en-US" sz="1400" b="0" i="0">
                 <a:solidFill>
                   <a:srgbClr val="B8B8BE"/>
                 </a:solidFill>
                 <a:latin typeface="Inter"/>
               </a:rPr>
-              <a:t>全 PR を日本語で自動レビュー（8 PR で指摘・改善）</a:t>
-            </a:r>
+              <a:t>全</a:t>
+            </a:r>
+            <a:r>
+              <a:rPr lang="en-JP" sz="1400" b="0" i="0" dirty="0">
+                <a:solidFill>
+                  <a:srgbClr val="B8B8BE"/>
+                </a:solidFill>
+                <a:latin typeface="Inter"/>
+              </a:rPr>
+              <a:t> </a:t>
+            </a:r>
+            <a:r>
+              <a:rPr sz="1400" b="0" i="0" dirty="0">
+                <a:solidFill>
+                  <a:srgbClr val="B8B8BE"/>
+                </a:solidFill>
+                <a:latin typeface="Inter"/>
+              </a:rPr>
+              <a:t>PR </a:t>
+            </a:r>
+            <a:r>
+              <a:rPr sz="1400" b="0" i="0" dirty="0" err="1">
+                <a:solidFill>
+                  <a:srgbClr val="B8B8BE"/>
+                </a:solidFill>
+                <a:latin typeface="Inter"/>
+              </a:rPr>
+              <a:t>を日本語で自動レビュ</a:t>
+            </a:r>
+            <a:r>
+              <a:rPr lang="en-US" sz="1400" dirty="0">
+                <a:solidFill>
+                  <a:srgbClr val="B8B8BE"/>
+                </a:solidFill>
+                <a:latin typeface="Inter"/>
+              </a:rPr>
+              <a:t>ー</a:t>
+            </a:r>
+            <a:endParaRPr sz="1400" b="0" i="0" dirty="0">
+              <a:solidFill>
+                <a:srgbClr val="B8B8BE"/>
+              </a:solidFill>
+              <a:latin typeface="Inter"/>
+            </a:endParaRPr>
           </a:p>
         </p:txBody>
       </p:sp>
@@ -6507,7 +6581,767 @@
 </file>
 
 <file path=ppt/slides/slide13.xml><?xml version="1.0" encoding="utf-8"?>
-<p:sld xmlns:a="http://schemas.openxmlformats.org/drawingml/2006/main" xmlns:p="http://schemas.openxmlformats.org/presentationml/2006/main" xmlns:r="http://schemas.openxmlformats.org/officeDocument/2006/relationships">
+<p:sld xmlns:a="http://schemas.openxmlformats.org/drawingml/2006/main" xmlns:r="http://schemas.openxmlformats.org/officeDocument/2006/relationships" xmlns:p="http://schemas.openxmlformats.org/presentationml/2006/main">
+  <p:cSld>
+    <p:bg>
+      <p:bgPr>
+        <a:solidFill>
+          <a:srgbClr val="000000"/>
+        </a:solidFill>
+        <a:effectLst/>
+      </p:bgPr>
+    </p:bg>
+    <p:spTree>
+      <p:nvGrpSpPr>
+        <p:cNvPr id="1" name="">
+          <a:extLst>
+            <a:ext uri="{FF2B5EF4-FFF2-40B4-BE49-F238E27FC236}">
+              <a16:creationId xmlns:a16="http://schemas.microsoft.com/office/drawing/2014/main" id="{188003B1-095B-C92F-096F-A687EDF2E842}"/>
+            </a:ext>
+          </a:extLst>
+        </p:cNvPr>
+        <p:cNvGrpSpPr/>
+        <p:nvPr/>
+      </p:nvGrpSpPr>
+      <p:grpSpPr>
+        <a:xfrm>
+          <a:off x="0" y="0"/>
+          <a:ext cx="0" cy="0"/>
+          <a:chOff x="0" y="0"/>
+          <a:chExt cx="0" cy="0"/>
+        </a:xfrm>
+      </p:grpSpPr>
+      <p:sp>
+        <p:nvSpPr>
+          <p:cNvPr id="3" name="TextBox 2">
+            <a:extLst>
+              <a:ext uri="{FF2B5EF4-FFF2-40B4-BE49-F238E27FC236}">
+                <a16:creationId xmlns:a16="http://schemas.microsoft.com/office/drawing/2014/main" id="{EC13743D-604F-EB48-AAE5-40EF8B4DBF5F}"/>
+              </a:ext>
+            </a:extLst>
+          </p:cNvPr>
+          <p:cNvSpPr txBox="1"/>
+          <p:nvPr/>
+        </p:nvSpPr>
+        <p:spPr>
+          <a:xfrm>
+            <a:off x="914400" y="502920"/>
+            <a:ext cx="10362895" cy="310896"/>
+          </a:xfrm>
+          <a:prstGeom prst="rect">
+            <a:avLst/>
+          </a:prstGeom>
+          <a:noFill/>
+        </p:spPr>
+        <p:txBody>
+          <a:bodyPr wrap="square">
+            <a:spAutoFit/>
+          </a:bodyPr>
+          <a:lstStyle/>
+          <a:p>
+            <a:pPr algn="l"/>
+            <a:r>
+              <a:rPr sz="1200" b="1" i="0">
+                <a:solidFill>
+                  <a:srgbClr val="0A84FF"/>
+                </a:solidFill>
+                <a:latin typeface="Inter"/>
+              </a:rPr>
+              <a:t>AI-DRIVEN DEVELOPMENT</a:t>
+            </a:r>
+          </a:p>
+        </p:txBody>
+      </p:sp>
+      <p:sp>
+        <p:nvSpPr>
+          <p:cNvPr id="4" name="TextBox 3">
+            <a:extLst>
+              <a:ext uri="{FF2B5EF4-FFF2-40B4-BE49-F238E27FC236}">
+                <a16:creationId xmlns:a16="http://schemas.microsoft.com/office/drawing/2014/main" id="{B08B1A33-5F23-DD48-245F-7128F1A805D1}"/>
+              </a:ext>
+            </a:extLst>
+          </p:cNvPr>
+          <p:cNvSpPr txBox="1"/>
+          <p:nvPr/>
+        </p:nvSpPr>
+        <p:spPr>
+          <a:xfrm>
+            <a:off x="914400" y="914400"/>
+            <a:ext cx="10362895" cy="822960"/>
+          </a:xfrm>
+          <a:prstGeom prst="rect">
+            <a:avLst/>
+          </a:prstGeom>
+          <a:noFill/>
+        </p:spPr>
+        <p:txBody>
+          <a:bodyPr wrap="square">
+            <a:spAutoFit/>
+          </a:bodyPr>
+          <a:lstStyle/>
+          <a:p>
+            <a:pPr algn="l"/>
+            <a:r>
+              <a:rPr sz="4600" b="1" i="0" dirty="0">
+                <a:solidFill>
+                  <a:srgbClr val="FFFFFF"/>
+                </a:solidFill>
+                <a:latin typeface="Inter"/>
+              </a:rPr>
+              <a:t>AI </a:t>
+            </a:r>
+            <a:r>
+              <a:rPr sz="4600" b="1" i="0" dirty="0" err="1">
+                <a:solidFill>
+                  <a:srgbClr val="FFFFFF"/>
+                </a:solidFill>
+                <a:latin typeface="Inter"/>
+              </a:rPr>
+              <a:t>を、チームメイトに</a:t>
+            </a:r>
+            <a:r>
+              <a:rPr sz="4600" b="1" i="0" dirty="0">
+                <a:solidFill>
+                  <a:srgbClr val="FFFFFF"/>
+                </a:solidFill>
+                <a:latin typeface="Inter"/>
+              </a:rPr>
+              <a:t>。</a:t>
+            </a:r>
+          </a:p>
+        </p:txBody>
+      </p:sp>
+      <p:sp>
+        <p:nvSpPr>
+          <p:cNvPr id="5" name="Rectangle 4">
+            <a:extLst>
+              <a:ext uri="{FF2B5EF4-FFF2-40B4-BE49-F238E27FC236}">
+                <a16:creationId xmlns:a16="http://schemas.microsoft.com/office/drawing/2014/main" id="{E289272A-E96B-714A-8B48-8BA354F5A14D}"/>
+              </a:ext>
+            </a:extLst>
+          </p:cNvPr>
+          <p:cNvSpPr/>
+          <p:nvPr/>
+        </p:nvSpPr>
+        <p:spPr>
+          <a:xfrm>
+            <a:off x="960120" y="1874519"/>
+            <a:ext cx="2377440" cy="54864"/>
+          </a:xfrm>
+          <a:prstGeom prst="roundRect">
+            <a:avLst>
+              <a:gd name="adj" fmla="val 50000"/>
+            </a:avLst>
+          </a:prstGeom>
+          <a:gradFill rotWithShape="1">
+            <a:gsLst>
+              <a:gs pos="0">
+                <a:srgbClr val="0A84FF"/>
+              </a:gs>
+              <a:gs pos="100000">
+                <a:srgbClr val="64D2FF"/>
+              </a:gs>
+            </a:gsLst>
+            <a:lin ang="0" scaled="0"/>
+          </a:gradFill>
+          <a:ln>
+            <a:noFill/>
+          </a:ln>
+          <a:effectLst/>
+        </p:spPr>
+        <p:style>
+          <a:lnRef idx="1">
+            <a:schemeClr val="accent1"/>
+          </a:lnRef>
+          <a:fillRef idx="3">
+            <a:schemeClr val="accent1"/>
+          </a:fillRef>
+          <a:effectRef idx="2">
+            <a:schemeClr val="accent1"/>
+          </a:effectRef>
+          <a:fontRef idx="minor">
+            <a:schemeClr val="lt1"/>
+          </a:fontRef>
+        </p:style>
+        <p:txBody>
+          <a:bodyPr rtlCol="0" anchor="ctr"/>
+          <a:lstStyle/>
+          <a:p>
+            <a:pPr algn="ctr"/>
+            <a:endParaRPr/>
+          </a:p>
+        </p:txBody>
+      </p:sp>
+      <p:sp>
+        <p:nvSpPr>
+          <p:cNvPr id="6" name="TextBox 5">
+            <a:extLst>
+              <a:ext uri="{FF2B5EF4-FFF2-40B4-BE49-F238E27FC236}">
+                <a16:creationId xmlns:a16="http://schemas.microsoft.com/office/drawing/2014/main" id="{72B522AA-5B33-EF39-55C2-AAD62A7185A7}"/>
+              </a:ext>
+            </a:extLst>
+          </p:cNvPr>
+          <p:cNvSpPr txBox="1"/>
+          <p:nvPr/>
+        </p:nvSpPr>
+        <p:spPr>
+          <a:xfrm>
+            <a:off x="914400" y="2148840"/>
+            <a:ext cx="10362895" cy="457200"/>
+          </a:xfrm>
+          <a:prstGeom prst="rect">
+            <a:avLst/>
+          </a:prstGeom>
+          <a:noFill/>
+        </p:spPr>
+        <p:txBody>
+          <a:bodyPr wrap="square">
+            <a:spAutoFit/>
+          </a:bodyPr>
+          <a:lstStyle/>
+          <a:p>
+            <a:pPr algn="l"/>
+            <a:r>
+              <a:rPr sz="1800" b="0" i="0">
+                <a:solidFill>
+                  <a:srgbClr val="B8B8BE"/>
+                </a:solidFill>
+                <a:latin typeface="Inter"/>
+              </a:rPr>
+              <a:t>設計・実装・レビューの全工程に AI を組み込んだ。</a:t>
+            </a:r>
+          </a:p>
+        </p:txBody>
+      </p:sp>
+      <p:sp>
+        <p:nvSpPr>
+          <p:cNvPr id="9" name="TextBox 8">
+            <a:extLst>
+              <a:ext uri="{FF2B5EF4-FFF2-40B4-BE49-F238E27FC236}">
+                <a16:creationId xmlns:a16="http://schemas.microsoft.com/office/drawing/2014/main" id="{3A7462D5-A321-51B3-9F6E-D06282420A47}"/>
+              </a:ext>
+            </a:extLst>
+          </p:cNvPr>
+          <p:cNvSpPr txBox="1"/>
+          <p:nvPr/>
+        </p:nvSpPr>
+        <p:spPr>
+          <a:xfrm>
+            <a:off x="914400" y="3657600"/>
+            <a:ext cx="3210458" cy="365760"/>
+          </a:xfrm>
+          <a:prstGeom prst="rect">
+            <a:avLst/>
+          </a:prstGeom>
+          <a:noFill/>
+        </p:spPr>
+        <p:txBody>
+          <a:bodyPr wrap="square">
+            <a:spAutoFit/>
+          </a:bodyPr>
+          <a:lstStyle/>
+          <a:p>
+            <a:pPr algn="ctr"/>
+            <a:r>
+              <a:rPr sz="1400" b="0" i="0">
+                <a:solidFill>
+                  <a:srgbClr val="B8B8BE"/>
+                </a:solidFill>
+                <a:latin typeface="Inter"/>
+              </a:rPr>
+              <a:t>Commits</a:t>
+            </a:r>
+          </a:p>
+        </p:txBody>
+      </p:sp>
+      <p:sp>
+        <p:nvSpPr>
+          <p:cNvPr id="12" name="TextBox 11">
+            <a:extLst>
+              <a:ext uri="{FF2B5EF4-FFF2-40B4-BE49-F238E27FC236}">
+                <a16:creationId xmlns:a16="http://schemas.microsoft.com/office/drawing/2014/main" id="{A2A1C286-2F2C-E518-A67E-8C4B464D662A}"/>
+              </a:ext>
+            </a:extLst>
+          </p:cNvPr>
+          <p:cNvSpPr txBox="1"/>
+          <p:nvPr/>
+        </p:nvSpPr>
+        <p:spPr>
+          <a:xfrm>
+            <a:off x="4490618" y="3657600"/>
+            <a:ext cx="3210458" cy="365760"/>
+          </a:xfrm>
+          <a:prstGeom prst="rect">
+            <a:avLst/>
+          </a:prstGeom>
+          <a:noFill/>
+        </p:spPr>
+        <p:txBody>
+          <a:bodyPr wrap="square">
+            <a:spAutoFit/>
+          </a:bodyPr>
+          <a:lstStyle/>
+          <a:p>
+            <a:pPr algn="ctr"/>
+            <a:r>
+              <a:rPr sz="1400" b="0" i="0">
+                <a:solidFill>
+                  <a:srgbClr val="B8B8BE"/>
+                </a:solidFill>
+                <a:latin typeface="Inter"/>
+              </a:rPr>
+              <a:t>Pull Requests</a:t>
+            </a:r>
+          </a:p>
+        </p:txBody>
+      </p:sp>
+      <p:sp>
+        <p:nvSpPr>
+          <p:cNvPr id="15" name="TextBox 14">
+            <a:extLst>
+              <a:ext uri="{FF2B5EF4-FFF2-40B4-BE49-F238E27FC236}">
+                <a16:creationId xmlns:a16="http://schemas.microsoft.com/office/drawing/2014/main" id="{0D2FF8EE-01C0-CB5E-A5DC-8E51BC8A330D}"/>
+              </a:ext>
+            </a:extLst>
+          </p:cNvPr>
+          <p:cNvSpPr txBox="1"/>
+          <p:nvPr/>
+        </p:nvSpPr>
+        <p:spPr>
+          <a:xfrm>
+            <a:off x="8066836" y="3657600"/>
+            <a:ext cx="3210458" cy="365760"/>
+          </a:xfrm>
+          <a:prstGeom prst="rect">
+            <a:avLst/>
+          </a:prstGeom>
+          <a:noFill/>
+        </p:spPr>
+        <p:txBody>
+          <a:bodyPr wrap="square">
+            <a:spAutoFit/>
+          </a:bodyPr>
+          <a:lstStyle/>
+          <a:p>
+            <a:pPr algn="ctr"/>
+            <a:r>
+              <a:rPr sz="1400" b="0" i="0">
+                <a:solidFill>
+                  <a:srgbClr val="B8B8BE"/>
+                </a:solidFill>
+                <a:latin typeface="Inter"/>
+              </a:rPr>
+              <a:t>Days</a:t>
+            </a:r>
+          </a:p>
+        </p:txBody>
+      </p:sp>
+      <p:sp>
+        <p:nvSpPr>
+          <p:cNvPr id="16" name="Rectangle 15">
+            <a:extLst>
+              <a:ext uri="{FF2B5EF4-FFF2-40B4-BE49-F238E27FC236}">
+                <a16:creationId xmlns:a16="http://schemas.microsoft.com/office/drawing/2014/main" id="{4796CD15-BC8B-5DED-E722-0B418B53A16B}"/>
+              </a:ext>
+            </a:extLst>
+          </p:cNvPr>
+          <p:cNvSpPr/>
+          <p:nvPr/>
+        </p:nvSpPr>
+        <p:spPr>
+          <a:xfrm>
+            <a:off x="914400" y="4343400"/>
+            <a:ext cx="4952847" cy="1508760"/>
+          </a:xfrm>
+          <a:prstGeom prst="roundRect">
+            <a:avLst>
+              <a:gd name="adj" fmla="val 12000"/>
+            </a:avLst>
+          </a:prstGeom>
+          <a:solidFill>
+            <a:srgbClr val="1C1C1E">
+              <a:alpha val="45000"/>
+            </a:srgbClr>
+          </a:solidFill>
+          <a:ln w="12700">
+            <a:solidFill>
+              <a:srgbClr val="FFFFFF">
+                <a:alpha val="14000"/>
+              </a:srgbClr>
+            </a:solidFill>
+          </a:ln>
+          <a:effectLst/>
+        </p:spPr>
+        <p:style>
+          <a:lnRef idx="1">
+            <a:schemeClr val="accent1"/>
+          </a:lnRef>
+          <a:fillRef idx="3">
+            <a:schemeClr val="accent1"/>
+          </a:fillRef>
+          <a:effectRef idx="2">
+            <a:schemeClr val="accent1"/>
+          </a:effectRef>
+          <a:fontRef idx="minor">
+            <a:schemeClr val="lt1"/>
+          </a:fontRef>
+        </p:style>
+        <p:txBody>
+          <a:bodyPr rtlCol="0" anchor="ctr"/>
+          <a:lstStyle/>
+          <a:p>
+            <a:pPr algn="ctr"/>
+            <a:endParaRPr/>
+          </a:p>
+        </p:txBody>
+      </p:sp>
+      <p:pic>
+        <p:nvPicPr>
+          <p:cNvPr id="17" name="Picture 16" descr="anthropic.png">
+            <a:extLst>
+              <a:ext uri="{FF2B5EF4-FFF2-40B4-BE49-F238E27FC236}">
+                <a16:creationId xmlns:a16="http://schemas.microsoft.com/office/drawing/2014/main" id="{0F82029C-B02D-7B23-0464-F9227D406B7D}"/>
+              </a:ext>
+            </a:extLst>
+          </p:cNvPr>
+          <p:cNvPicPr>
+            <a:picLocks noChangeAspect="1"/>
+          </p:cNvPicPr>
+          <p:nvPr/>
+        </p:nvPicPr>
+        <p:blipFill>
+          <a:blip r:embed="rId2"/>
+          <a:stretch>
+            <a:fillRect/>
+          </a:stretch>
+        </p:blipFill>
+        <p:spPr>
+          <a:xfrm>
+            <a:off x="1280160" y="4617720"/>
+            <a:ext cx="960120" cy="960120"/>
+          </a:xfrm>
+          <a:prstGeom prst="rect">
+            <a:avLst/>
+          </a:prstGeom>
+        </p:spPr>
+      </p:pic>
+      <p:sp>
+        <p:nvSpPr>
+          <p:cNvPr id="18" name="TextBox 17">
+            <a:extLst>
+              <a:ext uri="{FF2B5EF4-FFF2-40B4-BE49-F238E27FC236}">
+                <a16:creationId xmlns:a16="http://schemas.microsoft.com/office/drawing/2014/main" id="{F99FB2EF-013F-3FF0-8DDF-551C2A14AAE5}"/>
+              </a:ext>
+            </a:extLst>
+          </p:cNvPr>
+          <p:cNvSpPr txBox="1"/>
+          <p:nvPr/>
+        </p:nvSpPr>
+        <p:spPr>
+          <a:xfrm>
+            <a:off x="2468880" y="4617720"/>
+            <a:ext cx="3124047" cy="457200"/>
+          </a:xfrm>
+          <a:prstGeom prst="rect">
+            <a:avLst/>
+          </a:prstGeom>
+          <a:noFill/>
+        </p:spPr>
+        <p:txBody>
+          <a:bodyPr wrap="square">
+            <a:spAutoFit/>
+          </a:bodyPr>
+          <a:lstStyle/>
+          <a:p>
+            <a:pPr algn="l"/>
+            <a:r>
+              <a:rPr sz="2000" b="1" i="0">
+                <a:solidFill>
+                  <a:srgbClr val="FFFFFF"/>
+                </a:solidFill>
+                <a:latin typeface="Inter"/>
+              </a:rPr>
+              <a:t>Claude Code</a:t>
+            </a:r>
+          </a:p>
+        </p:txBody>
+      </p:sp>
+      <p:sp>
+        <p:nvSpPr>
+          <p:cNvPr id="19" name="TextBox 18">
+            <a:extLst>
+              <a:ext uri="{FF2B5EF4-FFF2-40B4-BE49-F238E27FC236}">
+                <a16:creationId xmlns:a16="http://schemas.microsoft.com/office/drawing/2014/main" id="{C04E6C1C-3AEC-7FF5-E6D1-A7C89357E8B5}"/>
+              </a:ext>
+            </a:extLst>
+          </p:cNvPr>
+          <p:cNvSpPr txBox="1"/>
+          <p:nvPr/>
+        </p:nvSpPr>
+        <p:spPr>
+          <a:xfrm>
+            <a:off x="2468880" y="5074920"/>
+            <a:ext cx="3124047" cy="731520"/>
+          </a:xfrm>
+          <a:prstGeom prst="rect">
+            <a:avLst/>
+          </a:prstGeom>
+          <a:noFill/>
+        </p:spPr>
+        <p:txBody>
+          <a:bodyPr wrap="square">
+            <a:spAutoFit/>
+          </a:bodyPr>
+          <a:lstStyle/>
+          <a:p>
+            <a:pPr algn="l">
+              <a:lnSpc>
+                <a:spcPct val="120000"/>
+              </a:lnSpc>
+            </a:pPr>
+            <a:r>
+              <a:rPr sz="1400" b="0" i="0">
+                <a:solidFill>
+                  <a:srgbClr val="B8B8BE"/>
+                </a:solidFill>
+                <a:latin typeface="Inter"/>
+              </a:rPr>
+              <a:t>設計ドキュメント・実装・スライドを生成</a:t>
+            </a:r>
+          </a:p>
+        </p:txBody>
+      </p:sp>
+      <p:sp>
+        <p:nvSpPr>
+          <p:cNvPr id="20" name="Rectangle 19">
+            <a:extLst>
+              <a:ext uri="{FF2B5EF4-FFF2-40B4-BE49-F238E27FC236}">
+                <a16:creationId xmlns:a16="http://schemas.microsoft.com/office/drawing/2014/main" id="{CFDE77BD-2EB9-815E-0A3E-F76DD01FC34D}"/>
+              </a:ext>
+            </a:extLst>
+          </p:cNvPr>
+          <p:cNvSpPr/>
+          <p:nvPr/>
+        </p:nvSpPr>
+        <p:spPr>
+          <a:xfrm>
+            <a:off x="6324447" y="4343400"/>
+            <a:ext cx="4952847" cy="1508760"/>
+          </a:xfrm>
+          <a:prstGeom prst="roundRect">
+            <a:avLst>
+              <a:gd name="adj" fmla="val 12000"/>
+            </a:avLst>
+          </a:prstGeom>
+          <a:solidFill>
+            <a:srgbClr val="1C1C1E">
+              <a:alpha val="45000"/>
+            </a:srgbClr>
+          </a:solidFill>
+          <a:ln w="12700">
+            <a:solidFill>
+              <a:srgbClr val="FFFFFF">
+                <a:alpha val="14000"/>
+              </a:srgbClr>
+            </a:solidFill>
+          </a:ln>
+          <a:effectLst/>
+        </p:spPr>
+        <p:style>
+          <a:lnRef idx="1">
+            <a:schemeClr val="accent1"/>
+          </a:lnRef>
+          <a:fillRef idx="3">
+            <a:schemeClr val="accent1"/>
+          </a:fillRef>
+          <a:effectRef idx="2">
+            <a:schemeClr val="accent1"/>
+          </a:effectRef>
+          <a:fontRef idx="minor">
+            <a:schemeClr val="lt1"/>
+          </a:fontRef>
+        </p:style>
+        <p:txBody>
+          <a:bodyPr rtlCol="0" anchor="ctr"/>
+          <a:lstStyle/>
+          <a:p>
+            <a:pPr algn="ctr"/>
+            <a:endParaRPr/>
+          </a:p>
+        </p:txBody>
+      </p:sp>
+      <p:pic>
+        <p:nvPicPr>
+          <p:cNvPr id="21" name="Picture 20" descr="coderabbit.png">
+            <a:extLst>
+              <a:ext uri="{FF2B5EF4-FFF2-40B4-BE49-F238E27FC236}">
+                <a16:creationId xmlns:a16="http://schemas.microsoft.com/office/drawing/2014/main" id="{8944174B-D3DB-837D-20A8-9B2625DB83EF}"/>
+              </a:ext>
+            </a:extLst>
+          </p:cNvPr>
+          <p:cNvPicPr>
+            <a:picLocks noChangeAspect="1"/>
+          </p:cNvPicPr>
+          <p:nvPr/>
+        </p:nvPicPr>
+        <p:blipFill>
+          <a:blip r:embed="rId3"/>
+          <a:stretch>
+            <a:fillRect/>
+          </a:stretch>
+        </p:blipFill>
+        <p:spPr>
+          <a:xfrm>
+            <a:off x="6690207" y="4617720"/>
+            <a:ext cx="960120" cy="960120"/>
+          </a:xfrm>
+          <a:prstGeom prst="rect">
+            <a:avLst/>
+          </a:prstGeom>
+        </p:spPr>
+      </p:pic>
+      <p:sp>
+        <p:nvSpPr>
+          <p:cNvPr id="22" name="TextBox 21">
+            <a:extLst>
+              <a:ext uri="{FF2B5EF4-FFF2-40B4-BE49-F238E27FC236}">
+                <a16:creationId xmlns:a16="http://schemas.microsoft.com/office/drawing/2014/main" id="{9CAFDA11-3BD4-5FEC-5F85-D2F033EFBE05}"/>
+              </a:ext>
+            </a:extLst>
+          </p:cNvPr>
+          <p:cNvSpPr txBox="1"/>
+          <p:nvPr/>
+        </p:nvSpPr>
+        <p:spPr>
+          <a:xfrm>
+            <a:off x="7878927" y="4617720"/>
+            <a:ext cx="3124047" cy="457200"/>
+          </a:xfrm>
+          <a:prstGeom prst="rect">
+            <a:avLst/>
+          </a:prstGeom>
+          <a:noFill/>
+        </p:spPr>
+        <p:txBody>
+          <a:bodyPr wrap="square">
+            <a:spAutoFit/>
+          </a:bodyPr>
+          <a:lstStyle/>
+          <a:p>
+            <a:pPr algn="l"/>
+            <a:r>
+              <a:rPr sz="2000" b="1" i="0">
+                <a:solidFill>
+                  <a:srgbClr val="FFFFFF"/>
+                </a:solidFill>
+                <a:latin typeface="Inter"/>
+              </a:rPr>
+              <a:t>CodeRabbit</a:t>
+            </a:r>
+          </a:p>
+        </p:txBody>
+      </p:sp>
+      <p:sp>
+        <p:nvSpPr>
+          <p:cNvPr id="23" name="TextBox 22">
+            <a:extLst>
+              <a:ext uri="{FF2B5EF4-FFF2-40B4-BE49-F238E27FC236}">
+                <a16:creationId xmlns:a16="http://schemas.microsoft.com/office/drawing/2014/main" id="{F5D38F45-C384-E0CE-5D36-FA2BE84F5A3C}"/>
+              </a:ext>
+            </a:extLst>
+          </p:cNvPr>
+          <p:cNvSpPr txBox="1"/>
+          <p:nvPr/>
+        </p:nvSpPr>
+        <p:spPr>
+          <a:xfrm>
+            <a:off x="7878927" y="5074920"/>
+            <a:ext cx="3124047" cy="731520"/>
+          </a:xfrm>
+          <a:prstGeom prst="rect">
+            <a:avLst/>
+          </a:prstGeom>
+          <a:noFill/>
+        </p:spPr>
+        <p:txBody>
+          <a:bodyPr wrap="square">
+            <a:spAutoFit/>
+          </a:bodyPr>
+          <a:lstStyle/>
+          <a:p>
+            <a:pPr algn="l">
+              <a:lnSpc>
+                <a:spcPct val="120000"/>
+              </a:lnSpc>
+            </a:pPr>
+            <a:r>
+              <a:rPr sz="1400" b="0" i="0">
+                <a:solidFill>
+                  <a:srgbClr val="B8B8BE"/>
+                </a:solidFill>
+                <a:latin typeface="Inter"/>
+              </a:rPr>
+              <a:t>全 PR を日本語で自動レビュー（8 PR で指摘・改善）</a:t>
+            </a:r>
+          </a:p>
+        </p:txBody>
+      </p:sp>
+      <p:sp>
+        <p:nvSpPr>
+          <p:cNvPr id="24" name="TextBox 23">
+            <a:extLst>
+              <a:ext uri="{FF2B5EF4-FFF2-40B4-BE49-F238E27FC236}">
+                <a16:creationId xmlns:a16="http://schemas.microsoft.com/office/drawing/2014/main" id="{267FA624-C621-C5DA-AEAC-D66F3A59AB9E}"/>
+              </a:ext>
+            </a:extLst>
+          </p:cNvPr>
+          <p:cNvSpPr txBox="1"/>
+          <p:nvPr/>
+        </p:nvSpPr>
+        <p:spPr>
+          <a:xfrm>
+            <a:off x="914400" y="6080760"/>
+            <a:ext cx="10362895" cy="411480"/>
+          </a:xfrm>
+          <a:prstGeom prst="rect">
+            <a:avLst/>
+          </a:prstGeom>
+          <a:noFill/>
+        </p:spPr>
+        <p:txBody>
+          <a:bodyPr wrap="square">
+            <a:spAutoFit/>
+          </a:bodyPr>
+          <a:lstStyle/>
+          <a:p>
+            <a:pPr algn="l"/>
+            <a:r>
+              <a:rPr sz="1200" b="0" i="1">
+                <a:solidFill>
+                  <a:srgbClr val="8E8E93"/>
+                </a:solidFill>
+                <a:latin typeface="Inter"/>
+              </a:rPr>
+              <a:t>CodeRabbit 実績: コードデリバリ 86% 高速化 / レビュー指摘 60% 削減  ―  claude.com/ja/customers/coderabbit</a:t>
+            </a:r>
+          </a:p>
+        </p:txBody>
+      </p:sp>
+    </p:spTree>
+    <p:extLst>
+      <p:ext uri="{BB962C8B-B14F-4D97-AF65-F5344CB8AC3E}">
+        <p14:creationId xmlns:p14="http://schemas.microsoft.com/office/powerpoint/2010/main" val="719051916"/>
+      </p:ext>
+    </p:extLst>
+  </p:cSld>
+  <p:clrMapOvr>
+    <a:masterClrMapping/>
+  </p:clrMapOvr>
+</p:sld>
+</file>
+
+<file path=ppt/slides/slide14.xml><?xml version="1.0" encoding="utf-8"?>
+<p:sld xmlns:a="http://schemas.openxmlformats.org/drawingml/2006/main" xmlns:r="http://schemas.openxmlformats.org/officeDocument/2006/relationships" xmlns:p="http://schemas.openxmlformats.org/presentationml/2006/main">
   <p:cSld>
     <p:bg>
       <p:bgPr>
@@ -6523,7 +7357,14 @@
         <p:cNvGrpSpPr/>
         <p:nvPr/>
       </p:nvGrpSpPr>
-      <p:grpSpPr/>
+      <p:grpSpPr>
+        <a:xfrm>
+          <a:off x="0" y="0"/>
+          <a:ext cx="0" cy="0"/>
+          <a:chOff x="0" y="0"/>
+          <a:chExt cx="0" cy="0"/>
+        </a:xfrm>
+      </p:grpSpPr>
       <p:sp>
         <p:nvSpPr>
           <p:cNvPr id="2" name="Rectangle 1"/>
@@ -6547,7 +7388,7 @@
                 <a:srgbClr val="000000"/>
               </a:gs>
             </a:gsLst>
-            <a:lin scaled="0" ang="13800000"/>
+            <a:lin ang="13800000" scaled="0"/>
           </a:gradFill>
           <a:ln>
             <a:noFill/>
@@ -6572,6 +7413,7 @@
           <a:lstStyle/>
           <a:p>
             <a:pPr algn="ctr"/>
+            <a:endParaRPr/>
           </a:p>
         </p:txBody>
       </p:sp>
@@ -6670,7 +7512,7 @@
                 <a:srgbClr val="64D2FF"/>
               </a:gs>
             </a:gsLst>
-            <a:lin scaled="0" ang="0"/>
+            <a:lin ang="0" scaled="0"/>
           </a:gradFill>
           <a:ln>
             <a:noFill/>
@@ -6696,6 +7538,7 @@
           <a:lstStyle/>
           <a:p>
             <a:pPr algn="ctr"/>
+            <a:endParaRPr/>
           </a:p>
         </p:txBody>
       </p:sp>
@@ -6748,6 +7591,7 @@
           <a:lstStyle/>
           <a:p>
             <a:pPr algn="ctr"/>
+            <a:endParaRPr/>
           </a:p>
         </p:txBody>
       </p:sp>
@@ -6776,7 +7620,7 @@
                 <a:srgbClr val="005CD7"/>
               </a:gs>
             </a:gsLst>
-            <a:lin scaled="0" ang="0"/>
+            <a:lin ang="0" scaled="0"/>
           </a:gradFill>
           <a:ln>
             <a:noFill/>
@@ -6802,6 +7646,7 @@
           <a:lstStyle/>
           <a:p>
             <a:pPr algn="ctr"/>
+            <a:endParaRPr/>
           </a:p>
         </p:txBody>
       </p:sp>
@@ -6959,7 +7804,7 @@
                 <a:srgbClr val="0A84FF"/>
               </a:gs>
             </a:gsLst>
-            <a:lin scaled="0" ang="0"/>
+            <a:lin ang="0" scaled="0"/>
           </a:gradFill>
           <a:ln>
             <a:noFill/>
@@ -6985,6 +7830,7 @@
           <a:lstStyle/>
           <a:p>
             <a:pPr algn="ctr"/>
+            <a:endParaRPr/>
           </a:p>
         </p:txBody>
       </p:sp>
@@ -7072,6 +7918,7 @@
           <a:lstStyle/>
           <a:p>
             <a:pPr algn="ctr"/>
+            <a:endParaRPr/>
           </a:p>
         </p:txBody>
       </p:sp>
@@ -7100,7 +7947,7 @@
                 <a:srgbClr val="08A930"/>
               </a:gs>
             </a:gsLst>
-            <a:lin scaled="0" ang="0"/>
+            <a:lin ang="0" scaled="0"/>
           </a:gradFill>
           <a:ln>
             <a:noFill/>
@@ -7126,6 +7973,7 @@
           <a:lstStyle/>
           <a:p>
             <a:pPr algn="ctr"/>
+            <a:endParaRPr/>
           </a:p>
         </p:txBody>
       </p:sp>
@@ -7283,7 +8131,7 @@
                 <a:srgbClr val="30D158"/>
               </a:gs>
             </a:gsLst>
-            <a:lin scaled="0" ang="0"/>
+            <a:lin ang="0" scaled="0"/>
           </a:gradFill>
           <a:ln>
             <a:noFill/>
@@ -7309,6 +8157,7 @@
           <a:lstStyle/>
           <a:p>
             <a:pPr algn="ctr"/>
+            <a:endParaRPr/>
           </a:p>
         </p:txBody>
       </p:sp>
@@ -7396,6 +8245,7 @@
           <a:lstStyle/>
           <a:p>
             <a:pPr algn="ctr"/>
+            <a:endParaRPr/>
           </a:p>
         </p:txBody>
       </p:sp>
@@ -7424,7 +8274,7 @@
                 <a:srgbClr val="D77700"/>
               </a:gs>
             </a:gsLst>
-            <a:lin scaled="0" ang="0"/>
+            <a:lin ang="0" scaled="0"/>
           </a:gradFill>
           <a:ln>
             <a:noFill/>
@@ -7450,6 +8300,7 @@
           <a:lstStyle/>
           <a:p>
             <a:pPr algn="ctr"/>
+            <a:endParaRPr/>
           </a:p>
         </p:txBody>
       </p:sp>
@@ -7591,7 +8442,7 @@
                 <a:srgbClr val="FF9F0A"/>
               </a:gs>
             </a:gsLst>
-            <a:lin scaled="0" ang="0"/>
+            <a:lin ang="0" scaled="0"/>
           </a:gradFill>
           <a:ln>
             <a:noFill/>
@@ -7617,6 +8468,7 @@
           <a:lstStyle/>
           <a:p>
             <a:pPr algn="ctr"/>
+            <a:endParaRPr/>
           </a:p>
         </p:txBody>
       </p:sp>
@@ -7663,8 +8515,8 @@
 </p:sld>
 </file>
 
-<file path=ppt/slides/slide14.xml><?xml version="1.0" encoding="utf-8"?>
-<p:sld xmlns:a="http://schemas.openxmlformats.org/drawingml/2006/main" xmlns:p="http://schemas.openxmlformats.org/presentationml/2006/main" xmlns:r="http://schemas.openxmlformats.org/officeDocument/2006/relationships">
+<file path=ppt/slides/slide15.xml><?xml version="1.0" encoding="utf-8"?>
+<p:sld xmlns:a="http://schemas.openxmlformats.org/drawingml/2006/main" xmlns:r="http://schemas.openxmlformats.org/officeDocument/2006/relationships" xmlns:p="http://schemas.openxmlformats.org/presentationml/2006/main">
   <p:cSld>
     <p:bg>
       <p:bgPr>
@@ -7680,7 +8532,14 @@
         <p:cNvGrpSpPr/>
         <p:nvPr/>
       </p:nvGrpSpPr>
-      <p:grpSpPr/>
+      <p:grpSpPr>
+        <a:xfrm>
+          <a:off x="0" y="0"/>
+          <a:ext cx="0" cy="0"/>
+          <a:chOff x="0" y="0"/>
+          <a:chExt cx="0" cy="0"/>
+        </a:xfrm>
+      </p:grpSpPr>
       <p:sp>
         <p:nvSpPr>
           <p:cNvPr id="2" name="Rectangle 1"/>
@@ -7704,7 +8563,7 @@
                 <a:srgbClr val="000000"/>
               </a:gs>
             </a:gsLst>
-            <a:lin scaled="0" ang="13800000"/>
+            <a:lin ang="13800000" scaled="0"/>
           </a:gradFill>
           <a:ln>
             <a:noFill/>
@@ -7729,6 +8588,7 @@
           <a:lstStyle/>
           <a:p>
             <a:pPr algn="ctr"/>
+            <a:endParaRPr/>
           </a:p>
         </p:txBody>
       </p:sp>
@@ -7827,7 +8687,7 @@
                 <a:srgbClr val="64D2FF"/>
               </a:gs>
             </a:gsLst>
-            <a:lin scaled="0" ang="0"/>
+            <a:lin ang="0" scaled="0"/>
           </a:gradFill>
           <a:ln>
             <a:noFill/>
@@ -7853,6 +8713,7 @@
           <a:lstStyle/>
           <a:p>
             <a:pPr algn="ctr"/>
+            <a:endParaRPr/>
           </a:p>
         </p:txBody>
       </p:sp>
@@ -7916,7 +8777,7 @@
                 <a:srgbClr val="04120A"/>
               </a:gs>
             </a:gsLst>
-            <a:lin scaled="0" ang="13800000"/>
+            <a:lin ang="13800000" scaled="0"/>
           </a:gradFill>
           <a:ln>
             <a:noFill/>
@@ -7942,6 +8803,7 @@
           <a:lstStyle/>
           <a:p>
             <a:pPr algn="ctr"/>
+            <a:endParaRPr/>
           </a:p>
         </p:txBody>
       </p:sp>
@@ -8132,6 +8994,7 @@
           <a:lstStyle/>
           <a:p>
             <a:pPr algn="ctr"/>
+            <a:endParaRPr/>
           </a:p>
         </p:txBody>
       </p:sp>
@@ -8281,8 +9144,8 @@
 </p:sld>
 </file>
 
-<file path=ppt/slides/slide15.xml><?xml version="1.0" encoding="utf-8"?>
-<p:sld xmlns:a="http://schemas.openxmlformats.org/drawingml/2006/main" xmlns:p="http://schemas.openxmlformats.org/presentationml/2006/main" xmlns:r="http://schemas.openxmlformats.org/officeDocument/2006/relationships">
+<file path=ppt/slides/slide16.xml><?xml version="1.0" encoding="utf-8"?>
+<p:sld xmlns:a="http://schemas.openxmlformats.org/drawingml/2006/main" xmlns:r="http://schemas.openxmlformats.org/officeDocument/2006/relationships" xmlns:p="http://schemas.openxmlformats.org/presentationml/2006/main">
   <p:cSld>
     <p:bg>
       <p:bgPr>
@@ -8298,7 +9161,14 @@
         <p:cNvGrpSpPr/>
         <p:nvPr/>
       </p:nvGrpSpPr>
-      <p:grpSpPr/>
+      <p:grpSpPr>
+        <a:xfrm>
+          <a:off x="0" y="0"/>
+          <a:ext cx="0" cy="0"/>
+          <a:chOff x="0" y="0"/>
+          <a:chExt cx="0" cy="0"/>
+        </a:xfrm>
+      </p:grpSpPr>
       <p:sp>
         <p:nvSpPr>
           <p:cNvPr id="2" name="Rectangle 1"/>
@@ -8322,7 +9192,7 @@
                 <a:srgbClr val="000000"/>
               </a:gs>
             </a:gsLst>
-            <a:lin scaled="0" ang="13800000"/>
+            <a:lin ang="13800000" scaled="0"/>
           </a:gradFill>
           <a:ln>
             <a:noFill/>
@@ -8347,6 +9217,7 @@
           <a:lstStyle/>
           <a:p>
             <a:pPr algn="ctr"/>
+            <a:endParaRPr/>
           </a:p>
         </p:txBody>
       </p:sp>
@@ -8430,7 +9301,7 @@
                 <a:srgbClr val="64D2FF"/>
               </a:gs>
             </a:gsLst>
-            <a:lin scaled="0" ang="0"/>
+            <a:lin ang="0" scaled="0"/>
           </a:gradFill>
           <a:ln>
             <a:noFill/>
@@ -8456,6 +9327,7 @@
           <a:lstStyle/>
           <a:p>
             <a:pPr algn="ctr"/>
+            <a:endParaRPr/>
           </a:p>
         </p:txBody>
       </p:sp>
@@ -8537,8 +9409,8 @@
 </p:sld>
 </file>
 
-<file path=ppt/slides/slide16.xml><?xml version="1.0" encoding="utf-8"?>
-<p:sld xmlns:a="http://schemas.openxmlformats.org/drawingml/2006/main" xmlns:p="http://schemas.openxmlformats.org/presentationml/2006/main" xmlns:r="http://schemas.openxmlformats.org/officeDocument/2006/relationships">
+<file path=ppt/slides/slide17.xml><?xml version="1.0" encoding="utf-8"?>
+<p:sld xmlns:a="http://schemas.openxmlformats.org/drawingml/2006/main" xmlns:r="http://schemas.openxmlformats.org/officeDocument/2006/relationships" xmlns:p="http://schemas.openxmlformats.org/presentationml/2006/main">
   <p:cSld>
     <p:bg>
       <p:bgPr>
@@ -8554,7 +9426,14 @@
         <p:cNvGrpSpPr/>
         <p:nvPr/>
       </p:nvGrpSpPr>
-      <p:grpSpPr/>
+      <p:grpSpPr>
+        <a:xfrm>
+          <a:off x="0" y="0"/>
+          <a:ext cx="0" cy="0"/>
+          <a:chOff x="0" y="0"/>
+          <a:chExt cx="0" cy="0"/>
+        </a:xfrm>
+      </p:grpSpPr>
       <p:sp>
         <p:nvSpPr>
           <p:cNvPr id="2" name="Rectangle 1"/>
@@ -8578,7 +9457,7 @@
                 <a:srgbClr val="000000"/>
               </a:gs>
             </a:gsLst>
-            <a:lin scaled="0" ang="13800000"/>
+            <a:lin ang="13800000" scaled="0"/>
           </a:gradFill>
           <a:ln>
             <a:noFill/>
@@ -8603,6 +9482,7 @@
           <a:lstStyle/>
           <a:p>
             <a:pPr algn="ctr"/>
+            <a:endParaRPr/>
           </a:p>
         </p:txBody>
       </p:sp>
@@ -8701,7 +9581,7 @@
                 <a:srgbClr val="64D2FF"/>
               </a:gs>
             </a:gsLst>
-            <a:lin scaled="0" ang="0"/>
+            <a:lin ang="0" scaled="0"/>
           </a:gradFill>
           <a:ln>
             <a:noFill/>
@@ -8727,6 +9607,7 @@
           <a:lstStyle/>
           <a:p>
             <a:pPr algn="ctr"/>
+            <a:endParaRPr/>
           </a:p>
         </p:txBody>
       </p:sp>
@@ -8779,6 +9660,7 @@
           <a:lstStyle/>
           <a:p>
             <a:pPr algn="ctr"/>
+            <a:endParaRPr/>
           </a:p>
         </p:txBody>
       </p:sp>
@@ -8925,6 +9807,7 @@
           <a:lstStyle/>
           <a:p>
             <a:pPr algn="ctr"/>
+            <a:endParaRPr/>
           </a:p>
         </p:txBody>
       </p:sp>
@@ -9071,6 +9954,7 @@
           <a:lstStyle/>
           <a:p>
             <a:pPr algn="ctr"/>
+            <a:endParaRPr/>
           </a:p>
         </p:txBody>
       </p:sp>
@@ -9176,8 +10060,8 @@
 </p:sld>
 </file>
 
-<file path=ppt/slides/slide17.xml><?xml version="1.0" encoding="utf-8"?>
-<p:sld xmlns:a="http://schemas.openxmlformats.org/drawingml/2006/main" xmlns:p="http://schemas.openxmlformats.org/presentationml/2006/main" xmlns:r="http://schemas.openxmlformats.org/officeDocument/2006/relationships">
+<file path=ppt/slides/slide18.xml><?xml version="1.0" encoding="utf-8"?>
+<p:sld xmlns:a="http://schemas.openxmlformats.org/drawingml/2006/main" xmlns:r="http://schemas.openxmlformats.org/officeDocument/2006/relationships" xmlns:p="http://schemas.openxmlformats.org/presentationml/2006/main">
   <p:cSld>
     <p:bg>
       <p:bgPr>
@@ -9193,7 +10077,14 @@
         <p:cNvGrpSpPr/>
         <p:nvPr/>
       </p:nvGrpSpPr>
-      <p:grpSpPr/>
+      <p:grpSpPr>
+        <a:xfrm>
+          <a:off x="0" y="0"/>
+          <a:ext cx="0" cy="0"/>
+          <a:chOff x="0" y="0"/>
+          <a:chExt cx="0" cy="0"/>
+        </a:xfrm>
+      </p:grpSpPr>
       <p:sp>
         <p:nvSpPr>
           <p:cNvPr id="2" name="Rectangle 1"/>
@@ -9217,7 +10108,7 @@
                 <a:srgbClr val="000000"/>
               </a:gs>
             </a:gsLst>
-            <a:lin scaled="0" ang="13800000"/>
+            <a:lin ang="13800000" scaled="0"/>
           </a:gradFill>
           <a:ln>
             <a:noFill/>
@@ -9242,6 +10133,7 @@
           <a:lstStyle/>
           <a:p>
             <a:pPr algn="ctr"/>
+            <a:endParaRPr/>
           </a:p>
         </p:txBody>
       </p:sp>
@@ -9329,6 +10221,7 @@
           <a:lstStyle/>
           <a:p>
             <a:pPr algn="ctr"/>
+            <a:endParaRPr/>
           </a:p>
         </p:txBody>
       </p:sp>
@@ -9392,7 +10285,7 @@
                 <a:srgbClr val="64D2FF"/>
               </a:gs>
             </a:gsLst>
-            <a:lin scaled="0" ang="0"/>
+            <a:lin ang="0" scaled="0"/>
           </a:gradFill>
           <a:ln>
             <a:noFill/>
@@ -9418,6 +10311,7 @@
           <a:lstStyle/>
           <a:p>
             <a:pPr algn="ctr"/>
+            <a:endParaRPr/>
           </a:p>
         </p:txBody>
       </p:sp>
@@ -9464,15 +10358,12 @@
                 <a:spcPct val="145000"/>
               </a:lnSpc>
             </a:pPr>
-            <a:r>
-              <a:rPr sz="1700" b="0">
-                <a:solidFill>
-                  <a:srgbClr val="FFFFFF"/>
-                </a:solidFill>
-                <a:latin typeface="Inter"/>
-              </a:rPr>
-              <a:t/>
-            </a:r>
+            <a:endParaRPr sz="1800" b="1">
+              <a:solidFill>
+                <a:srgbClr val="FFFFFF"/>
+              </a:solidFill>
+              <a:latin typeface="Inter"/>
+            </a:endParaRPr>
           </a:p>
           <a:p>
             <a:pPr>
@@ -9532,8 +10423,8 @@
 </p:sld>
 </file>
 
-<file path=ppt/slides/slide18.xml><?xml version="1.0" encoding="utf-8"?>
-<p:sld xmlns:a="http://schemas.openxmlformats.org/drawingml/2006/main" xmlns:p="http://schemas.openxmlformats.org/presentationml/2006/main" xmlns:r="http://schemas.openxmlformats.org/officeDocument/2006/relationships">
+<file path=ppt/slides/slide19.xml><?xml version="1.0" encoding="utf-8"?>
+<p:sld xmlns:a="http://schemas.openxmlformats.org/drawingml/2006/main" xmlns:r="http://schemas.openxmlformats.org/officeDocument/2006/relationships" xmlns:p="http://schemas.openxmlformats.org/presentationml/2006/main">
   <p:cSld>
     <p:bg>
       <p:bgPr>
@@ -9549,7 +10440,14 @@
         <p:cNvGrpSpPr/>
         <p:nvPr/>
       </p:nvGrpSpPr>
-      <p:grpSpPr/>
+      <p:grpSpPr>
+        <a:xfrm>
+          <a:off x="0" y="0"/>
+          <a:ext cx="0" cy="0"/>
+          <a:chOff x="0" y="0"/>
+          <a:chExt cx="0" cy="0"/>
+        </a:xfrm>
+      </p:grpSpPr>
       <p:sp>
         <p:nvSpPr>
           <p:cNvPr id="2" name="Rectangle 1"/>
@@ -9573,7 +10471,7 @@
                 <a:srgbClr val="000000"/>
               </a:gs>
             </a:gsLst>
-            <a:lin scaled="0" ang="13800000"/>
+            <a:lin ang="13800000" scaled="0"/>
           </a:gradFill>
           <a:ln>
             <a:noFill/>
@@ -9598,6 +10496,7 @@
           <a:lstStyle/>
           <a:p>
             <a:pPr algn="ctr"/>
+            <a:endParaRPr/>
           </a:p>
         </p:txBody>
       </p:sp>
@@ -9685,6 +10584,7 @@
           <a:lstStyle/>
           <a:p>
             <a:pPr algn="ctr"/>
+            <a:endParaRPr/>
           </a:p>
         </p:txBody>
       </p:sp>
@@ -9748,7 +10648,7 @@
                 <a:srgbClr val="64D2FF"/>
               </a:gs>
             </a:gsLst>
-            <a:lin scaled="0" ang="0"/>
+            <a:lin ang="0" scaled="0"/>
           </a:gradFill>
           <a:ln>
             <a:noFill/>
@@ -9774,6 +10674,7 @@
           <a:lstStyle/>
           <a:p>
             <a:pPr algn="ctr"/>
+            <a:endParaRPr/>
           </a:p>
         </p:txBody>
       </p:sp>
@@ -9820,15 +10721,12 @@
                 <a:spcPct val="145000"/>
               </a:lnSpc>
             </a:pPr>
-            <a:r>
-              <a:rPr sz="1700" b="0">
-                <a:solidFill>
-                  <a:srgbClr val="FFFFFF"/>
-                </a:solidFill>
-                <a:latin typeface="Inter"/>
-              </a:rPr>
-              <a:t/>
-            </a:r>
+            <a:endParaRPr sz="1800" b="1">
+              <a:solidFill>
+                <a:srgbClr val="FFFFFF"/>
+              </a:solidFill>
+              <a:latin typeface="Inter"/>
+            </a:endParaRPr>
           </a:p>
           <a:p>
             <a:pPr>
@@ -9888,8 +10786,8 @@
 </p:sld>
 </file>
 
-<file path=ppt/slides/slide19.xml><?xml version="1.0" encoding="utf-8"?>
-<p:sld xmlns:a="http://schemas.openxmlformats.org/drawingml/2006/main" xmlns:p="http://schemas.openxmlformats.org/presentationml/2006/main" xmlns:r="http://schemas.openxmlformats.org/officeDocument/2006/relationships">
+<file path=ppt/slides/slide2.xml><?xml version="1.0" encoding="utf-8"?>
+<p:sld xmlns:a="http://schemas.openxmlformats.org/drawingml/2006/main" xmlns:r="http://schemas.openxmlformats.org/officeDocument/2006/relationships" xmlns:p="http://schemas.openxmlformats.org/presentationml/2006/main">
   <p:cSld>
     <p:bg>
       <p:bgPr>
@@ -9905,7 +10803,14 @@
         <p:cNvGrpSpPr/>
         <p:nvPr/>
       </p:nvGrpSpPr>
-      <p:grpSpPr/>
+      <p:grpSpPr>
+        <a:xfrm>
+          <a:off x="0" y="0"/>
+          <a:ext cx="0" cy="0"/>
+          <a:chOff x="0" y="0"/>
+          <a:chExt cx="0" cy="0"/>
+        </a:xfrm>
+      </p:grpSpPr>
       <p:sp>
         <p:nvSpPr>
           <p:cNvPr id="2" name="Rectangle 1"/>
@@ -9929,7 +10834,7 @@
                 <a:srgbClr val="000000"/>
               </a:gs>
             </a:gsLst>
-            <a:lin scaled="0" ang="13800000"/>
+            <a:lin ang="13800000" scaled="0"/>
           </a:gradFill>
           <a:ln>
             <a:noFill/>
@@ -9954,6 +10859,7 @@
           <a:lstStyle/>
           <a:p>
             <a:pPr algn="ctr"/>
+            <a:endParaRPr/>
           </a:p>
         </p:txBody>
       </p:sp>
@@ -9965,8 +10871,8 @@
         </p:nvSpPr>
         <p:spPr>
           <a:xfrm>
-            <a:off x="914400" y="457200"/>
-            <a:ext cx="2743200" cy="329184"/>
+            <a:off x="914400" y="502920"/>
+            <a:ext cx="10362895" cy="310896"/>
           </a:xfrm>
           <a:prstGeom prst="rect">
             <a:avLst/>
@@ -9987,25 +10893,115 @@
                 </a:solidFill>
                 <a:latin typeface="Inter"/>
               </a:rPr>
-              <a:t>Q&amp;A</a:t>
-            </a:r>
-          </a:p>
-        </p:txBody>
-      </p:sp>
-      <p:sp>
-        <p:nvSpPr>
-          <p:cNvPr id="4" name="Rectangle 3"/>
+              <a:t>THE CORE IDEA</a:t>
+            </a:r>
+          </a:p>
+        </p:txBody>
+      </p:sp>
+      <p:sp>
+        <p:nvSpPr>
+          <p:cNvPr id="4" name="TextBox 3"/>
+          <p:cNvSpPr txBox="1"/>
+          <p:nvPr/>
+        </p:nvSpPr>
+        <p:spPr>
+          <a:xfrm>
+            <a:off x="914400" y="914400"/>
+            <a:ext cx="10362895" cy="868680"/>
+          </a:xfrm>
+          <a:prstGeom prst="rect">
+            <a:avLst/>
+          </a:prstGeom>
+          <a:noFill/>
+        </p:spPr>
+        <p:txBody>
+          <a:bodyPr wrap="square">
+            <a:spAutoFit/>
+          </a:bodyPr>
+          <a:lstStyle/>
+          <a:p>
+            <a:pPr algn="l"/>
+            <a:r>
+              <a:rPr sz="4400" b="1" i="0">
+                <a:solidFill>
+                  <a:srgbClr val="FFFFFF"/>
+                </a:solidFill>
+                <a:latin typeface="Inter"/>
+              </a:rPr>
+              <a:t>つながるのは、曲の「この一点」。</a:t>
+            </a:r>
+          </a:p>
+        </p:txBody>
+      </p:sp>
+      <p:sp>
+        <p:nvSpPr>
+          <p:cNvPr id="5" name="Rectangle 4"/>
           <p:cNvSpPr/>
           <p:nvPr/>
         </p:nvSpPr>
         <p:spPr>
           <a:xfrm>
-            <a:off x="914400" y="868680"/>
-            <a:ext cx="10362895" cy="1188720"/>
+            <a:off x="960120" y="1874519"/>
+            <a:ext cx="2377440" cy="54864"/>
           </a:xfrm>
           <a:prstGeom prst="roundRect">
             <a:avLst>
-              <a:gd name="adj" fmla="val 10000"/>
+              <a:gd name="adj" fmla="val 50000"/>
+            </a:avLst>
+          </a:prstGeom>
+          <a:gradFill rotWithShape="1">
+            <a:gsLst>
+              <a:gs pos="0">
+                <a:srgbClr val="0A84FF"/>
+              </a:gs>
+              <a:gs pos="100000">
+                <a:srgbClr val="64D2FF"/>
+              </a:gs>
+            </a:gsLst>
+            <a:lin ang="0" scaled="0"/>
+          </a:gradFill>
+          <a:ln>
+            <a:noFill/>
+          </a:ln>
+          <a:effectLst/>
+        </p:spPr>
+        <p:style>
+          <a:lnRef idx="1">
+            <a:schemeClr val="accent1"/>
+          </a:lnRef>
+          <a:fillRef idx="3">
+            <a:schemeClr val="accent1"/>
+          </a:fillRef>
+          <a:effectRef idx="2">
+            <a:schemeClr val="accent1"/>
+          </a:effectRef>
+          <a:fontRef idx="minor">
+            <a:schemeClr val="lt1"/>
+          </a:fontRef>
+        </p:style>
+        <p:txBody>
+          <a:bodyPr rtlCol="0" anchor="ctr"/>
+          <a:lstStyle/>
+          <a:p>
+            <a:pPr algn="ctr"/>
+            <a:endParaRPr/>
+          </a:p>
+        </p:txBody>
+      </p:sp>
+      <p:sp>
+        <p:nvSpPr>
+          <p:cNvPr id="6" name="Rectangle 5"/>
+          <p:cNvSpPr/>
+          <p:nvPr/>
+        </p:nvSpPr>
+        <p:spPr>
+          <a:xfrm>
+            <a:off x="914400" y="2377440"/>
+            <a:ext cx="10362895" cy="2743200"/>
+          </a:xfrm>
+          <a:prstGeom prst="roundRect">
+            <a:avLst>
+              <a:gd name="adj" fmla="val 12000"/>
             </a:avLst>
           </a:prstGeom>
           <a:solidFill>
@@ -10041,19 +11037,20 @@
           <a:lstStyle/>
           <a:p>
             <a:pPr algn="ctr"/>
-          </a:p>
-        </p:txBody>
-      </p:sp>
-      <p:sp>
-        <p:nvSpPr>
-          <p:cNvPr id="5" name="TextBox 4"/>
+            <a:endParaRPr/>
+          </a:p>
+        </p:txBody>
+      </p:sp>
+      <p:sp>
+        <p:nvSpPr>
+          <p:cNvPr id="7" name="TextBox 6"/>
           <p:cNvSpPr txBox="1"/>
           <p:nvPr/>
         </p:nvSpPr>
         <p:spPr>
           <a:xfrm>
-            <a:off x="1280160" y="868680"/>
-            <a:ext cx="9631375" cy="1188720"/>
+            <a:off x="1417320" y="2651760"/>
+            <a:ext cx="7315200" cy="457200"/>
           </a:xfrm>
           <a:prstGeom prst="rect">
             <a:avLst/>
@@ -10061,34 +11058,81 @@
           <a:noFill/>
         </p:spPr>
         <p:txBody>
-          <a:bodyPr wrap="square" anchor="ctr">
+          <a:bodyPr wrap="square">
             <a:spAutoFit/>
           </a:bodyPr>
           <a:lstStyle/>
           <a:p>
             <a:pPr algn="l"/>
             <a:r>
-              <a:rPr sz="2200" b="1" i="0">
+              <a:rPr sz="1800" b="1" i="0">
                 <a:solidFill>
                   <a:srgbClr val="FFFFFF"/>
                 </a:solidFill>
                 <a:latin typeface="Inter"/>
               </a:rPr>
-              <a:t>Q3: ML の精度は現実的？</a:t>
-            </a:r>
-          </a:p>
-        </p:txBody>
-      </p:sp>
-      <p:sp>
-        <p:nvSpPr>
-          <p:cNvPr id="6" name="Rectangle 5"/>
+              <a:t>♪  Blinding Lights — The Weeknd</a:t>
+            </a:r>
+          </a:p>
+        </p:txBody>
+      </p:sp>
+      <p:sp>
+        <p:nvSpPr>
+          <p:cNvPr id="8" name="Rectangle 7"/>
           <p:cNvSpPr/>
           <p:nvPr/>
         </p:nvSpPr>
         <p:spPr>
           <a:xfrm>
-            <a:off x="960120" y="2286000"/>
-            <a:ext cx="2743200" cy="54864"/>
+            <a:off x="1417320" y="3611880"/>
+            <a:ext cx="9357055" cy="128016"/>
+          </a:xfrm>
+          <a:prstGeom prst="roundRect">
+            <a:avLst>
+              <a:gd name="adj" fmla="val 50000"/>
+            </a:avLst>
+          </a:prstGeom>
+          <a:solidFill>
+            <a:srgbClr val="333338"/>
+          </a:solidFill>
+          <a:ln>
+            <a:noFill/>
+          </a:ln>
+          <a:effectLst/>
+        </p:spPr>
+        <p:style>
+          <a:lnRef idx="1">
+            <a:schemeClr val="accent1"/>
+          </a:lnRef>
+          <a:fillRef idx="3">
+            <a:schemeClr val="accent1"/>
+          </a:fillRef>
+          <a:effectRef idx="2">
+            <a:schemeClr val="accent1"/>
+          </a:effectRef>
+          <a:fontRef idx="minor">
+            <a:schemeClr val="lt1"/>
+          </a:fontRef>
+        </p:style>
+        <p:txBody>
+          <a:bodyPr rtlCol="0" anchor="ctr"/>
+          <a:lstStyle/>
+          <a:p>
+            <a:pPr algn="ctr"/>
+            <a:endParaRPr/>
+          </a:p>
+        </p:txBody>
+      </p:sp>
+      <p:sp>
+        <p:nvSpPr>
+          <p:cNvPr id="9" name="Rectangle 8"/>
+          <p:cNvSpPr/>
+          <p:nvPr/>
+        </p:nvSpPr>
+        <p:spPr>
+          <a:xfrm>
+            <a:off x="1417320" y="3611880"/>
+            <a:ext cx="5801374" cy="128016"/>
           </a:xfrm>
           <a:prstGeom prst="roundRect">
             <a:avLst>
@@ -10104,7 +11148,7 @@
                 <a:srgbClr val="64D2FF"/>
               </a:gs>
             </a:gsLst>
-            <a:lin scaled="0" ang="0"/>
+            <a:lin ang="0" scaled="0"/>
           </a:gradFill>
           <a:ln>
             <a:noFill/>
@@ -10130,19 +11174,67 @@
           <a:lstStyle/>
           <a:p>
             <a:pPr algn="ctr"/>
-          </a:p>
-        </p:txBody>
-      </p:sp>
-      <p:sp>
-        <p:nvSpPr>
-          <p:cNvPr id="7" name="TextBox 6"/>
+            <a:endParaRPr/>
+          </a:p>
+        </p:txBody>
+      </p:sp>
+      <p:sp>
+        <p:nvSpPr>
+          <p:cNvPr id="10" name="Oval 9"/>
+          <p:cNvSpPr/>
+          <p:nvPr/>
+        </p:nvSpPr>
+        <p:spPr>
+          <a:xfrm>
+            <a:off x="7090678" y="3547872"/>
+            <a:ext cx="256032" cy="256032"/>
+          </a:xfrm>
+          <a:prstGeom prst="ellipse">
+            <a:avLst/>
+          </a:prstGeom>
+          <a:solidFill>
+            <a:srgbClr val="64D2FF"/>
+          </a:solidFill>
+          <a:ln w="19050">
+            <a:solidFill>
+              <a:srgbClr val="FFFFFF"/>
+            </a:solidFill>
+          </a:ln>
+          <a:effectLst/>
+        </p:spPr>
+        <p:style>
+          <a:lnRef idx="1">
+            <a:schemeClr val="accent1"/>
+          </a:lnRef>
+          <a:fillRef idx="3">
+            <a:schemeClr val="accent1"/>
+          </a:fillRef>
+          <a:effectRef idx="2">
+            <a:schemeClr val="accent1"/>
+          </a:effectRef>
+          <a:fontRef idx="minor">
+            <a:schemeClr val="lt1"/>
+          </a:fontRef>
+        </p:style>
+        <p:txBody>
+          <a:bodyPr rtlCol="0" anchor="ctr"/>
+          <a:lstStyle/>
+          <a:p>
+            <a:pPr algn="ctr"/>
+            <a:endParaRPr/>
+          </a:p>
+        </p:txBody>
+      </p:sp>
+      <p:sp>
+        <p:nvSpPr>
+          <p:cNvPr id="11" name="TextBox 10"/>
           <p:cNvSpPr txBox="1"/>
           <p:nvPr/>
         </p:nvSpPr>
         <p:spPr>
           <a:xfrm>
-            <a:off x="914400" y="2560320"/>
-            <a:ext cx="10362895" cy="3657600"/>
+            <a:off x="6715774" y="3063240"/>
+            <a:ext cx="1005840" cy="365760"/>
           </a:xfrm>
           <a:prstGeom prst="rect">
             <a:avLst/>
@@ -10155,83 +11247,120 @@
           </a:bodyPr>
           <a:lstStyle/>
           <a:p>
-            <a:pPr>
-              <a:lnSpc>
-                <a:spcPct val="145000"/>
-              </a:lnSpc>
-            </a:pPr>
-            <a:r>
-              <a:rPr sz="1800" b="1">
+            <a:pPr algn="ctr"/>
+            <a:r>
+              <a:rPr sz="1600" b="1" i="0">
+                <a:solidFill>
+                  <a:srgbClr val="64D2FF"/>
+                </a:solidFill>
+                <a:latin typeface="Inter"/>
+              </a:rPr>
+              <a:t>1:18</a:t>
+            </a:r>
+          </a:p>
+        </p:txBody>
+      </p:sp>
+      <p:sp>
+        <p:nvSpPr>
+          <p:cNvPr id="12" name="TextBox 11"/>
+          <p:cNvSpPr txBox="1"/>
+          <p:nvPr/>
+        </p:nvSpPr>
+        <p:spPr>
+          <a:xfrm>
+            <a:off x="1417320" y="4206240"/>
+            <a:ext cx="9357055" cy="457200"/>
+          </a:xfrm>
+          <a:prstGeom prst="rect">
+            <a:avLst/>
+          </a:prstGeom>
+          <a:noFill/>
+        </p:spPr>
+        <p:txBody>
+          <a:bodyPr wrap="square">
+            <a:spAutoFit/>
+          </a:bodyPr>
+          <a:lstStyle/>
+          <a:p>
+            <a:pPr algn="ctr"/>
+            <a:r>
+              <a:rPr sz="1900" b="0" i="1">
                 <a:solidFill>
                   <a:srgbClr val="FFFFFF"/>
                 </a:solidFill>
                 <a:latin typeface="Inter"/>
               </a:rPr>
-              <a:t>A. MVP はルールベース。精度より体験を優先。</a:t>
-            </a:r>
-          </a:p>
-          <a:p>
-            <a:pPr>
-              <a:lnSpc>
-                <a:spcPct val="145000"/>
-              </a:lnSpc>
-            </a:pPr>
-            <a:r>
-              <a:rPr sz="1700" b="0">
-                <a:solidFill>
-                  <a:srgbClr val="FFFFFF"/>
-                </a:solidFill>
-                <a:latin typeface="Inter"/>
-              </a:rPr>
-              <a:t/>
-            </a:r>
-          </a:p>
-          <a:p>
-            <a:pPr>
-              <a:lnSpc>
-                <a:spcPct val="145000"/>
-              </a:lnSpc>
-            </a:pPr>
-            <a:r>
-              <a:rPr sz="1700" b="0">
+              <a:t>“I said, ooh, I'm blinded by the lights”</a:t>
+            </a:r>
+          </a:p>
+        </p:txBody>
+      </p:sp>
+      <p:sp>
+        <p:nvSpPr>
+          <p:cNvPr id="13" name="TextBox 12"/>
+          <p:cNvSpPr txBox="1"/>
+          <p:nvPr/>
+        </p:nvSpPr>
+        <p:spPr>
+          <a:xfrm>
+            <a:off x="1417320" y="4663440"/>
+            <a:ext cx="9357055" cy="365760"/>
+          </a:xfrm>
+          <a:prstGeom prst="rect">
+            <a:avLst/>
+          </a:prstGeom>
+          <a:noFill/>
+        </p:spPr>
+        <p:txBody>
+          <a:bodyPr wrap="square">
+            <a:spAutoFit/>
+          </a:bodyPr>
+          <a:lstStyle/>
+          <a:p>
+            <a:pPr algn="ctr"/>
+            <a:r>
+              <a:rPr sz="1500" b="1" i="0">
                 <a:solidFill>
                   <a:srgbClr val="64D2FF"/>
                 </a:solidFill>
                 <a:latin typeface="Inter"/>
               </a:rPr>
-              <a:t>volume × 0.42 + motion × 0.58。</a:t>
-            </a:r>
-          </a:p>
-          <a:p>
-            <a:pPr>
-              <a:lnSpc>
-                <a:spcPct val="145000"/>
-              </a:lnSpc>
-            </a:pPr>
-            <a:r>
-              <a:rPr sz="1700" b="0">
-                <a:solidFill>
-                  <a:srgbClr val="FFFFFF"/>
-                </a:solidFill>
-                <a:latin typeface="Inter"/>
-              </a:rPr>
-              <a:t>誇大な精度は主張しない。</a:t>
-            </a:r>
-          </a:p>
-          <a:p>
-            <a:pPr>
-              <a:lnSpc>
-                <a:spcPct val="145000"/>
-              </a:lnSpc>
-            </a:pPr>
-            <a:r>
-              <a:rPr sz="1700" b="0">
-                <a:solidFill>
-                  <a:srgbClr val="FFFFFF"/>
-                </a:solidFill>
-                <a:latin typeface="Inter"/>
-              </a:rPr>
-              <a:t>AI対話の回答 → ラベル → Create ML で精度向上。使うほど賢くなる。</a:t>
+              <a:t>●  ●  ●  ●    同じ瞬間に反応した人と出会う</a:t>
+            </a:r>
+          </a:p>
+        </p:txBody>
+      </p:sp>
+      <p:sp>
+        <p:nvSpPr>
+          <p:cNvPr id="14" name="TextBox 13"/>
+          <p:cNvSpPr txBox="1"/>
+          <p:nvPr/>
+        </p:nvSpPr>
+        <p:spPr>
+          <a:xfrm>
+            <a:off x="914400" y="5349240"/>
+            <a:ext cx="10362895" cy="548640"/>
+          </a:xfrm>
+          <a:prstGeom prst="rect">
+            <a:avLst/>
+          </a:prstGeom>
+          <a:noFill/>
+        </p:spPr>
+        <p:txBody>
+          <a:bodyPr wrap="square">
+            <a:spAutoFit/>
+          </a:bodyPr>
+          <a:lstStyle/>
+          <a:p>
+            <a:pPr algn="l"/>
+            <a:r>
+              <a:rPr sz="1800" b="0" i="0">
+                <a:solidFill>
+                  <a:srgbClr val="B8B8BE"/>
+                </a:solidFill>
+                <a:latin typeface="Inter"/>
+              </a:rPr>
+              <a:t>曲全体でも、ジャンルでもない。特定の瞬間の歌詞 × 反応で、人とつながる。</a:t>
             </a:r>
           </a:p>
         </p:txBody>
@@ -10244,8 +11373,8 @@
 </p:sld>
 </file>
 
-<file path=ppt/slides/slide2.xml><?xml version="1.0" encoding="utf-8"?>
-<p:sld xmlns:a="http://schemas.openxmlformats.org/drawingml/2006/main" xmlns:p="http://schemas.openxmlformats.org/presentationml/2006/main" xmlns:r="http://schemas.openxmlformats.org/officeDocument/2006/relationships">
+<file path=ppt/slides/slide20.xml><?xml version="1.0" encoding="utf-8"?>
+<p:sld xmlns:a="http://schemas.openxmlformats.org/drawingml/2006/main" xmlns:r="http://schemas.openxmlformats.org/officeDocument/2006/relationships" xmlns:p="http://schemas.openxmlformats.org/presentationml/2006/main">
   <p:cSld>
     <p:bg>
       <p:bgPr>
@@ -10261,7 +11390,14 @@
         <p:cNvGrpSpPr/>
         <p:nvPr/>
       </p:nvGrpSpPr>
-      <p:grpSpPr/>
+      <p:grpSpPr>
+        <a:xfrm>
+          <a:off x="0" y="0"/>
+          <a:ext cx="0" cy="0"/>
+          <a:chOff x="0" y="0"/>
+          <a:chExt cx="0" cy="0"/>
+        </a:xfrm>
+      </p:grpSpPr>
       <p:sp>
         <p:nvSpPr>
           <p:cNvPr id="2" name="Rectangle 1"/>
@@ -10285,7 +11421,7 @@
                 <a:srgbClr val="000000"/>
               </a:gs>
             </a:gsLst>
-            <a:lin scaled="0" ang="13800000"/>
+            <a:lin ang="13800000" scaled="0"/>
           </a:gradFill>
           <a:ln>
             <a:noFill/>
@@ -10310,6 +11446,7 @@
           <a:lstStyle/>
           <a:p>
             <a:pPr algn="ctr"/>
+            <a:endParaRPr/>
           </a:p>
         </p:txBody>
       </p:sp>
@@ -10321,8 +11458,8 @@
         </p:nvSpPr>
         <p:spPr>
           <a:xfrm>
-            <a:off x="914400" y="502920"/>
-            <a:ext cx="10362895" cy="310896"/>
+            <a:off x="914400" y="457200"/>
+            <a:ext cx="2743200" cy="329184"/>
           </a:xfrm>
           <a:prstGeom prst="rect">
             <a:avLst/>
@@ -10343,114 +11480,25 @@
                 </a:solidFill>
                 <a:latin typeface="Inter"/>
               </a:rPr>
-              <a:t>THE CORE IDEA</a:t>
-            </a:r>
-          </a:p>
-        </p:txBody>
-      </p:sp>
-      <p:sp>
-        <p:nvSpPr>
-          <p:cNvPr id="4" name="TextBox 3"/>
-          <p:cNvSpPr txBox="1"/>
-          <p:nvPr/>
-        </p:nvSpPr>
-        <p:spPr>
-          <a:xfrm>
-            <a:off x="914400" y="914400"/>
-            <a:ext cx="10362895" cy="868680"/>
-          </a:xfrm>
-          <a:prstGeom prst="rect">
-            <a:avLst/>
-          </a:prstGeom>
-          <a:noFill/>
-        </p:spPr>
-        <p:txBody>
-          <a:bodyPr wrap="square">
-            <a:spAutoFit/>
-          </a:bodyPr>
-          <a:lstStyle/>
-          <a:p>
-            <a:pPr algn="l"/>
-            <a:r>
-              <a:rPr sz="4400" b="1" i="0">
-                <a:solidFill>
-                  <a:srgbClr val="FFFFFF"/>
-                </a:solidFill>
-                <a:latin typeface="Inter"/>
-              </a:rPr>
-              <a:t>つながるのは、曲の「この一点」。</a:t>
-            </a:r>
-          </a:p>
-        </p:txBody>
-      </p:sp>
-      <p:sp>
-        <p:nvSpPr>
-          <p:cNvPr id="5" name="Rectangle 4"/>
+              <a:t>Q&amp;A</a:t>
+            </a:r>
+          </a:p>
+        </p:txBody>
+      </p:sp>
+      <p:sp>
+        <p:nvSpPr>
+          <p:cNvPr id="4" name="Rectangle 3"/>
           <p:cNvSpPr/>
           <p:nvPr/>
         </p:nvSpPr>
         <p:spPr>
           <a:xfrm>
-            <a:off x="960120" y="1874519"/>
-            <a:ext cx="2377440" cy="54864"/>
+            <a:off x="914400" y="868680"/>
+            <a:ext cx="10362895" cy="1188720"/>
           </a:xfrm>
           <a:prstGeom prst="roundRect">
             <a:avLst>
-              <a:gd name="adj" fmla="val 50000"/>
-            </a:avLst>
-          </a:prstGeom>
-          <a:gradFill rotWithShape="1">
-            <a:gsLst>
-              <a:gs pos="0">
-                <a:srgbClr val="0A84FF"/>
-              </a:gs>
-              <a:gs pos="100000">
-                <a:srgbClr val="64D2FF"/>
-              </a:gs>
-            </a:gsLst>
-            <a:lin scaled="0" ang="0"/>
-          </a:gradFill>
-          <a:ln>
-            <a:noFill/>
-          </a:ln>
-          <a:effectLst/>
-        </p:spPr>
-        <p:style>
-          <a:lnRef idx="1">
-            <a:schemeClr val="accent1"/>
-          </a:lnRef>
-          <a:fillRef idx="3">
-            <a:schemeClr val="accent1"/>
-          </a:fillRef>
-          <a:effectRef idx="2">
-            <a:schemeClr val="accent1"/>
-          </a:effectRef>
-          <a:fontRef idx="minor">
-            <a:schemeClr val="lt1"/>
-          </a:fontRef>
-        </p:style>
-        <p:txBody>
-          <a:bodyPr rtlCol="0" anchor="ctr"/>
-          <a:lstStyle/>
-          <a:p>
-            <a:pPr algn="ctr"/>
-          </a:p>
-        </p:txBody>
-      </p:sp>
-      <p:sp>
-        <p:nvSpPr>
-          <p:cNvPr id="6" name="Rectangle 5"/>
-          <p:cNvSpPr/>
-          <p:nvPr/>
-        </p:nvSpPr>
-        <p:spPr>
-          <a:xfrm>
-            <a:off x="914400" y="2377440"/>
-            <a:ext cx="10362895" cy="2743200"/>
-          </a:xfrm>
-          <a:prstGeom prst="roundRect">
-            <a:avLst>
-              <a:gd name="adj" fmla="val 12000"/>
+              <a:gd name="adj" fmla="val 10000"/>
             </a:avLst>
           </a:prstGeom>
           <a:solidFill>
@@ -10486,19 +11534,20 @@
           <a:lstStyle/>
           <a:p>
             <a:pPr algn="ctr"/>
-          </a:p>
-        </p:txBody>
-      </p:sp>
-      <p:sp>
-        <p:nvSpPr>
-          <p:cNvPr id="7" name="TextBox 6"/>
+            <a:endParaRPr/>
+          </a:p>
+        </p:txBody>
+      </p:sp>
+      <p:sp>
+        <p:nvSpPr>
+          <p:cNvPr id="5" name="TextBox 4"/>
           <p:cNvSpPr txBox="1"/>
           <p:nvPr/>
         </p:nvSpPr>
         <p:spPr>
           <a:xfrm>
-            <a:off x="1417320" y="2651760"/>
-            <a:ext cx="7315200" cy="457200"/>
+            <a:off x="1280160" y="868680"/>
+            <a:ext cx="9631375" cy="1188720"/>
           </a:xfrm>
           <a:prstGeom prst="rect">
             <a:avLst/>
@@ -10506,80 +11555,34 @@
           <a:noFill/>
         </p:spPr>
         <p:txBody>
-          <a:bodyPr wrap="square">
+          <a:bodyPr wrap="square" anchor="ctr">
             <a:spAutoFit/>
           </a:bodyPr>
           <a:lstStyle/>
           <a:p>
             <a:pPr algn="l"/>
             <a:r>
-              <a:rPr sz="1800" b="1" i="0">
+              <a:rPr sz="2200" b="1" i="0">
                 <a:solidFill>
                   <a:srgbClr val="FFFFFF"/>
                 </a:solidFill>
                 <a:latin typeface="Inter"/>
               </a:rPr>
-              <a:t>♪  Blinding Lights — The Weeknd</a:t>
-            </a:r>
-          </a:p>
-        </p:txBody>
-      </p:sp>
-      <p:sp>
-        <p:nvSpPr>
-          <p:cNvPr id="8" name="Rectangle 7"/>
+              <a:t>Q3: ML の精度は現実的？</a:t>
+            </a:r>
+          </a:p>
+        </p:txBody>
+      </p:sp>
+      <p:sp>
+        <p:nvSpPr>
+          <p:cNvPr id="6" name="Rectangle 5"/>
           <p:cNvSpPr/>
           <p:nvPr/>
         </p:nvSpPr>
         <p:spPr>
           <a:xfrm>
-            <a:off x="1417320" y="3611880"/>
-            <a:ext cx="9357055" cy="128016"/>
-          </a:xfrm>
-          <a:prstGeom prst="roundRect">
-            <a:avLst>
-              <a:gd name="adj" fmla="val 50000"/>
-            </a:avLst>
-          </a:prstGeom>
-          <a:solidFill>
-            <a:srgbClr val="333338"/>
-          </a:solidFill>
-          <a:ln>
-            <a:noFill/>
-          </a:ln>
-          <a:effectLst/>
-        </p:spPr>
-        <p:style>
-          <a:lnRef idx="1">
-            <a:schemeClr val="accent1"/>
-          </a:lnRef>
-          <a:fillRef idx="3">
-            <a:schemeClr val="accent1"/>
-          </a:fillRef>
-          <a:effectRef idx="2">
-            <a:schemeClr val="accent1"/>
-          </a:effectRef>
-          <a:fontRef idx="minor">
-            <a:schemeClr val="lt1"/>
-          </a:fontRef>
-        </p:style>
-        <p:txBody>
-          <a:bodyPr rtlCol="0" anchor="ctr"/>
-          <a:lstStyle/>
-          <a:p>
-            <a:pPr algn="ctr"/>
-          </a:p>
-        </p:txBody>
-      </p:sp>
-      <p:sp>
-        <p:nvSpPr>
-          <p:cNvPr id="9" name="Rectangle 8"/>
-          <p:cNvSpPr/>
-          <p:nvPr/>
-        </p:nvSpPr>
-        <p:spPr>
-          <a:xfrm>
-            <a:off x="1417320" y="3611880"/>
-            <a:ext cx="5801374" cy="128016"/>
+            <a:off x="960120" y="2286000"/>
+            <a:ext cx="2743200" cy="54864"/>
           </a:xfrm>
           <a:prstGeom prst="roundRect">
             <a:avLst>
@@ -10595,7 +11598,7 @@
                 <a:srgbClr val="64D2FF"/>
               </a:gs>
             </a:gsLst>
-            <a:lin scaled="0" ang="0"/>
+            <a:lin ang="0" scaled="0"/>
           </a:gradFill>
           <a:ln>
             <a:noFill/>
@@ -10621,65 +11624,20 @@
           <a:lstStyle/>
           <a:p>
             <a:pPr algn="ctr"/>
-          </a:p>
-        </p:txBody>
-      </p:sp>
-      <p:sp>
-        <p:nvSpPr>
-          <p:cNvPr id="10" name="Oval 9"/>
-          <p:cNvSpPr/>
-          <p:nvPr/>
-        </p:nvSpPr>
-        <p:spPr>
-          <a:xfrm>
-            <a:off x="7090678" y="3547872"/>
-            <a:ext cx="256032" cy="256032"/>
-          </a:xfrm>
-          <a:prstGeom prst="ellipse">
-            <a:avLst/>
-          </a:prstGeom>
-          <a:solidFill>
-            <a:srgbClr val="64D2FF"/>
-          </a:solidFill>
-          <a:ln w="19050">
-            <a:solidFill>
-              <a:srgbClr val="FFFFFF"/>
-            </a:solidFill>
-          </a:ln>
-          <a:effectLst/>
-        </p:spPr>
-        <p:style>
-          <a:lnRef idx="1">
-            <a:schemeClr val="accent1"/>
-          </a:lnRef>
-          <a:fillRef idx="3">
-            <a:schemeClr val="accent1"/>
-          </a:fillRef>
-          <a:effectRef idx="2">
-            <a:schemeClr val="accent1"/>
-          </a:effectRef>
-          <a:fontRef idx="minor">
-            <a:schemeClr val="lt1"/>
-          </a:fontRef>
-        </p:style>
-        <p:txBody>
-          <a:bodyPr rtlCol="0" anchor="ctr"/>
-          <a:lstStyle/>
-          <a:p>
-            <a:pPr algn="ctr"/>
-          </a:p>
-        </p:txBody>
-      </p:sp>
-      <p:sp>
-        <p:nvSpPr>
-          <p:cNvPr id="11" name="TextBox 10"/>
+            <a:endParaRPr/>
+          </a:p>
+        </p:txBody>
+      </p:sp>
+      <p:sp>
+        <p:nvSpPr>
+          <p:cNvPr id="7" name="TextBox 6"/>
           <p:cNvSpPr txBox="1"/>
           <p:nvPr/>
         </p:nvSpPr>
         <p:spPr>
           <a:xfrm>
-            <a:off x="6715774" y="3063240"/>
-            <a:ext cx="1005840" cy="365760"/>
+            <a:off x="914400" y="2560320"/>
+            <a:ext cx="10362895" cy="3657600"/>
           </a:xfrm>
           <a:prstGeom prst="rect">
             <a:avLst/>
@@ -10692,120 +11650,80 @@
           </a:bodyPr>
           <a:lstStyle/>
           <a:p>
-            <a:pPr algn="ctr"/>
-            <a:r>
-              <a:rPr sz="1600" b="1" i="0">
+            <a:pPr>
+              <a:lnSpc>
+                <a:spcPct val="145000"/>
+              </a:lnSpc>
+            </a:pPr>
+            <a:r>
+              <a:rPr sz="1800" b="1">
+                <a:solidFill>
+                  <a:srgbClr val="FFFFFF"/>
+                </a:solidFill>
+                <a:latin typeface="Inter"/>
+              </a:rPr>
+              <a:t>A. MVP はルールベース。精度より体験を優先。</a:t>
+            </a:r>
+          </a:p>
+          <a:p>
+            <a:pPr>
+              <a:lnSpc>
+                <a:spcPct val="145000"/>
+              </a:lnSpc>
+            </a:pPr>
+            <a:endParaRPr sz="1800" b="1">
+              <a:solidFill>
+                <a:srgbClr val="FFFFFF"/>
+              </a:solidFill>
+              <a:latin typeface="Inter"/>
+            </a:endParaRPr>
+          </a:p>
+          <a:p>
+            <a:pPr>
+              <a:lnSpc>
+                <a:spcPct val="145000"/>
+              </a:lnSpc>
+            </a:pPr>
+            <a:r>
+              <a:rPr sz="1700" b="0">
                 <a:solidFill>
                   <a:srgbClr val="64D2FF"/>
                 </a:solidFill>
                 <a:latin typeface="Inter"/>
               </a:rPr>
-              <a:t>1:18</a:t>
-            </a:r>
-          </a:p>
-        </p:txBody>
-      </p:sp>
-      <p:sp>
-        <p:nvSpPr>
-          <p:cNvPr id="12" name="TextBox 11"/>
-          <p:cNvSpPr txBox="1"/>
-          <p:nvPr/>
-        </p:nvSpPr>
-        <p:spPr>
-          <a:xfrm>
-            <a:off x="1417320" y="4206240"/>
-            <a:ext cx="9357055" cy="457200"/>
-          </a:xfrm>
-          <a:prstGeom prst="rect">
-            <a:avLst/>
-          </a:prstGeom>
-          <a:noFill/>
-        </p:spPr>
-        <p:txBody>
-          <a:bodyPr wrap="square">
-            <a:spAutoFit/>
-          </a:bodyPr>
-          <a:lstStyle/>
-          <a:p>
-            <a:pPr algn="ctr"/>
-            <a:r>
-              <a:rPr sz="1900" b="0" i="1">
+              <a:t>volume × 0.42 + motion × 0.58。</a:t>
+            </a:r>
+          </a:p>
+          <a:p>
+            <a:pPr>
+              <a:lnSpc>
+                <a:spcPct val="145000"/>
+              </a:lnSpc>
+            </a:pPr>
+            <a:r>
+              <a:rPr sz="1700" b="0">
                 <a:solidFill>
                   <a:srgbClr val="FFFFFF"/>
                 </a:solidFill>
                 <a:latin typeface="Inter"/>
               </a:rPr>
-              <a:t>“I said, ooh, I'm blinded by the lights”</a:t>
-            </a:r>
-          </a:p>
-        </p:txBody>
-      </p:sp>
-      <p:sp>
-        <p:nvSpPr>
-          <p:cNvPr id="13" name="TextBox 12"/>
-          <p:cNvSpPr txBox="1"/>
-          <p:nvPr/>
-        </p:nvSpPr>
-        <p:spPr>
-          <a:xfrm>
-            <a:off x="1417320" y="4663440"/>
-            <a:ext cx="9357055" cy="365760"/>
-          </a:xfrm>
-          <a:prstGeom prst="rect">
-            <a:avLst/>
-          </a:prstGeom>
-          <a:noFill/>
-        </p:spPr>
-        <p:txBody>
-          <a:bodyPr wrap="square">
-            <a:spAutoFit/>
-          </a:bodyPr>
-          <a:lstStyle/>
-          <a:p>
-            <a:pPr algn="ctr"/>
-            <a:r>
-              <a:rPr sz="1500" b="1" i="0">
-                <a:solidFill>
-                  <a:srgbClr val="64D2FF"/>
-                </a:solidFill>
-                <a:latin typeface="Inter"/>
-              </a:rPr>
-              <a:t>●  ●  ●  ●    同じ瞬間に反応した人と出会う</a:t>
-            </a:r>
-          </a:p>
-        </p:txBody>
-      </p:sp>
-      <p:sp>
-        <p:nvSpPr>
-          <p:cNvPr id="14" name="TextBox 13"/>
-          <p:cNvSpPr txBox="1"/>
-          <p:nvPr/>
-        </p:nvSpPr>
-        <p:spPr>
-          <a:xfrm>
-            <a:off x="914400" y="5349240"/>
-            <a:ext cx="10362895" cy="548640"/>
-          </a:xfrm>
-          <a:prstGeom prst="rect">
-            <a:avLst/>
-          </a:prstGeom>
-          <a:noFill/>
-        </p:spPr>
-        <p:txBody>
-          <a:bodyPr wrap="square">
-            <a:spAutoFit/>
-          </a:bodyPr>
-          <a:lstStyle/>
-          <a:p>
-            <a:pPr algn="l"/>
-            <a:r>
-              <a:rPr sz="1800" b="0" i="0">
-                <a:solidFill>
-                  <a:srgbClr val="B8B8BE"/>
-                </a:solidFill>
-                <a:latin typeface="Inter"/>
-              </a:rPr>
-              <a:t>曲全体でも、ジャンルでもない。特定の瞬間の歌詞 × 反応で、人とつながる。</a:t>
+              <a:t>誇大な精度は主張しない。</a:t>
+            </a:r>
+          </a:p>
+          <a:p>
+            <a:pPr>
+              <a:lnSpc>
+                <a:spcPct val="145000"/>
+              </a:lnSpc>
+            </a:pPr>
+            <a:r>
+              <a:rPr sz="1700" b="0">
+                <a:solidFill>
+                  <a:srgbClr val="FFFFFF"/>
+                </a:solidFill>
+                <a:latin typeface="Inter"/>
+              </a:rPr>
+              <a:t>AI対話の回答 → ラベル → Create ML で精度向上。使うほど賢くなる。</a:t>
             </a:r>
           </a:p>
         </p:txBody>
@@ -10818,8 +11736,8 @@
 </p:sld>
 </file>
 
-<file path=ppt/slides/slide20.xml><?xml version="1.0" encoding="utf-8"?>
-<p:sld xmlns:a="http://schemas.openxmlformats.org/drawingml/2006/main" xmlns:p="http://schemas.openxmlformats.org/presentationml/2006/main" xmlns:r="http://schemas.openxmlformats.org/officeDocument/2006/relationships">
+<file path=ppt/slides/slide21.xml><?xml version="1.0" encoding="utf-8"?>
+<p:sld xmlns:a="http://schemas.openxmlformats.org/drawingml/2006/main" xmlns:r="http://schemas.openxmlformats.org/officeDocument/2006/relationships" xmlns:p="http://schemas.openxmlformats.org/presentationml/2006/main">
   <p:cSld>
     <p:bg>
       <p:bgPr>
@@ -10835,7 +11753,14 @@
         <p:cNvGrpSpPr/>
         <p:nvPr/>
       </p:nvGrpSpPr>
-      <p:grpSpPr/>
+      <p:grpSpPr>
+        <a:xfrm>
+          <a:off x="0" y="0"/>
+          <a:ext cx="0" cy="0"/>
+          <a:chOff x="0" y="0"/>
+          <a:chExt cx="0" cy="0"/>
+        </a:xfrm>
+      </p:grpSpPr>
       <p:sp>
         <p:nvSpPr>
           <p:cNvPr id="2" name="Rectangle 1"/>
@@ -10859,7 +11784,7 @@
                 <a:srgbClr val="000000"/>
               </a:gs>
             </a:gsLst>
-            <a:lin scaled="0" ang="13800000"/>
+            <a:lin ang="13800000" scaled="0"/>
           </a:gradFill>
           <a:ln>
             <a:noFill/>
@@ -10884,6 +11809,7 @@
           <a:lstStyle/>
           <a:p>
             <a:pPr algn="ctr"/>
+            <a:endParaRPr/>
           </a:p>
         </p:txBody>
       </p:sp>
@@ -10971,6 +11897,7 @@
           <a:lstStyle/>
           <a:p>
             <a:pPr algn="ctr"/>
+            <a:endParaRPr/>
           </a:p>
         </p:txBody>
       </p:sp>
@@ -11034,7 +11961,7 @@
                 <a:srgbClr val="64D2FF"/>
               </a:gs>
             </a:gsLst>
-            <a:lin scaled="0" ang="0"/>
+            <a:lin ang="0" scaled="0"/>
           </a:gradFill>
           <a:ln>
             <a:noFill/>
@@ -11060,6 +11987,7 @@
           <a:lstStyle/>
           <a:p>
             <a:pPr algn="ctr"/>
+            <a:endParaRPr/>
           </a:p>
         </p:txBody>
       </p:sp>
@@ -11106,15 +12034,12 @@
                 <a:spcPct val="145000"/>
               </a:lnSpc>
             </a:pPr>
-            <a:r>
-              <a:rPr sz="1700" b="0">
-                <a:solidFill>
-                  <a:srgbClr val="FFFFFF"/>
-                </a:solidFill>
-                <a:latin typeface="Inter"/>
-              </a:rPr>
-              <a:t/>
-            </a:r>
+            <a:endParaRPr sz="1800" b="1">
+              <a:solidFill>
+                <a:srgbClr val="FFFFFF"/>
+              </a:solidFill>
+              <a:latin typeface="Inter"/>
+            </a:endParaRPr>
           </a:p>
           <a:p>
             <a:pPr>
@@ -11158,8 +12083,8 @@
 </p:sld>
 </file>
 
-<file path=ppt/slides/slide21.xml><?xml version="1.0" encoding="utf-8"?>
-<p:sld xmlns:a="http://schemas.openxmlformats.org/drawingml/2006/main" xmlns:p="http://schemas.openxmlformats.org/presentationml/2006/main" xmlns:r="http://schemas.openxmlformats.org/officeDocument/2006/relationships">
+<file path=ppt/slides/slide22.xml><?xml version="1.0" encoding="utf-8"?>
+<p:sld xmlns:a="http://schemas.openxmlformats.org/drawingml/2006/main" xmlns:r="http://schemas.openxmlformats.org/officeDocument/2006/relationships" xmlns:p="http://schemas.openxmlformats.org/presentationml/2006/main">
   <p:cSld>
     <p:bg>
       <p:bgPr>
@@ -11175,7 +12100,14 @@
         <p:cNvGrpSpPr/>
         <p:nvPr/>
       </p:nvGrpSpPr>
-      <p:grpSpPr/>
+      <p:grpSpPr>
+        <a:xfrm>
+          <a:off x="0" y="0"/>
+          <a:ext cx="0" cy="0"/>
+          <a:chOff x="0" y="0"/>
+          <a:chExt cx="0" cy="0"/>
+        </a:xfrm>
+      </p:grpSpPr>
       <p:sp>
         <p:nvSpPr>
           <p:cNvPr id="2" name="Rectangle 1"/>
@@ -11199,7 +12131,7 @@
                 <a:srgbClr val="000000"/>
               </a:gs>
             </a:gsLst>
-            <a:lin scaled="0" ang="13800000"/>
+            <a:lin ang="13800000" scaled="0"/>
           </a:gradFill>
           <a:ln>
             <a:noFill/>
@@ -11224,6 +12156,7 @@
           <a:lstStyle/>
           <a:p>
             <a:pPr algn="ctr"/>
+            <a:endParaRPr/>
           </a:p>
         </p:txBody>
       </p:sp>
@@ -11311,6 +12244,7 @@
           <a:lstStyle/>
           <a:p>
             <a:pPr algn="ctr"/>
+            <a:endParaRPr/>
           </a:p>
         </p:txBody>
       </p:sp>
@@ -11374,7 +12308,7 @@
                 <a:srgbClr val="64D2FF"/>
               </a:gs>
             </a:gsLst>
-            <a:lin scaled="0" ang="0"/>
+            <a:lin ang="0" scaled="0"/>
           </a:gradFill>
           <a:ln>
             <a:noFill/>
@@ -11400,6 +12334,7 @@
           <a:lstStyle/>
           <a:p>
             <a:pPr algn="ctr"/>
+            <a:endParaRPr/>
           </a:p>
         </p:txBody>
       </p:sp>
@@ -11446,15 +12381,12 @@
                 <a:spcPct val="145000"/>
               </a:lnSpc>
             </a:pPr>
-            <a:r>
-              <a:rPr sz="1700" b="0">
-                <a:solidFill>
-                  <a:srgbClr val="FFFFFF"/>
-                </a:solidFill>
-                <a:latin typeface="Inter"/>
-              </a:rPr>
-              <a:t/>
-            </a:r>
+            <a:endParaRPr sz="1800" b="1">
+              <a:solidFill>
+                <a:srgbClr val="FFFFFF"/>
+              </a:solidFill>
+              <a:latin typeface="Inter"/>
+            </a:endParaRPr>
           </a:p>
           <a:p>
             <a:pPr>
@@ -11514,8 +12446,8 @@
 </p:sld>
 </file>
 
-<file path=ppt/slides/slide22.xml><?xml version="1.0" encoding="utf-8"?>
-<p:sld xmlns:a="http://schemas.openxmlformats.org/drawingml/2006/main" xmlns:p="http://schemas.openxmlformats.org/presentationml/2006/main" xmlns:r="http://schemas.openxmlformats.org/officeDocument/2006/relationships">
+<file path=ppt/slides/slide23.xml><?xml version="1.0" encoding="utf-8"?>
+<p:sld xmlns:a="http://schemas.openxmlformats.org/drawingml/2006/main" xmlns:r="http://schemas.openxmlformats.org/officeDocument/2006/relationships" xmlns:p="http://schemas.openxmlformats.org/presentationml/2006/main">
   <p:cSld>
     <p:bg>
       <p:bgPr>
@@ -11531,7 +12463,14 @@
         <p:cNvGrpSpPr/>
         <p:nvPr/>
       </p:nvGrpSpPr>
-      <p:grpSpPr/>
+      <p:grpSpPr>
+        <a:xfrm>
+          <a:off x="0" y="0"/>
+          <a:ext cx="0" cy="0"/>
+          <a:chOff x="0" y="0"/>
+          <a:chExt cx="0" cy="0"/>
+        </a:xfrm>
+      </p:grpSpPr>
       <p:sp>
         <p:nvSpPr>
           <p:cNvPr id="2" name="Rectangle 1"/>
@@ -11555,7 +12494,7 @@
                 <a:srgbClr val="000000"/>
               </a:gs>
             </a:gsLst>
-            <a:lin scaled="0" ang="13800000"/>
+            <a:lin ang="13800000" scaled="0"/>
           </a:gradFill>
           <a:ln>
             <a:noFill/>
@@ -11580,6 +12519,7 @@
           <a:lstStyle/>
           <a:p>
             <a:pPr algn="ctr"/>
+            <a:endParaRPr/>
           </a:p>
         </p:txBody>
       </p:sp>
@@ -11667,6 +12607,7 @@
           <a:lstStyle/>
           <a:p>
             <a:pPr algn="ctr"/>
+            <a:endParaRPr/>
           </a:p>
         </p:txBody>
       </p:sp>
@@ -11730,7 +12671,7 @@
                 <a:srgbClr val="64D2FF"/>
               </a:gs>
             </a:gsLst>
-            <a:lin scaled="0" ang="0"/>
+            <a:lin ang="0" scaled="0"/>
           </a:gradFill>
           <a:ln>
             <a:noFill/>
@@ -11756,6 +12697,7 @@
           <a:lstStyle/>
           <a:p>
             <a:pPr algn="ctr"/>
+            <a:endParaRPr/>
           </a:p>
         </p:txBody>
       </p:sp>
@@ -11802,15 +12744,12 @@
                 <a:spcPct val="145000"/>
               </a:lnSpc>
             </a:pPr>
-            <a:r>
-              <a:rPr sz="1700" b="0">
-                <a:solidFill>
-                  <a:srgbClr val="FFFFFF"/>
-                </a:solidFill>
-                <a:latin typeface="Inter"/>
-              </a:rPr>
-              <a:t/>
-            </a:r>
+            <a:endParaRPr sz="1800" b="1">
+              <a:solidFill>
+                <a:srgbClr val="FFFFFF"/>
+              </a:solidFill>
+              <a:latin typeface="Inter"/>
+            </a:endParaRPr>
           </a:p>
           <a:p>
             <a:pPr>
@@ -11871,7 +12810,7 @@
 </file>
 
 <file path=ppt/slides/slide3.xml><?xml version="1.0" encoding="utf-8"?>
-<p:sld xmlns:a="http://schemas.openxmlformats.org/drawingml/2006/main" xmlns:p="http://schemas.openxmlformats.org/presentationml/2006/main" xmlns:r="http://schemas.openxmlformats.org/officeDocument/2006/relationships">
+<p:sld xmlns:a="http://schemas.openxmlformats.org/drawingml/2006/main" xmlns:r="http://schemas.openxmlformats.org/officeDocument/2006/relationships" xmlns:p="http://schemas.openxmlformats.org/presentationml/2006/main">
   <p:cSld>
     <p:bg>
       <p:bgPr>
@@ -11887,7 +12826,14 @@
         <p:cNvGrpSpPr/>
         <p:nvPr/>
       </p:nvGrpSpPr>
-      <p:grpSpPr/>
+      <p:grpSpPr>
+        <a:xfrm>
+          <a:off x="0" y="0"/>
+          <a:ext cx="0" cy="0"/>
+          <a:chOff x="0" y="0"/>
+          <a:chExt cx="0" cy="0"/>
+        </a:xfrm>
+      </p:grpSpPr>
       <p:sp>
         <p:nvSpPr>
           <p:cNvPr id="2" name="Rectangle 1"/>
@@ -11911,7 +12857,7 @@
                 <a:srgbClr val="000000"/>
               </a:gs>
             </a:gsLst>
-            <a:lin scaled="0" ang="13800000"/>
+            <a:lin ang="13800000" scaled="0"/>
           </a:gradFill>
           <a:ln>
             <a:noFill/>
@@ -11936,6 +12882,7 @@
           <a:lstStyle/>
           <a:p>
             <a:pPr algn="ctr"/>
+            <a:endParaRPr/>
           </a:p>
         </p:txBody>
       </p:sp>
@@ -12034,7 +12981,7 @@
                 <a:srgbClr val="64D2FF"/>
               </a:gs>
             </a:gsLst>
-            <a:lin scaled="0" ang="0"/>
+            <a:lin ang="0" scaled="0"/>
           </a:gradFill>
           <a:ln>
             <a:noFill/>
@@ -12060,6 +13007,7 @@
           <a:lstStyle/>
           <a:p>
             <a:pPr algn="ctr"/>
+            <a:endParaRPr/>
           </a:p>
         </p:txBody>
       </p:sp>
@@ -12112,6 +13060,7 @@
           <a:lstStyle/>
           <a:p>
             <a:pPr algn="ctr"/>
+            <a:endParaRPr/>
           </a:p>
         </p:txBody>
       </p:sp>
@@ -12265,7 +13214,7 @@
                 <a:srgbClr val="0E2A52"/>
               </a:gs>
             </a:gsLst>
-            <a:lin scaled="0" ang="13800000"/>
+            <a:lin ang="13800000" scaled="0"/>
           </a:gradFill>
           <a:ln>
             <a:noFill/>
@@ -12291,6 +13240,7 @@
           <a:lstStyle/>
           <a:p>
             <a:pPr algn="ctr"/>
+            <a:endParaRPr/>
           </a:p>
         </p:txBody>
       </p:sp>
@@ -12428,7 +13378,7 @@
 </file>
 
 <file path=ppt/slides/slide4.xml><?xml version="1.0" encoding="utf-8"?>
-<p:sld xmlns:a="http://schemas.openxmlformats.org/drawingml/2006/main" xmlns:p="http://schemas.openxmlformats.org/presentationml/2006/main" xmlns:r="http://schemas.openxmlformats.org/officeDocument/2006/relationships">
+<p:sld xmlns:a="http://schemas.openxmlformats.org/drawingml/2006/main" xmlns:r="http://schemas.openxmlformats.org/officeDocument/2006/relationships" xmlns:p="http://schemas.openxmlformats.org/presentationml/2006/main">
   <p:cSld>
     <p:bg>
       <p:bgPr>
@@ -12444,7 +13394,14 @@
         <p:cNvGrpSpPr/>
         <p:nvPr/>
       </p:nvGrpSpPr>
-      <p:grpSpPr/>
+      <p:grpSpPr>
+        <a:xfrm>
+          <a:off x="0" y="0"/>
+          <a:ext cx="0" cy="0"/>
+          <a:chOff x="0" y="0"/>
+          <a:chExt cx="0" cy="0"/>
+        </a:xfrm>
+      </p:grpSpPr>
       <p:sp>
         <p:nvSpPr>
           <p:cNvPr id="2" name="Rectangle 1"/>
@@ -12468,7 +13425,7 @@
                 <a:srgbClr val="000000"/>
               </a:gs>
             </a:gsLst>
-            <a:lin scaled="0" ang="13800000"/>
+            <a:lin ang="13800000" scaled="0"/>
           </a:gradFill>
           <a:ln>
             <a:noFill/>
@@ -12493,6 +13450,7 @@
           <a:lstStyle/>
           <a:p>
             <a:pPr algn="ctr"/>
+            <a:endParaRPr/>
           </a:p>
         </p:txBody>
       </p:sp>
@@ -12591,7 +13549,7 @@
                 <a:srgbClr val="64D2FF"/>
               </a:gs>
             </a:gsLst>
-            <a:lin scaled="0" ang="0"/>
+            <a:lin ang="0" scaled="0"/>
           </a:gradFill>
           <a:ln>
             <a:noFill/>
@@ -12617,6 +13575,7 @@
           <a:lstStyle/>
           <a:p>
             <a:pPr algn="ctr"/>
+            <a:endParaRPr/>
           </a:p>
         </p:txBody>
       </p:sp>
@@ -12704,6 +13663,7 @@
           <a:lstStyle/>
           <a:p>
             <a:pPr algn="ctr"/>
+            <a:endParaRPr/>
           </a:p>
         </p:txBody>
       </p:sp>
@@ -12846,6 +13806,7 @@
           <a:lstStyle/>
           <a:p>
             <a:pPr algn="ctr"/>
+            <a:endParaRPr/>
           </a:p>
         </p:txBody>
       </p:sp>
@@ -12988,6 +13949,7 @@
           <a:lstStyle/>
           <a:p>
             <a:pPr algn="ctr"/>
+            <a:endParaRPr/>
           </a:p>
         </p:txBody>
       </p:sp>
@@ -13090,7 +14052,7 @@
 </file>
 
 <file path=ppt/slides/slide5.xml><?xml version="1.0" encoding="utf-8"?>
-<p:sld xmlns:a="http://schemas.openxmlformats.org/drawingml/2006/main" xmlns:p="http://schemas.openxmlformats.org/presentationml/2006/main" xmlns:r="http://schemas.openxmlformats.org/officeDocument/2006/relationships">
+<p:sld xmlns:a="http://schemas.openxmlformats.org/drawingml/2006/main" xmlns:r="http://schemas.openxmlformats.org/officeDocument/2006/relationships" xmlns:p="http://schemas.openxmlformats.org/presentationml/2006/main">
   <p:cSld>
     <p:bg>
       <p:bgPr>
@@ -13106,7 +14068,14 @@
         <p:cNvGrpSpPr/>
         <p:nvPr/>
       </p:nvGrpSpPr>
-      <p:grpSpPr/>
+      <p:grpSpPr>
+        <a:xfrm>
+          <a:off x="0" y="0"/>
+          <a:ext cx="0" cy="0"/>
+          <a:chOff x="0" y="0"/>
+          <a:chExt cx="0" cy="0"/>
+        </a:xfrm>
+      </p:grpSpPr>
       <p:sp>
         <p:nvSpPr>
           <p:cNvPr id="2" name="Rectangle 1"/>
@@ -13130,7 +14099,7 @@
                 <a:srgbClr val="000000"/>
               </a:gs>
             </a:gsLst>
-            <a:lin scaled="0" ang="13800000"/>
+            <a:lin ang="13800000" scaled="0"/>
           </a:gradFill>
           <a:ln>
             <a:noFill/>
@@ -13155,6 +14124,7 @@
           <a:lstStyle/>
           <a:p>
             <a:pPr algn="ctr"/>
+            <a:endParaRPr/>
           </a:p>
         </p:txBody>
       </p:sp>
@@ -13253,7 +14223,7 @@
                 <a:srgbClr val="64D2FF"/>
               </a:gs>
             </a:gsLst>
-            <a:lin scaled="0" ang="0"/>
+            <a:lin ang="0" scaled="0"/>
           </a:gradFill>
           <a:ln>
             <a:noFill/>
@@ -13279,6 +14249,7 @@
           <a:lstStyle/>
           <a:p>
             <a:pPr algn="ctr"/>
+            <a:endParaRPr/>
           </a:p>
         </p:txBody>
       </p:sp>
@@ -13362,7 +14333,7 @@
 </file>
 
 <file path=ppt/slides/slide6.xml><?xml version="1.0" encoding="utf-8"?>
-<p:sld xmlns:a="http://schemas.openxmlformats.org/drawingml/2006/main" xmlns:p="http://schemas.openxmlformats.org/presentationml/2006/main" xmlns:r="http://schemas.openxmlformats.org/officeDocument/2006/relationships">
+<p:sld xmlns:a="http://schemas.openxmlformats.org/drawingml/2006/main" xmlns:r="http://schemas.openxmlformats.org/officeDocument/2006/relationships" xmlns:p="http://schemas.openxmlformats.org/presentationml/2006/main">
   <p:cSld>
     <p:bg>
       <p:bgPr>
@@ -13378,7 +14349,14 @@
         <p:cNvGrpSpPr/>
         <p:nvPr/>
       </p:nvGrpSpPr>
-      <p:grpSpPr/>
+      <p:grpSpPr>
+        <a:xfrm>
+          <a:off x="0" y="0"/>
+          <a:ext cx="0" cy="0"/>
+          <a:chOff x="0" y="0"/>
+          <a:chExt cx="0" cy="0"/>
+        </a:xfrm>
+      </p:grpSpPr>
       <p:sp>
         <p:nvSpPr>
           <p:cNvPr id="2" name="Rectangle 1"/>
@@ -13402,7 +14380,7 @@
                 <a:srgbClr val="000000"/>
               </a:gs>
             </a:gsLst>
-            <a:lin scaled="0" ang="13800000"/>
+            <a:lin ang="13800000" scaled="0"/>
           </a:gradFill>
           <a:ln>
             <a:noFill/>
@@ -13427,6 +14405,7 @@
           <a:lstStyle/>
           <a:p>
             <a:pPr algn="ctr"/>
+            <a:endParaRPr/>
           </a:p>
         </p:txBody>
       </p:sp>
@@ -13525,7 +14504,7 @@
                 <a:srgbClr val="64D2FF"/>
               </a:gs>
             </a:gsLst>
-            <a:lin scaled="0" ang="0"/>
+            <a:lin ang="0" scaled="0"/>
           </a:gradFill>
           <a:ln>
             <a:noFill/>
@@ -13551,6 +14530,7 @@
           <a:lstStyle/>
           <a:p>
             <a:pPr algn="ctr"/>
+            <a:endParaRPr/>
           </a:p>
         </p:txBody>
       </p:sp>
@@ -13603,6 +14583,7 @@
           <a:lstStyle/>
           <a:p>
             <a:pPr algn="ctr"/>
+            <a:endParaRPr/>
           </a:p>
         </p:txBody>
       </p:sp>
@@ -13666,7 +14647,7 @@
                 <a:srgbClr val="64D2FF"/>
               </a:gs>
             </a:gsLst>
-            <a:lin scaled="0" ang="0"/>
+            <a:lin ang="0" scaled="0"/>
           </a:gradFill>
           <a:ln>
             <a:noFill/>
@@ -13692,6 +14673,7 @@
           <a:lstStyle/>
           <a:p>
             <a:pPr algn="ctr"/>
+            <a:endParaRPr/>
           </a:p>
         </p:txBody>
       </p:sp>
@@ -13814,6 +14796,7 @@
           <a:lstStyle/>
           <a:p>
             <a:pPr algn="ctr"/>
+            <a:endParaRPr/>
           </a:p>
         </p:txBody>
       </p:sp>
@@ -13877,7 +14860,7 @@
                 <a:srgbClr val="64D2FF"/>
               </a:gs>
             </a:gsLst>
-            <a:lin scaled="0" ang="0"/>
+            <a:lin ang="0" scaled="0"/>
           </a:gradFill>
           <a:ln>
             <a:noFill/>
@@ -13903,6 +14886,7 @@
           <a:lstStyle/>
           <a:p>
             <a:pPr algn="ctr"/>
+            <a:endParaRPr/>
           </a:p>
         </p:txBody>
       </p:sp>
@@ -14025,6 +15009,7 @@
           <a:lstStyle/>
           <a:p>
             <a:pPr algn="ctr"/>
+            <a:endParaRPr/>
           </a:p>
         </p:txBody>
       </p:sp>
@@ -14088,7 +15073,7 @@
                 <a:srgbClr val="64D2FF"/>
               </a:gs>
             </a:gsLst>
-            <a:lin scaled="0" ang="0"/>
+            <a:lin ang="0" scaled="0"/>
           </a:gradFill>
           <a:ln>
             <a:noFill/>
@@ -14114,6 +15099,7 @@
           <a:lstStyle/>
           <a:p>
             <a:pPr algn="ctr"/>
+            <a:endParaRPr/>
           </a:p>
         </p:txBody>
       </p:sp>
@@ -14236,6 +15222,7 @@
           <a:lstStyle/>
           <a:p>
             <a:pPr algn="ctr"/>
+            <a:endParaRPr/>
           </a:p>
         </p:txBody>
       </p:sp>
@@ -14299,7 +15286,7 @@
                 <a:srgbClr val="64D2FF"/>
               </a:gs>
             </a:gsLst>
-            <a:lin scaled="0" ang="0"/>
+            <a:lin ang="0" scaled="0"/>
           </a:gradFill>
           <a:ln>
             <a:noFill/>
@@ -14325,6 +15312,7 @@
           <a:lstStyle/>
           <a:p>
             <a:pPr algn="ctr"/>
+            <a:endParaRPr/>
           </a:p>
         </p:txBody>
       </p:sp>
@@ -14447,6 +15435,7 @@
           <a:lstStyle/>
           <a:p>
             <a:pPr algn="ctr"/>
+            <a:endParaRPr/>
           </a:p>
         </p:txBody>
       </p:sp>
@@ -14510,7 +15499,7 @@
                 <a:srgbClr val="64D2FF"/>
               </a:gs>
             </a:gsLst>
-            <a:lin scaled="0" ang="0"/>
+            <a:lin ang="0" scaled="0"/>
           </a:gradFill>
           <a:ln>
             <a:noFill/>
@@ -14536,6 +15525,7 @@
           <a:lstStyle/>
           <a:p>
             <a:pPr algn="ctr"/>
+            <a:endParaRPr/>
           </a:p>
         </p:txBody>
       </p:sp>
@@ -14618,7 +15608,7 @@
 </file>
 
 <file path=ppt/slides/slide7.xml><?xml version="1.0" encoding="utf-8"?>
-<p:sld xmlns:a="http://schemas.openxmlformats.org/drawingml/2006/main" xmlns:p="http://schemas.openxmlformats.org/presentationml/2006/main" xmlns:r="http://schemas.openxmlformats.org/officeDocument/2006/relationships">
+<p:sld xmlns:a="http://schemas.openxmlformats.org/drawingml/2006/main" xmlns:r="http://schemas.openxmlformats.org/officeDocument/2006/relationships" xmlns:p="http://schemas.openxmlformats.org/presentationml/2006/main">
   <p:cSld>
     <p:bg>
       <p:bgPr>
@@ -14634,7 +15624,14 @@
         <p:cNvGrpSpPr/>
         <p:nvPr/>
       </p:nvGrpSpPr>
-      <p:grpSpPr/>
+      <p:grpSpPr>
+        <a:xfrm>
+          <a:off x="0" y="0"/>
+          <a:ext cx="0" cy="0"/>
+          <a:chOff x="0" y="0"/>
+          <a:chExt cx="0" cy="0"/>
+        </a:xfrm>
+      </p:grpSpPr>
       <p:sp>
         <p:nvSpPr>
           <p:cNvPr id="2" name="Rectangle 1"/>
@@ -14658,7 +15655,7 @@
                 <a:srgbClr val="000000"/>
               </a:gs>
             </a:gsLst>
-            <a:lin scaled="0" ang="13800000"/>
+            <a:lin ang="13800000" scaled="0"/>
           </a:gradFill>
           <a:ln>
             <a:noFill/>
@@ -14683,6 +15680,7 @@
           <a:lstStyle/>
           <a:p>
             <a:pPr algn="ctr"/>
+            <a:endParaRPr/>
           </a:p>
         </p:txBody>
       </p:sp>
@@ -14781,7 +15779,7 @@
                 <a:srgbClr val="64D2FF"/>
               </a:gs>
             </a:gsLst>
-            <a:lin scaled="0" ang="0"/>
+            <a:lin ang="0" scaled="0"/>
           </a:gradFill>
           <a:ln>
             <a:noFill/>
@@ -14807,6 +15805,7 @@
           <a:lstStyle/>
           <a:p>
             <a:pPr algn="ctr"/>
+            <a:endParaRPr/>
           </a:p>
         </p:txBody>
       </p:sp>
@@ -14889,7 +15888,7 @@
 </file>
 
 <file path=ppt/slides/slide8.xml><?xml version="1.0" encoding="utf-8"?>
-<p:sld xmlns:a="http://schemas.openxmlformats.org/drawingml/2006/main" xmlns:p="http://schemas.openxmlformats.org/presentationml/2006/main" xmlns:r="http://schemas.openxmlformats.org/officeDocument/2006/relationships">
+<p:sld xmlns:a="http://schemas.openxmlformats.org/drawingml/2006/main" xmlns:r="http://schemas.openxmlformats.org/officeDocument/2006/relationships" xmlns:p="http://schemas.openxmlformats.org/presentationml/2006/main">
   <p:cSld>
     <p:bg>
       <p:bgPr>
@@ -14905,7 +15904,14 @@
         <p:cNvGrpSpPr/>
         <p:nvPr/>
       </p:nvGrpSpPr>
-      <p:grpSpPr/>
+      <p:grpSpPr>
+        <a:xfrm>
+          <a:off x="0" y="0"/>
+          <a:ext cx="0" cy="0"/>
+          <a:chOff x="0" y="0"/>
+          <a:chExt cx="0" cy="0"/>
+        </a:xfrm>
+      </p:grpSpPr>
       <p:sp>
         <p:nvSpPr>
           <p:cNvPr id="2" name="Rectangle 1"/>
@@ -14929,7 +15935,7 @@
                 <a:srgbClr val="000000"/>
               </a:gs>
             </a:gsLst>
-            <a:lin scaled="0" ang="13800000"/>
+            <a:lin ang="13800000" scaled="0"/>
           </a:gradFill>
           <a:ln>
             <a:noFill/>
@@ -14954,6 +15960,7 @@
           <a:lstStyle/>
           <a:p>
             <a:pPr algn="ctr"/>
+            <a:endParaRPr/>
           </a:p>
         </p:txBody>
       </p:sp>
@@ -15052,7 +16059,7 @@
                 <a:srgbClr val="64D2FF"/>
               </a:gs>
             </a:gsLst>
-            <a:lin scaled="0" ang="0"/>
+            <a:lin ang="0" scaled="0"/>
           </a:gradFill>
           <a:ln>
             <a:noFill/>
@@ -15078,6 +16085,7 @@
           <a:lstStyle/>
           <a:p>
             <a:pPr algn="ctr"/>
+            <a:endParaRPr/>
           </a:p>
         </p:txBody>
       </p:sp>
@@ -15130,6 +16138,7 @@
           <a:lstStyle/>
           <a:p>
             <a:pPr algn="ctr"/>
+            <a:endParaRPr/>
           </a:p>
         </p:txBody>
       </p:sp>
@@ -15283,7 +16292,7 @@
                 <a:srgbClr val="0E2A52"/>
               </a:gs>
             </a:gsLst>
-            <a:lin scaled="0" ang="13800000"/>
+            <a:lin ang="13800000" scaled="0"/>
           </a:gradFill>
           <a:ln>
             <a:noFill/>
@@ -15309,6 +16318,7 @@
           <a:lstStyle/>
           <a:p>
             <a:pPr algn="ctr"/>
+            <a:endParaRPr/>
           </a:p>
         </p:txBody>
       </p:sp>
@@ -15446,7 +16456,7 @@
 </file>
 
 <file path=ppt/slides/slide9.xml><?xml version="1.0" encoding="utf-8"?>
-<p:sld xmlns:a="http://schemas.openxmlformats.org/drawingml/2006/main" xmlns:p="http://schemas.openxmlformats.org/presentationml/2006/main" xmlns:r="http://schemas.openxmlformats.org/officeDocument/2006/relationships">
+<p:sld xmlns:a="http://schemas.openxmlformats.org/drawingml/2006/main" xmlns:r="http://schemas.openxmlformats.org/officeDocument/2006/relationships" xmlns:p="http://schemas.openxmlformats.org/presentationml/2006/main">
   <p:cSld>
     <p:bg>
       <p:bgPr>
@@ -15462,7 +16472,14 @@
         <p:cNvGrpSpPr/>
         <p:nvPr/>
       </p:nvGrpSpPr>
-      <p:grpSpPr/>
+      <p:grpSpPr>
+        <a:xfrm>
+          <a:off x="0" y="0"/>
+          <a:ext cx="0" cy="0"/>
+          <a:chOff x="0" y="0"/>
+          <a:chExt cx="0" cy="0"/>
+        </a:xfrm>
+      </p:grpSpPr>
       <p:sp>
         <p:nvSpPr>
           <p:cNvPr id="2" name="Rectangle 1"/>
@@ -15486,7 +16503,7 @@
                 <a:srgbClr val="000000"/>
               </a:gs>
             </a:gsLst>
-            <a:lin scaled="0" ang="13800000"/>
+            <a:lin ang="13800000" scaled="0"/>
           </a:gradFill>
           <a:ln>
             <a:noFill/>
@@ -15511,6 +16528,7 @@
           <a:lstStyle/>
           <a:p>
             <a:pPr algn="ctr"/>
+            <a:endParaRPr/>
           </a:p>
         </p:txBody>
       </p:sp>
@@ -15609,7 +16627,7 @@
                 <a:srgbClr val="64D2FF"/>
               </a:gs>
             </a:gsLst>
-            <a:lin scaled="0" ang="0"/>
+            <a:lin ang="0" scaled="0"/>
           </a:gradFill>
           <a:ln>
             <a:noFill/>
@@ -15635,6 +16653,7 @@
           <a:lstStyle/>
           <a:p>
             <a:pPr algn="ctr"/>
+            <a:endParaRPr/>
           </a:p>
         </p:txBody>
       </p:sp>
@@ -15663,7 +16682,7 @@
                 <a:srgbClr val="061224"/>
               </a:gs>
             </a:gsLst>
-            <a:lin scaled="0" ang="0"/>
+            <a:lin ang="0" scaled="0"/>
           </a:gradFill>
           <a:ln>
             <a:noFill/>
@@ -15689,6 +16708,7 @@
           <a:lstStyle/>
           <a:p>
             <a:pPr algn="ctr"/>
+            <a:endParaRPr/>
           </a:p>
         </p:txBody>
       </p:sp>
@@ -15807,7 +16827,7 @@
           </a:fontRef>
         </p:style>
         <p:txBody>
-          <a:bodyPr rtlCol="0" anchor="ctr" wrap="square"/>
+          <a:bodyPr wrap="square" rtlCol="0" anchor="ctr"/>
           <a:lstStyle/>
           <a:p>
             <a:pPr algn="ctr"/>
@@ -15868,7 +16888,7 @@
           </a:fontRef>
         </p:style>
         <p:txBody>
-          <a:bodyPr rtlCol="0" anchor="ctr" wrap="square"/>
+          <a:bodyPr wrap="square" rtlCol="0" anchor="ctr"/>
           <a:lstStyle/>
           <a:p>
             <a:pPr algn="ctr"/>
@@ -15929,7 +16949,7 @@
           </a:fontRef>
         </p:style>
         <p:txBody>
-          <a:bodyPr rtlCol="0" anchor="ctr" wrap="square"/>
+          <a:bodyPr wrap="square" rtlCol="0" anchor="ctr"/>
           <a:lstStyle/>
           <a:p>
             <a:pPr algn="ctr"/>
@@ -15990,7 +17010,7 @@
           </a:fontRef>
         </p:style>
         <p:txBody>
-          <a:bodyPr rtlCol="0" anchor="ctr" wrap="square"/>
+          <a:bodyPr wrap="square" rtlCol="0" anchor="ctr"/>
           <a:lstStyle/>
           <a:p>
             <a:pPr algn="ctr"/>
@@ -16051,7 +17071,7 @@
           </a:fontRef>
         </p:style>
         <p:txBody>
-          <a:bodyPr rtlCol="0" anchor="ctr" wrap="square"/>
+          <a:bodyPr wrap="square" rtlCol="0" anchor="ctr"/>
           <a:lstStyle/>
           <a:p>
             <a:pPr algn="ctr"/>
@@ -16112,7 +17132,7 @@
           </a:fontRef>
         </p:style>
         <p:txBody>
-          <a:bodyPr rtlCol="0" anchor="ctr" wrap="square"/>
+          <a:bodyPr wrap="square" rtlCol="0" anchor="ctr"/>
           <a:lstStyle/>
           <a:p>
             <a:pPr algn="ctr"/>
